--- a/papel-misionero/marcas-finalistas.pptx
+++ b/papel-misionero/marcas-finalistas.pptx
@@ -124,12 +124,12 @@
   <p:extLst>
     <p:ext uri="{521415D9-36F7-43E2-AB2F-B90AF26B5E84}">
       <p14:sectionLst xmlns:p14="http://schemas.microsoft.com/office/powerpoint/2010/main">
-        <p14:section name="Portada" id="{4f129cb4-890a-919b-5585-a171b5330054}">
+        <p14:section name="Portada" id="{03651499-aad9-2b07-cb4b-92ca5846e7cd}">
           <p14:sldIdLst>
             <p14:sldId id="256"/>
           </p14:sldIdLst>
         </p14:section>
-        <p14:section name="La P" id="{5ff21ae8-2fff-9d22-d75a-0219831a0531}">
+        <p14:section name="La P" id="{f00f7a12-5d90-3596-57a3-5e7dfeb4c86d}">
           <p14:sldIdLst>
             <p14:sldId id="257"/>
             <p14:sldId id="258"/>
@@ -138,7 +138,7 @@
             <p14:sldId id="261"/>
           </p14:sldIdLst>
         </p14:section>
-        <p14:section name="Sellos y contenedores" id="{6f1c2f25-1d2e-f1fd-d128-09e82cf8f45c}">
+        <p14:section name="Sellos y contenedores" id="{144e3aa2-dd7f-2802-533d-713f8568edb9}">
           <p14:sldIdLst>
             <p14:sldId id="262"/>
             <p14:sldId id="263"/>
@@ -148,7 +148,7 @@
             <p14:sldId id="267"/>
           </p14:sldIdLst>
         </p14:section>
-        <p14:section name="Árbol solo" id="{3350ea86-6c26-bd1c-5312-49a5d7cebee9}">
+        <p14:section name="Árbol solo" id="{f3cfc87d-b773-172c-58cc-71250214605a}">
           <p14:sldIdLst>
             <p14:sldId id="268"/>
             <p14:sldId id="269"/>
@@ -2232,42 +2232,6 @@
           </a:p>
         </p:txBody>
       </p:sp>
-      <p:sp>
-        <p:nvSpPr>
-          <p:cNvPr id="4" name="Text 0"/>
-          <p:cNvSpPr/>
-          <p:nvPr/>
-        </p:nvSpPr>
-        <p:spPr>
-          <a:xfrm>
-            <a:off x="731520" y="6035040"/>
-            <a:ext cx="7315200" cy="365760"/>
-          </a:xfrm>
-          <a:prstGeom prst="rect">
-            <a:avLst/>
-          </a:prstGeom>
-          <a:noFill/>
-          <a:ln/>
-        </p:spPr>
-        <p:txBody>
-          <a:bodyPr wrap="square" lIns="0" tIns="0" rIns="0" bIns="0" rtlCol="0" anchor="ctr"/>
-          <a:lstStyle/>
-          <a:p>
-            <a:pPr indent="0" marL="0">
-              <a:buNone/>
-            </a:pPr>
-            <a:r>
-              <a:rPr lang="en-US" sz="1100" spc="400" kern="0" dirty="0">
-                <a:solidFill>
-                  <a:schemeClr val="accent5"/>
-                </a:solidFill>
-              </a:rPr>
-              <a:t>ESTUDIO 83 · PARA CARTOCOR</a:t>
-            </a:r>
-            <a:endParaRPr lang="en-US" sz="1100" dirty="0"/>
-          </a:p>
-        </p:txBody>
-      </p:sp>
     </p:spTree>
   </p:cSld>
   <p:clrMapOvr>
@@ -2557,7 +2521,7 @@
                   <a:schemeClr val="accent6"/>
                 </a:solidFill>
               </a:rPr>
-              <a:t>ESTUDIO 83 · PAPEL MISIONERO</a:t>
+              <a:t>PAPEL MISIONERO</a:t>
             </a:r>
             <a:endParaRPr lang="en-US" sz="1000" dirty="0"/>
           </a:p>

--- a/papel-misionero/marcas-finalistas.pptx
+++ b/papel-misionero/marcas-finalistas.pptx
@@ -23,9 +23,12 @@
     <p:sldId id="271" r:id="rId17"/>
     <p:sldId id="272" r:id="rId18"/>
     <p:sldId id="273" r:id="rId19"/>
+    <p:sldId id="274" r:id="rId20"/>
+    <p:sldId id="275" r:id="rId21"/>
+    <p:sldId id="276" r:id="rId22"/>
   </p:sldIdLst>
   <p:notesMasterIdLst>
-    <p:notesMasterId r:id="rId20"/>
+    <p:notesMasterId r:id="rId23"/>
   </p:notesMasterIdLst>
   <p:sldSz cx="12192000" cy="6858000"/>
   <p:notesSz cx="6858000" cy="12192000"/>
@@ -124,38 +127,45 @@
   <p:extLst>
     <p:ext uri="{521415D9-36F7-43E2-AB2F-B90AF26B5E84}">
       <p14:sectionLst xmlns:p14="http://schemas.microsoft.com/office/powerpoint/2010/main">
-        <p14:section name="Portada" id="{03651499-aad9-2b07-cb4b-92ca5846e7cd}">
+        <p14:section name="Portada" id="{6e48cb91-f32d-3918-b54c-7c712739917f}">
           <p14:sldIdLst>
             <p14:sldId id="256"/>
           </p14:sldIdLst>
         </p14:section>
-        <p14:section name="La P" id="{f00f7a12-5d90-3596-57a3-5e7dfeb4c86d}">
+        <p14:section name="Benchmark" id="{f1e0886a-009c-8f7d-d204-0093a61b66ac}">
           <p14:sldIdLst>
             <p14:sldId id="257"/>
             <p14:sldId id="258"/>
             <p14:sldId id="259"/>
+          </p14:sldIdLst>
+        </p14:section>
+        <p14:section name="La P" id="{bf965b05-fd78-98e7-4974-47772c8d1466}">
+          <p14:sldIdLst>
             <p14:sldId id="260"/>
             <p14:sldId id="261"/>
-          </p14:sldIdLst>
-        </p14:section>
-        <p14:section name="Sellos y contenedores" id="{144e3aa2-dd7f-2802-533d-713f8568edb9}">
-          <p14:sldIdLst>
             <p14:sldId id="262"/>
             <p14:sldId id="263"/>
             <p14:sldId id="264"/>
+          </p14:sldIdLst>
+        </p14:section>
+        <p14:section name="Sellos y contenedores" id="{d5c36879-0084-dcd1-f01d-f31d1d863340}">
+          <p14:sldIdLst>
             <p14:sldId id="265"/>
             <p14:sldId id="266"/>
             <p14:sldId id="267"/>
-          </p14:sldIdLst>
-        </p14:section>
-        <p14:section name="Árbol solo" id="{f3cfc87d-b773-172c-58cc-71250214605a}">
-          <p14:sldIdLst>
             <p14:sldId id="268"/>
             <p14:sldId id="269"/>
             <p14:sldId id="270"/>
+          </p14:sldIdLst>
+        </p14:section>
+        <p14:section name="Árbol solo" id="{67668bb5-d2be-53e7-b8ef-eb3cb6e6c991}">
+          <p14:sldIdLst>
             <p14:sldId id="271"/>
             <p14:sldId id="272"/>
             <p14:sldId id="273"/>
+            <p14:sldId id="274"/>
+            <p14:sldId id="275"/>
+            <p14:sldId id="276"/>
           </p14:sldIdLst>
         </p14:section>
       </p14:sectionLst>
@@ -650,7 +660,7 @@
           <a:p>
             <a:r>
               <a:rPr lang="en-US" dirty="0"/>
-              <a:t>Corte del tronco (N2), sección Sellos y contenedores.</a:t>
+              <a:t/>
             </a:r>
             <a:endParaRPr lang="en-US" dirty="0"/>
           </a:p>
@@ -738,7 +748,7 @@
           <a:p>
             <a:r>
               <a:rPr lang="en-US" dirty="0"/>
-              <a:t>Sello: anillos y pino (N4), sección Sellos y contenedores.</a:t>
+              <a:t>Araucaria en arco (A3), sección Sellos y contenedores.</a:t>
             </a:r>
             <a:endParaRPr lang="en-US" dirty="0"/>
           </a:p>
@@ -826,7 +836,7 @@
           <a:p>
             <a:r>
               <a:rPr lang="en-US" dirty="0"/>
-              <a:t>Sello: anillos y araucaria (N5), sección Sellos y contenedores.</a:t>
+              <a:t>Araucaria en sello (A5), sección Sellos y contenedores.</a:t>
             </a:r>
             <a:endParaRPr lang="en-US" dirty="0"/>
           </a:p>
@@ -914,7 +924,7 @@
           <a:p>
             <a:r>
               <a:rPr lang="en-US" dirty="0"/>
-              <a:t/>
+              <a:t>Corte del tronco (N2), sección Sellos y contenedores.</a:t>
             </a:r>
             <a:endParaRPr lang="en-US" dirty="0"/>
           </a:p>
@@ -1002,7 +1012,7 @@
           <a:p>
             <a:r>
               <a:rPr lang="en-US" dirty="0"/>
-              <a:t>Araucaria de ramas (A2), sección Árbol solo.</a:t>
+              <a:t>Sello: anillos y pino (N4), sección Sellos y contenedores.</a:t>
             </a:r>
             <a:endParaRPr lang="en-US" dirty="0"/>
           </a:p>
@@ -1090,7 +1100,7 @@
           <a:p>
             <a:r>
               <a:rPr lang="en-US" dirty="0"/>
-              <a:t>Araucaria (P4), sección Árbol solo.</a:t>
+              <a:t>Sello: anillos y araucaria (N5), sección Sellos y contenedores.</a:t>
             </a:r>
             <a:endParaRPr lang="en-US" dirty="0"/>
           </a:p>
@@ -1178,7 +1188,7 @@
           <a:p>
             <a:r>
               <a:rPr lang="en-US" dirty="0"/>
-              <a:t>Pino (P1), sección Árbol solo.</a:t>
+              <a:t/>
             </a:r>
             <a:endParaRPr lang="en-US" dirty="0"/>
           </a:p>
@@ -1266,7 +1276,7 @@
           <a:p>
             <a:r>
               <a:rPr lang="en-US" dirty="0"/>
-              <a:t>Pino pleno (P2), sección Árbol solo.</a:t>
+              <a:t>Araucaria de ramas (A2), sección Árbol solo.</a:t>
             </a:r>
             <a:endParaRPr lang="en-US" dirty="0"/>
           </a:p>
@@ -1354,7 +1364,7 @@
           <a:p>
             <a:r>
               <a:rPr lang="en-US" dirty="0"/>
-              <a:t>Trazo pesado (P3), sección Árbol solo.</a:t>
+              <a:t>Araucaria (P4), sección Árbol solo.</a:t>
             </a:r>
             <a:endParaRPr lang="en-US" dirty="0"/>
           </a:p>
@@ -1378,6 +1388,94 @@
             <a:fld id="{F7021451-1387-4CA6-816F-3879F97B5CBC}" type="slidenum">
               <a:rPr lang="en-US"/>
               <a:t>18</a:t>
+            </a:fld>
+            <a:endParaRPr lang="en-US"/>
+          </a:p>
+        </p:txBody>
+      </p:sp>
+    </p:spTree>
+    <p:extLst>
+      <p:ext uri="{BB962C8B-B14F-4D97-AF65-F5344CB8AC3E}">
+        <p14:creationId xmlns:p14="http://schemas.microsoft.com/office/powerpoint/2010/main" val="1024086991"/>
+      </p:ext>
+    </p:extLst>
+  </p:cSld>
+  <p:clrMapOvr>
+    <a:masterClrMapping/>
+  </p:clrMapOvr>
+</p:notes>
+</file>
+
+<file path=ppt/notesSlides/notesSlide19.xml><?xml version="1.0" encoding="utf-8"?>
+<p:notes xmlns:a="http://schemas.openxmlformats.org/drawingml/2006/main" xmlns:r="http://schemas.openxmlformats.org/officeDocument/2006/relationships" xmlns:p="http://schemas.openxmlformats.org/presentationml/2006/main">
+  <p:cSld>
+    <p:spTree>
+      <p:nvGrpSpPr>
+        <p:cNvPr id="1" name=""/>
+        <p:cNvGrpSpPr/>
+        <p:nvPr/>
+      </p:nvGrpSpPr>
+      <p:grpSpPr>
+        <a:xfrm>
+          <a:off x="0" y="0"/>
+          <a:ext cx="0" cy="0"/>
+          <a:chOff x="0" y="0"/>
+          <a:chExt cx="0" cy="0"/>
+        </a:xfrm>
+      </p:grpSpPr>
+      <p:sp>
+        <p:nvSpPr>
+          <p:cNvPr id="2" name="Slide Image Placeholder 1"/>
+          <p:cNvSpPr>
+            <a:spLocks noGrp="1" noRot="1" noChangeAspect="1"/>
+          </p:cNvSpPr>
+          <p:nvPr>
+            <p:ph type="sldImg"/>
+          </p:nvPr>
+        </p:nvSpPr>
+        <p:spPr/>
+      </p:sp>
+      <p:sp>
+        <p:nvSpPr>
+          <p:cNvPr id="3" name="Notes Placeholder 2"/>
+          <p:cNvSpPr>
+            <a:spLocks noGrp="1"/>
+          </p:cNvSpPr>
+          <p:nvPr>
+            <p:ph type="body" idx="1"/>
+          </p:nvPr>
+        </p:nvSpPr>
+        <p:spPr/>
+        <p:txBody>
+          <a:bodyPr/>
+          <a:lstStyle/>
+          <a:p>
+            <a:r>
+              <a:rPr lang="en-US" dirty="0"/>
+              <a:t>Pino (P1), sección Árbol solo.</a:t>
+            </a:r>
+            <a:endParaRPr lang="en-US" dirty="0"/>
+          </a:p>
+        </p:txBody>
+      </p:sp>
+      <p:sp>
+        <p:nvSpPr>
+          <p:cNvPr id="4" name="Slide Number Placeholder 3"/>
+          <p:cNvSpPr>
+            <a:spLocks noGrp="1"/>
+          </p:cNvSpPr>
+          <p:nvPr>
+            <p:ph type="sldNum" sz="quarter" idx="10"/>
+          </p:nvPr>
+        </p:nvSpPr>
+        <p:spPr/>
+        <p:txBody>
+          <a:bodyPr/>
+          <a:lstStyle/>
+          <a:p>
+            <a:fld id="{F7021451-1387-4CA6-816F-3879F97B5CBC}" type="slidenum">
+              <a:rPr lang="en-US"/>
+              <a:t>19</a:t>
             </a:fld>
             <a:endParaRPr lang="en-US"/>
           </a:p>
@@ -1484,6 +1582,182 @@
 </p:notes>
 </file>
 
+<file path=ppt/notesSlides/notesSlide20.xml><?xml version="1.0" encoding="utf-8"?>
+<p:notes xmlns:a="http://schemas.openxmlformats.org/drawingml/2006/main" xmlns:r="http://schemas.openxmlformats.org/officeDocument/2006/relationships" xmlns:p="http://schemas.openxmlformats.org/presentationml/2006/main">
+  <p:cSld>
+    <p:spTree>
+      <p:nvGrpSpPr>
+        <p:cNvPr id="1" name=""/>
+        <p:cNvGrpSpPr/>
+        <p:nvPr/>
+      </p:nvGrpSpPr>
+      <p:grpSpPr>
+        <a:xfrm>
+          <a:off x="0" y="0"/>
+          <a:ext cx="0" cy="0"/>
+          <a:chOff x="0" y="0"/>
+          <a:chExt cx="0" cy="0"/>
+        </a:xfrm>
+      </p:grpSpPr>
+      <p:sp>
+        <p:nvSpPr>
+          <p:cNvPr id="2" name="Slide Image Placeholder 1"/>
+          <p:cNvSpPr>
+            <a:spLocks noGrp="1" noRot="1" noChangeAspect="1"/>
+          </p:cNvSpPr>
+          <p:nvPr>
+            <p:ph type="sldImg"/>
+          </p:nvPr>
+        </p:nvSpPr>
+        <p:spPr/>
+      </p:sp>
+      <p:sp>
+        <p:nvSpPr>
+          <p:cNvPr id="3" name="Notes Placeholder 2"/>
+          <p:cNvSpPr>
+            <a:spLocks noGrp="1"/>
+          </p:cNvSpPr>
+          <p:nvPr>
+            <p:ph type="body" idx="1"/>
+          </p:nvPr>
+        </p:nvSpPr>
+        <p:spPr/>
+        <p:txBody>
+          <a:bodyPr/>
+          <a:lstStyle/>
+          <a:p>
+            <a:r>
+              <a:rPr lang="en-US" dirty="0"/>
+              <a:t>Pino pleno (P2), sección Árbol solo.</a:t>
+            </a:r>
+            <a:endParaRPr lang="en-US" dirty="0"/>
+          </a:p>
+        </p:txBody>
+      </p:sp>
+      <p:sp>
+        <p:nvSpPr>
+          <p:cNvPr id="4" name="Slide Number Placeholder 3"/>
+          <p:cNvSpPr>
+            <a:spLocks noGrp="1"/>
+          </p:cNvSpPr>
+          <p:nvPr>
+            <p:ph type="sldNum" sz="quarter" idx="10"/>
+          </p:nvPr>
+        </p:nvSpPr>
+        <p:spPr/>
+        <p:txBody>
+          <a:bodyPr/>
+          <a:lstStyle/>
+          <a:p>
+            <a:fld id="{F7021451-1387-4CA6-816F-3879F97B5CBC}" type="slidenum">
+              <a:rPr lang="en-US"/>
+              <a:t>20</a:t>
+            </a:fld>
+            <a:endParaRPr lang="en-US"/>
+          </a:p>
+        </p:txBody>
+      </p:sp>
+    </p:spTree>
+    <p:extLst>
+      <p:ext uri="{BB962C8B-B14F-4D97-AF65-F5344CB8AC3E}">
+        <p14:creationId xmlns:p14="http://schemas.microsoft.com/office/powerpoint/2010/main" val="1024086991"/>
+      </p:ext>
+    </p:extLst>
+  </p:cSld>
+  <p:clrMapOvr>
+    <a:masterClrMapping/>
+  </p:clrMapOvr>
+</p:notes>
+</file>
+
+<file path=ppt/notesSlides/notesSlide21.xml><?xml version="1.0" encoding="utf-8"?>
+<p:notes xmlns:a="http://schemas.openxmlformats.org/drawingml/2006/main" xmlns:r="http://schemas.openxmlformats.org/officeDocument/2006/relationships" xmlns:p="http://schemas.openxmlformats.org/presentationml/2006/main">
+  <p:cSld>
+    <p:spTree>
+      <p:nvGrpSpPr>
+        <p:cNvPr id="1" name=""/>
+        <p:cNvGrpSpPr/>
+        <p:nvPr/>
+      </p:nvGrpSpPr>
+      <p:grpSpPr>
+        <a:xfrm>
+          <a:off x="0" y="0"/>
+          <a:ext cx="0" cy="0"/>
+          <a:chOff x="0" y="0"/>
+          <a:chExt cx="0" cy="0"/>
+        </a:xfrm>
+      </p:grpSpPr>
+      <p:sp>
+        <p:nvSpPr>
+          <p:cNvPr id="2" name="Slide Image Placeholder 1"/>
+          <p:cNvSpPr>
+            <a:spLocks noGrp="1" noRot="1" noChangeAspect="1"/>
+          </p:cNvSpPr>
+          <p:nvPr>
+            <p:ph type="sldImg"/>
+          </p:nvPr>
+        </p:nvSpPr>
+        <p:spPr/>
+      </p:sp>
+      <p:sp>
+        <p:nvSpPr>
+          <p:cNvPr id="3" name="Notes Placeholder 2"/>
+          <p:cNvSpPr>
+            <a:spLocks noGrp="1"/>
+          </p:cNvSpPr>
+          <p:nvPr>
+            <p:ph type="body" idx="1"/>
+          </p:nvPr>
+        </p:nvSpPr>
+        <p:spPr/>
+        <p:txBody>
+          <a:bodyPr/>
+          <a:lstStyle/>
+          <a:p>
+            <a:r>
+              <a:rPr lang="en-US" dirty="0"/>
+              <a:t>Trazo pesado (P3), sección Árbol solo.</a:t>
+            </a:r>
+            <a:endParaRPr lang="en-US" dirty="0"/>
+          </a:p>
+        </p:txBody>
+      </p:sp>
+      <p:sp>
+        <p:nvSpPr>
+          <p:cNvPr id="4" name="Slide Number Placeholder 3"/>
+          <p:cNvSpPr>
+            <a:spLocks noGrp="1"/>
+          </p:cNvSpPr>
+          <p:nvPr>
+            <p:ph type="sldNum" sz="quarter" idx="10"/>
+          </p:nvPr>
+        </p:nvSpPr>
+        <p:spPr/>
+        <p:txBody>
+          <a:bodyPr/>
+          <a:lstStyle/>
+          <a:p>
+            <a:fld id="{F7021451-1387-4CA6-816F-3879F97B5CBC}" type="slidenum">
+              <a:rPr lang="en-US"/>
+              <a:t>21</a:t>
+            </a:fld>
+            <a:endParaRPr lang="en-US"/>
+          </a:p>
+        </p:txBody>
+      </p:sp>
+    </p:spTree>
+    <p:extLst>
+      <p:ext uri="{BB962C8B-B14F-4D97-AF65-F5344CB8AC3E}">
+        <p14:creationId xmlns:p14="http://schemas.microsoft.com/office/powerpoint/2010/main" val="1024086991"/>
+      </p:ext>
+    </p:extLst>
+  </p:cSld>
+  <p:clrMapOvr>
+    <a:masterClrMapping/>
+  </p:clrMapOvr>
+</p:notes>
+</file>
+
 <file path=ppt/notesSlides/notesSlide3.xml><?xml version="1.0" encoding="utf-8"?>
 <p:notes xmlns:a="http://schemas.openxmlformats.org/drawingml/2006/main" xmlns:r="http://schemas.openxmlformats.org/officeDocument/2006/relationships" xmlns:p="http://schemas.openxmlformats.org/presentationml/2006/main">
   <p:cSld>
@@ -1530,7 +1804,7 @@
           <a:p>
             <a:r>
               <a:rPr lang="en-US" dirty="0"/>
-              <a:t>P monolínea con araucaria (A1), sección La P.</a:t>
+              <a:t/>
             </a:r>
             <a:endParaRPr lang="en-US" dirty="0"/>
           </a:p>
@@ -1618,7 +1892,7 @@
           <a:p>
             <a:r>
               <a:rPr lang="en-US" dirty="0"/>
-              <a:t>P con araucaria calada (A4), sección La P.</a:t>
+              <a:t/>
             </a:r>
             <a:endParaRPr lang="en-US" dirty="0"/>
           </a:p>
@@ -1706,7 +1980,7 @@
           <a:p>
             <a:r>
               <a:rPr lang="en-US" dirty="0"/>
-              <a:t>P espiral (N1), sección La P.</a:t>
+              <a:t/>
             </a:r>
             <a:endParaRPr lang="en-US" dirty="0"/>
           </a:p>
@@ -1794,7 +2068,7 @@
           <a:p>
             <a:r>
               <a:rPr lang="en-US" dirty="0"/>
-              <a:t>P de anillos (N3), sección La P.</a:t>
+              <a:t>P monolínea con araucaria (A1), sección La P.</a:t>
             </a:r>
             <a:endParaRPr lang="en-US" dirty="0"/>
           </a:p>
@@ -1882,7 +2156,7 @@
           <a:p>
             <a:r>
               <a:rPr lang="en-US" dirty="0"/>
-              <a:t/>
+              <a:t>P con araucaria calada (A4), sección La P.</a:t>
             </a:r>
             <a:endParaRPr lang="en-US" dirty="0"/>
           </a:p>
@@ -1970,7 +2244,7 @@
           <a:p>
             <a:r>
               <a:rPr lang="en-US" dirty="0"/>
-              <a:t>Araucaria en arco (A3), sección Sellos y contenedores.</a:t>
+              <a:t>P espiral (N1), sección La P.</a:t>
             </a:r>
             <a:endParaRPr lang="en-US" dirty="0"/>
           </a:p>
@@ -2058,7 +2332,7 @@
           <a:p>
             <a:r>
               <a:rPr lang="en-US" dirty="0"/>
-              <a:t>Araucaria en sello (A5), sección Sellos y contenedores.</a:t>
+              <a:t>P de anillos (N3), sección La P.</a:t>
             </a:r>
             <a:endParaRPr lang="en-US" dirty="0"/>
           </a:p>
@@ -2353,7 +2627,7 @@
         <p:spPr>
           <a:xfrm>
             <a:off x="731520" y="3931920"/>
-            <a:ext cx="10698480" cy="731520"/>
+            <a:ext cx="8778240" cy="1645920"/>
           </a:xfrm>
           <a:prstGeom prst="rect">
             <a:avLst/>
@@ -2365,8 +2639,11 @@
           <a:bodyPr wrap="square" rtlCol="0"/>
           <a:lstStyle>
             <a:lvl1pPr indent="0" marL="0">
-              <a:buNone/>
-              <a:defRPr lang="en-US" sz="2000" dirty="0">
+              <a:lnSpc>
+                <a:spcPct val="120000"/>
+              </a:lnSpc>
+              <a:buNone/>
+              <a:defRPr lang="en-US" sz="1800" dirty="0">
                 <a:solidFill>
                   <a:schemeClr val="accent5"/>
                 </a:solidFill>
@@ -2375,9 +2652,12 @@
           </a:lstStyle>
           <a:p>
             <a:pPr indent="0" marL="0">
-              <a:buNone/>
-            </a:pPr>
-            <a:endParaRPr lang="en-US" sz="2000" dirty="0"/>
+              <a:lnSpc>
+                <a:spcPct val="120000"/>
+              </a:lnSpc>
+              <a:buNone/>
+            </a:pPr>
+            <a:endParaRPr lang="en-US" sz="1800" dirty="0"/>
           </a:p>
         </p:txBody>
       </p:sp>
@@ -2494,6 +2774,51 @@
       <p:sp>
         <p:nvSpPr>
           <p:cNvPr id="4" name="Text 0"/>
+          <p:cNvSpPr/>
+          <p:nvPr>
+            <p:ph idx="102" type="body" hasCustomPrompt="1"/>
+          </p:nvPr>
+        </p:nvSpPr>
+        <p:spPr>
+          <a:xfrm>
+            <a:off x="457200" y="1417320"/>
+            <a:ext cx="11247120" cy="777240"/>
+          </a:xfrm>
+          <a:prstGeom prst="rect">
+            <a:avLst/>
+          </a:prstGeom>
+          <a:noFill/>
+          <a:ln/>
+        </p:spPr>
+        <p:txBody>
+          <a:bodyPr wrap="square" rtlCol="0"/>
+          <a:lstStyle>
+            <a:lvl1pPr indent="0" marL="0">
+              <a:lnSpc>
+                <a:spcPct val="115000"/>
+              </a:lnSpc>
+              <a:buNone/>
+              <a:defRPr lang="en-US" sz="1500" dirty="0">
+                <a:solidFill>
+                  <a:schemeClr val="tx1"/>
+                </a:solidFill>
+              </a:defRPr>
+            </a:lvl1pPr>
+          </a:lstStyle>
+          <a:p>
+            <a:pPr indent="0" marL="0">
+              <a:lnSpc>
+                <a:spcPct val="115000"/>
+              </a:lnSpc>
+              <a:buNone/>
+            </a:pPr>
+            <a:endParaRPr lang="en-US" sz="1500" dirty="0"/>
+          </a:p>
+        </p:txBody>
+      </p:sp>
+      <p:sp>
+        <p:nvSpPr>
+          <p:cNvPr id="5" name="Text 0"/>
           <p:cNvSpPr/>
           <p:nvPr/>
         </p:nvSpPr>
@@ -3028,51 +3353,89 @@
           <p:cNvPr id="2" name="Text 0"/>
           <p:cNvSpPr/>
           <p:nvPr>
-            <p:ph idx="100" type="title" hasCustomPrompt="1"/>
-          </p:nvPr>
-        </p:nvSpPr>
-        <p:spPr>
-          <a:xfrm>
-            <a:off x="457200" y="365760"/>
-            <a:ext cx="8686800" cy="685800"/>
-          </a:xfrm>
-          <a:prstGeom prst="rect">
-            <a:avLst/>
-          </a:prstGeom>
-          <a:noFill/>
-          <a:ln/>
-        </p:spPr>
-        <p:txBody>
-          <a:bodyPr wrap="square" lIns="0" tIns="0" rIns="0" bIns="0" rtlCol="0" anchor="ctr"/>
+            <p:ph idx="100" type="body" hasCustomPrompt="1"/>
+          </p:nvPr>
+        </p:nvSpPr>
+        <p:spPr>
+          <a:xfrm>
+            <a:off x="731520" y="2011680"/>
+            <a:ext cx="5486400" cy="457200"/>
+          </a:xfrm>
+          <a:prstGeom prst="rect">
+            <a:avLst/>
+          </a:prstGeom>
+          <a:noFill/>
+          <a:ln/>
+        </p:spPr>
+        <p:txBody>
+          <a:bodyPr wrap="square" lIns="0" tIns="0" rIns="0" bIns="0" rtlCol="0"/>
+          <a:lstStyle/>
+          <a:p>
+            <a:pPr indent="0" marL="0">
+              <a:buNone/>
+            </a:pPr>
+            <a:r>
+              <a:rPr lang="en-US" sz="1400" spc="400" kern="0" dirty="0">
+                <a:solidFill>
+                  <a:schemeClr val="accent1"/>
+                </a:solidFill>
+              </a:rPr>
+              <a:t>SECCIÓN 2 · 5 PROPUESTAS</a:t>
+            </a:r>
+            <a:endParaRPr lang="en-US" sz="1400" dirty="0"/>
+          </a:p>
+        </p:txBody>
+      </p:sp>
+      <p:sp>
+        <p:nvSpPr>
+          <p:cNvPr id="3" name="Text 0"/>
+          <p:cNvSpPr/>
+          <p:nvPr>
+            <p:ph idx="101" type="title" hasCustomPrompt="1"/>
+          </p:nvPr>
+        </p:nvSpPr>
+        <p:spPr>
+          <a:xfrm>
+            <a:off x="731520" y="2560320"/>
+            <a:ext cx="10698480" cy="1280160"/>
+          </a:xfrm>
+          <a:prstGeom prst="rect">
+            <a:avLst/>
+          </a:prstGeom>
+          <a:noFill/>
+          <a:ln/>
+        </p:spPr>
+        <p:txBody>
+          <a:bodyPr wrap="square" lIns="0" tIns="0" rIns="0" bIns="0" rtlCol="0" anchor="t"/>
           <a:lstStyle/>
           <a:p>
             <a:pPr algn="l" indent="0" marL="0">
               <a:buNone/>
             </a:pPr>
             <a:r>
-              <a:rPr lang="en-US" sz="3000" b="1" dirty="0">
-                <a:solidFill>
-                  <a:schemeClr val="tx1"/>
-                </a:solidFill>
-              </a:rPr>
-              <a:t>Corte del tronco</a:t>
-            </a:r>
-            <a:endParaRPr lang="en-US" sz="3000" dirty="0"/>
-          </a:p>
-        </p:txBody>
-      </p:sp>
-      <p:sp>
-        <p:nvSpPr>
-          <p:cNvPr id="3" name="Text 0"/>
-          <p:cNvSpPr/>
-          <p:nvPr>
-            <p:ph idx="101" type="body" hasCustomPrompt="1"/>
-          </p:nvPr>
-        </p:nvSpPr>
-        <p:spPr>
-          <a:xfrm>
-            <a:off x="457200" y="1005840"/>
-            <a:ext cx="8686800" cy="365760"/>
+              <a:rPr lang="en-US" sz="5400" b="1" dirty="0">
+                <a:solidFill>
+                  <a:schemeClr val="bg2"/>
+                </a:solidFill>
+              </a:rPr>
+              <a:t>Sellos y contenedores</a:t>
+            </a:r>
+            <a:endParaRPr lang="en-US" sz="5400" dirty="0"/>
+          </a:p>
+        </p:txBody>
+      </p:sp>
+      <p:sp>
+        <p:nvSpPr>
+          <p:cNvPr id="4" name="Text 0"/>
+          <p:cNvSpPr/>
+          <p:nvPr>
+            <p:ph idx="102" type="body" hasCustomPrompt="1"/>
+          </p:nvPr>
+        </p:nvSpPr>
+        <p:spPr>
+          <a:xfrm>
+            <a:off x="731520" y="3931920"/>
+            <a:ext cx="8778240" cy="1645920"/>
           </a:xfrm>
           <a:prstGeom prst="rect">
             <a:avLst/>
@@ -3085,236 +3448,20 @@
           <a:lstStyle/>
           <a:p>
             <a:pPr indent="0" marL="0">
-              <a:buNone/>
-            </a:pPr>
-            <a:r>
-              <a:rPr lang="en-US" sz="1200" spc="300" kern="0" dirty="0">
-                <a:solidFill>
-                  <a:schemeClr val="accent6"/>
-                </a:solidFill>
-              </a:rPr>
-              <a:t>SELLOS Y CONTENEDORES · N2</a:t>
-            </a:r>
-            <a:endParaRPr lang="en-US" sz="1200" dirty="0"/>
-          </a:p>
-        </p:txBody>
-      </p:sp>
-      <p:sp>
-        <p:nvSpPr>
-          <p:cNvPr id="4" name="Panel negativo"/>
-          <p:cNvSpPr/>
-          <p:nvPr/>
-        </p:nvSpPr>
-        <p:spPr>
-          <a:xfrm>
-            <a:off x="457200" y="1600200"/>
-            <a:ext cx="5532120" cy="4572000"/>
-          </a:xfrm>
-          <a:prstGeom prst="roundRect">
-            <a:avLst>
-              <a:gd name="adj" fmla="val 3600"/>
-            </a:avLst>
-          </a:prstGeom>
-          <a:solidFill>
-            <a:schemeClr val="tx1"/>
-          </a:solidFill>
-          <a:ln w="12700">
-            <a:solidFill>
-              <a:schemeClr val="tx1"/>
-            </a:solidFill>
-            <a:prstDash val="solid"/>
-          </a:ln>
-        </p:spPr>
-      </p:sp>
-      <p:pic>
-        <p:nvPicPr>
-          <p:cNvPr id="5" name="Logo negativo" descr="Corte del tronco · negativo">    </p:cNvPr>
-          <p:cNvPicPr>
-            <a:picLocks noChangeAspect="1"/>
-          </p:cNvPicPr>
-          <p:nvPr/>
-        </p:nvPicPr>
-        <p:blipFill>
-          <a:blip r:embed="rId1"/>
-          <a:stretch>
-            <a:fillRect/>
-          </a:stretch>
-        </p:blipFill>
-        <p:spPr>
-          <a:xfrm>
-            <a:off x="1165860" y="3041021"/>
-            <a:ext cx="4114800" cy="1507478"/>
-          </a:xfrm>
-          <a:prstGeom prst="rect">
-            <a:avLst/>
-          </a:prstGeom>
-        </p:spPr>
-      </p:pic>
-      <p:sp>
-        <p:nvSpPr>
-          <p:cNvPr id="6" name="Rótulo"/>
-          <p:cNvSpPr txBox="1"/>
-          <p:nvPr/>
-        </p:nvSpPr>
-        <p:spPr>
-          <a:xfrm>
-            <a:off x="731520" y="5715000"/>
-            <a:ext cx="4572000" cy="274320"/>
-          </a:xfrm>
-          <a:prstGeom prst="rect">
-            <a:avLst/>
-          </a:prstGeom>
-          <a:noFill/>
-          <a:ln/>
-        </p:spPr>
-        <p:txBody>
-          <a:bodyPr wrap="square" lIns="0" tIns="0" rIns="0" bIns="0" rtlCol="0" anchor="ctr"/>
-          <a:lstStyle/>
-          <a:p>
-            <a:pPr indent="0" marL="0">
-              <a:buNone/>
-            </a:pPr>
-            <a:r>
-              <a:rPr lang="en-US" sz="1000" spc="300" kern="0" dirty="0">
+              <a:lnSpc>
+                <a:spcPct val="120000"/>
+              </a:lnSpc>
+              <a:buNone/>
+            </a:pPr>
+            <a:r>
+              <a:rPr lang="en-US" sz="1800" dirty="0">
                 <a:solidFill>
                   <a:schemeClr val="accent5"/>
                 </a:solidFill>
               </a:rPr>
-              <a:t>NEGATIVO</a:t>
-            </a:r>
-            <a:endParaRPr lang="en-US" sz="1000" dirty="0"/>
-          </a:p>
-        </p:txBody>
-      </p:sp>
-      <p:sp>
-        <p:nvSpPr>
-          <p:cNvPr id="7" name="Panel una tinta sobre kraft"/>
-          <p:cNvSpPr/>
-          <p:nvPr/>
-        </p:nvSpPr>
-        <p:spPr>
-          <a:xfrm>
-            <a:off x="6199632" y="1600200"/>
-            <a:ext cx="5532120" cy="4572000"/>
-          </a:xfrm>
-          <a:prstGeom prst="roundRect">
-            <a:avLst>
-              <a:gd name="adj" fmla="val 3600"/>
-            </a:avLst>
-          </a:prstGeom>
-          <a:solidFill>
-            <a:schemeClr val="accent1"/>
-          </a:solidFill>
-          <a:ln w="12700">
-            <a:solidFill>
-              <a:schemeClr val="accent1"/>
-            </a:solidFill>
-            <a:prstDash val="solid"/>
-          </a:ln>
-        </p:spPr>
-      </p:sp>
-      <p:pic>
-        <p:nvPicPr>
-          <p:cNvPr id="8" name="Logo una tinta sobre kraft" descr="Corte del tronco · una tinta sobre kraft">    </p:cNvPr>
-          <p:cNvPicPr>
-            <a:picLocks noChangeAspect="1"/>
-          </p:cNvPicPr>
-          <p:nvPr/>
-        </p:nvPicPr>
-        <p:blipFill>
-          <a:blip r:embed="rId2"/>
-          <a:stretch>
-            <a:fillRect/>
-          </a:stretch>
-        </p:blipFill>
-        <p:spPr>
-          <a:xfrm>
-            <a:off x="6908292" y="3041021"/>
-            <a:ext cx="4114800" cy="1507478"/>
-          </a:xfrm>
-          <a:prstGeom prst="rect">
-            <a:avLst/>
-          </a:prstGeom>
-        </p:spPr>
-      </p:pic>
-      <p:sp>
-        <p:nvSpPr>
-          <p:cNvPr id="9" name="Rótulo"/>
-          <p:cNvSpPr txBox="1"/>
-          <p:nvPr/>
-        </p:nvSpPr>
-        <p:spPr>
-          <a:xfrm>
-            <a:off x="6473952" y="5715000"/>
-            <a:ext cx="4572000" cy="274320"/>
-          </a:xfrm>
-          <a:prstGeom prst="rect">
-            <a:avLst/>
-          </a:prstGeom>
-          <a:noFill/>
-          <a:ln/>
-        </p:spPr>
-        <p:txBody>
-          <a:bodyPr wrap="square" lIns="0" tIns="0" rIns="0" bIns="0" rtlCol="0" anchor="ctr"/>
-          <a:lstStyle/>
-          <a:p>
-            <a:pPr indent="0" marL="0">
-              <a:buNone/>
-            </a:pPr>
-            <a:r>
-              <a:rPr lang="en-US" sz="1000" spc="300" kern="0" dirty="0">
-                <a:solidFill>
-                  <a:schemeClr val="tx2"/>
-                </a:solidFill>
-              </a:rPr>
-              <a:t>UNA TINTA SOBRE KRAFT</a:t>
-            </a:r>
-            <a:endParaRPr lang="en-US" sz="1000" dirty="0"/>
-          </a:p>
-        </p:txBody>
-      </p:sp>
-      <p:sp>
-        <p:nvSpPr>
-          <p:cNvPr id="25" name="Slide Number Placeholder 0"/>
-          <p:cNvSpPr>
-            <a:spLocks noGrp="1"/>
-          </p:cNvSpPr>
-          <p:nvPr>
-            <p:ph type="sldNum" sz="quarter" idx="4294967295"/>
-          </p:nvPr>
-        </p:nvSpPr>
-        <p:spPr>
-          <a:xfrm>
-            <a:off x="11247120" y="6400800"/>
-            <a:ext cx="502920" cy="274320"/>
-          </a:xfrm>
-          <a:prstGeom prst="rect">
-            <a:avLst/>
-          </a:prstGeom>
-          <a:extLst>
-            <a:ext uri="{C572A759-6A51-4108-AA02-DFA0A04FC94B}">
-              <ma14:wrappingTextBoxFlag xmlns:ma14="http://schemas.microsoft.com/office/mac/drawingml/2011/main" val="0"/>
-            </a:ext>
-          </a:extLst>
-        </p:spPr>
-        <p:txBody>
-          <a:bodyPr/>
-          <a:lstStyle>
-            <a:lvl1pPr>
-              <a:defRPr sz="1000">
-                <a:solidFill>
-                  <a:schemeClr val="accent6"/>
-                </a:solidFill>
-              </a:defRPr>
-            </a:lvl1pPr>
-          </a:lstStyle>
-          <a:p>
-            <a:pPr algn="r"/>
-            <a:fld id="{F7021451-1387-4CA6-816F-3879F97B5CBC}" type="slidenum">
-              <a:rPr b="0" lang="en-US"/>
-              <a:t>10</a:t>
-            </a:fld>
-            <a:endParaRPr lang="en-US"/>
+              <a:t>Formas cerradas que funcionan como garantía de procedencia. Son las más compactas y resistentes: se leen en tamaños mínimos, se estampan sobre kraft y resuelven perfiles digitales sin perder identidad.</a:t>
+            </a:r>
+            <a:endParaRPr lang="en-US" sz="1800" dirty="0"/>
           </a:p>
         </p:txBody>
       </p:sp>
@@ -3375,7 +3522,7 @@
                   <a:schemeClr val="tx1"/>
                 </a:solidFill>
               </a:rPr>
-              <a:t>Sello: anillos y pino</a:t>
+              <a:t>Araucaria en arco</a:t>
             </a:r>
             <a:endParaRPr lang="en-US" sz="3000" dirty="0"/>
           </a:p>
@@ -3413,7 +3560,7 @@
                   <a:schemeClr val="accent6"/>
                 </a:solidFill>
               </a:rPr>
-              <a:t>SELLOS Y CONTENEDORES · N4</a:t>
+              <a:t>SELLOS Y CONTENEDORES · A3</a:t>
             </a:r>
             <a:endParaRPr lang="en-US" sz="1200" dirty="0"/>
           </a:p>
@@ -3421,18 +3568,59 @@
       </p:sp>
       <p:sp>
         <p:nvSpPr>
-          <p:cNvPr id="4" name="Panel negativo"/>
-          <p:cNvSpPr/>
-          <p:nvPr/>
-        </p:nvSpPr>
-        <p:spPr>
-          <a:xfrm>
-            <a:off x="457200" y="1600200"/>
-            <a:ext cx="5532120" cy="4572000"/>
+          <p:cNvPr id="4" name="Text 0"/>
+          <p:cNvSpPr/>
+          <p:nvPr>
+            <p:ph idx="102" type="body" hasCustomPrompt="1"/>
+          </p:nvPr>
+        </p:nvSpPr>
+        <p:spPr>
+          <a:xfrm>
+            <a:off x="457200" y="1417320"/>
+            <a:ext cx="11247120" cy="777240"/>
+          </a:xfrm>
+          <a:prstGeom prst="rect">
+            <a:avLst/>
+          </a:prstGeom>
+          <a:noFill/>
+          <a:ln/>
+        </p:spPr>
+        <p:txBody>
+          <a:bodyPr wrap="square" lIns="0" tIns="0" rIns="0" bIns="0" rtlCol="0" anchor="t"/>
+          <a:lstStyle/>
+          <a:p>
+            <a:pPr indent="0" marL="0">
+              <a:lnSpc>
+                <a:spcPct val="115000"/>
+              </a:lnSpc>
+              <a:buNone/>
+            </a:pPr>
+            <a:r>
+              <a:rPr lang="en-US" sz="1500" dirty="0">
+                <a:solidFill>
+                  <a:schemeClr val="tx1"/>
+                </a:solidFill>
+              </a:rPr>
+              <a:t>La araucaria se recorta dentro de un arco, como una ventana a la selva. Compacta y legible a 16 px: la mejor versión para aplicaciones pequeñas.</a:t>
+            </a:r>
+            <a:endParaRPr lang="en-US" sz="1500" dirty="0"/>
+          </a:p>
+        </p:txBody>
+      </p:sp>
+      <p:sp>
+        <p:nvSpPr>
+          <p:cNvPr id="5" name="Panel negativo"/>
+          <p:cNvSpPr/>
+          <p:nvPr/>
+        </p:nvSpPr>
+        <p:spPr>
+          <a:xfrm>
+            <a:off x="457200" y="2331720"/>
+            <a:ext cx="5532120" cy="3840480"/>
           </a:xfrm>
           <a:prstGeom prst="roundRect">
             <a:avLst>
-              <a:gd name="adj" fmla="val 3600"/>
+              <a:gd name="adj" fmla="val 4286"/>
             </a:avLst>
           </a:prstGeom>
           <a:solidFill>
@@ -3448,7 +3636,7 @@
       </p:sp>
       <p:pic>
         <p:nvPicPr>
-          <p:cNvPr id="5" name="Logo negativo" descr="Sello: anillos y pino · negativo">    </p:cNvPr>
+          <p:cNvPr id="6" name="Logo negativo" descr="Araucaria en arco · negativo">    </p:cNvPr>
           <p:cNvPicPr>
             <a:picLocks noChangeAspect="1"/>
           </p:cNvPicPr>
@@ -3462,8 +3650,8 @@
         </p:blipFill>
         <p:spPr>
           <a:xfrm>
-            <a:off x="1165860" y="3041021"/>
-            <a:ext cx="4114800" cy="1507478"/>
+            <a:off x="1348740" y="3473780"/>
+            <a:ext cx="3749040" cy="1373480"/>
           </a:xfrm>
           <a:prstGeom prst="rect">
             <a:avLst/>
@@ -3472,7 +3660,7 @@
       </p:pic>
       <p:sp>
         <p:nvSpPr>
-          <p:cNvPr id="6" name="Rótulo"/>
+          <p:cNvPr id="7" name="Rótulo"/>
           <p:cNvSpPr txBox="1"/>
           <p:nvPr/>
         </p:nvSpPr>
@@ -3508,18 +3696,18 @@
       </p:sp>
       <p:sp>
         <p:nvSpPr>
-          <p:cNvPr id="7" name="Panel una tinta sobre kraft"/>
-          <p:cNvSpPr/>
-          <p:nvPr/>
-        </p:nvSpPr>
-        <p:spPr>
-          <a:xfrm>
-            <a:off x="6199632" y="1600200"/>
-            <a:ext cx="5532120" cy="4572000"/>
+          <p:cNvPr id="8" name="Panel una tinta sobre kraft"/>
+          <p:cNvSpPr/>
+          <p:nvPr/>
+        </p:nvSpPr>
+        <p:spPr>
+          <a:xfrm>
+            <a:off x="6199632" y="2331720"/>
+            <a:ext cx="5532120" cy="3840480"/>
           </a:xfrm>
           <a:prstGeom prst="roundRect">
             <a:avLst>
-              <a:gd name="adj" fmla="val 3600"/>
+              <a:gd name="adj" fmla="val 4286"/>
             </a:avLst>
           </a:prstGeom>
           <a:solidFill>
@@ -3535,7 +3723,7 @@
       </p:sp>
       <p:pic>
         <p:nvPicPr>
-          <p:cNvPr id="8" name="Logo una tinta sobre kraft" descr="Sello: anillos y pino · una tinta sobre kraft">    </p:cNvPr>
+          <p:cNvPr id="9" name="Logo una tinta sobre kraft" descr="Araucaria en arco · una tinta sobre kraft">    </p:cNvPr>
           <p:cNvPicPr>
             <a:picLocks noChangeAspect="1"/>
           </p:cNvPicPr>
@@ -3549,8 +3737,8 @@
         </p:blipFill>
         <p:spPr>
           <a:xfrm>
-            <a:off x="6908292" y="3041021"/>
-            <a:ext cx="4114800" cy="1507478"/>
+            <a:off x="7091172" y="3473780"/>
+            <a:ext cx="3749040" cy="1373480"/>
           </a:xfrm>
           <a:prstGeom prst="rect">
             <a:avLst/>
@@ -3559,7 +3747,7 @@
       </p:pic>
       <p:sp>
         <p:nvSpPr>
-          <p:cNvPr id="9" name="Rótulo"/>
+          <p:cNvPr id="10" name="Rótulo"/>
           <p:cNvSpPr txBox="1"/>
           <p:nvPr/>
         </p:nvSpPr>
@@ -3695,7 +3883,7 @@
                   <a:schemeClr val="tx1"/>
                 </a:solidFill>
               </a:rPr>
-              <a:t>Sello: anillos y araucaria</a:t>
+              <a:t>Araucaria en sello</a:t>
             </a:r>
             <a:endParaRPr lang="en-US" sz="3000" dirty="0"/>
           </a:p>
@@ -3733,7 +3921,7 @@
                   <a:schemeClr val="accent6"/>
                 </a:solidFill>
               </a:rPr>
-              <a:t>SELLOS Y CONTENEDORES · N5</a:t>
+              <a:t>SELLOS Y CONTENEDORES · A5</a:t>
             </a:r>
             <a:endParaRPr lang="en-US" sz="1200" dirty="0"/>
           </a:p>
@@ -3741,18 +3929,59 @@
       </p:sp>
       <p:sp>
         <p:nvSpPr>
-          <p:cNvPr id="4" name="Panel negativo"/>
-          <p:cNvSpPr/>
-          <p:nvPr/>
-        </p:nvSpPr>
-        <p:spPr>
-          <a:xfrm>
-            <a:off x="457200" y="1600200"/>
-            <a:ext cx="5532120" cy="4572000"/>
+          <p:cNvPr id="4" name="Text 0"/>
+          <p:cNvSpPr/>
+          <p:nvPr>
+            <p:ph idx="102" type="body" hasCustomPrompt="1"/>
+          </p:nvPr>
+        </p:nvSpPr>
+        <p:spPr>
+          <a:xfrm>
+            <a:off x="457200" y="1417320"/>
+            <a:ext cx="11247120" cy="777240"/>
+          </a:xfrm>
+          <a:prstGeom prst="rect">
+            <a:avLst/>
+          </a:prstGeom>
+          <a:noFill/>
+          <a:ln/>
+        </p:spPr>
+        <p:txBody>
+          <a:bodyPr wrap="square" lIns="0" tIns="0" rIns="0" bIns="0" rtlCol="0" anchor="t"/>
+          <a:lstStyle/>
+          <a:p>
+            <a:pPr indent="0" marL="0">
+              <a:lnSpc>
+                <a:spcPct val="115000"/>
+              </a:lnSpc>
+              <a:buNone/>
+            </a:pPr>
+            <a:r>
+              <a:rPr lang="en-US" sz="1500" dirty="0">
+                <a:solidFill>
+                  <a:schemeClr val="tx1"/>
+                </a:solidFill>
+              </a:rPr>
+              <a:t>El árbol calado en un círculo: un sello de procedencia, directo y versátil, pensado para estamparse sobre kraft.</a:t>
+            </a:r>
+            <a:endParaRPr lang="en-US" sz="1500" dirty="0"/>
+          </a:p>
+        </p:txBody>
+      </p:sp>
+      <p:sp>
+        <p:nvSpPr>
+          <p:cNvPr id="5" name="Panel negativo"/>
+          <p:cNvSpPr/>
+          <p:nvPr/>
+        </p:nvSpPr>
+        <p:spPr>
+          <a:xfrm>
+            <a:off x="457200" y="2331720"/>
+            <a:ext cx="5532120" cy="3840480"/>
           </a:xfrm>
           <a:prstGeom prst="roundRect">
             <a:avLst>
-              <a:gd name="adj" fmla="val 3600"/>
+              <a:gd name="adj" fmla="val 4286"/>
             </a:avLst>
           </a:prstGeom>
           <a:solidFill>
@@ -3768,7 +3997,7 @@
       </p:sp>
       <p:pic>
         <p:nvPicPr>
-          <p:cNvPr id="5" name="Logo negativo" descr="Sello: anillos y araucaria · negativo">    </p:cNvPr>
+          <p:cNvPr id="6" name="Logo negativo" descr="Araucaria en sello · negativo">    </p:cNvPr>
           <p:cNvPicPr>
             <a:picLocks noChangeAspect="1"/>
           </p:cNvPicPr>
@@ -3782,8 +4011,8 @@
         </p:blipFill>
         <p:spPr>
           <a:xfrm>
-            <a:off x="1165860" y="3041021"/>
-            <a:ext cx="4114800" cy="1507478"/>
+            <a:off x="1348740" y="3473780"/>
+            <a:ext cx="3749040" cy="1373480"/>
           </a:xfrm>
           <a:prstGeom prst="rect">
             <a:avLst/>
@@ -3792,7 +4021,7 @@
       </p:pic>
       <p:sp>
         <p:nvSpPr>
-          <p:cNvPr id="6" name="Rótulo"/>
+          <p:cNvPr id="7" name="Rótulo"/>
           <p:cNvSpPr txBox="1"/>
           <p:nvPr/>
         </p:nvSpPr>
@@ -3828,18 +4057,18 @@
       </p:sp>
       <p:sp>
         <p:nvSpPr>
-          <p:cNvPr id="7" name="Panel una tinta sobre kraft"/>
-          <p:cNvSpPr/>
-          <p:nvPr/>
-        </p:nvSpPr>
-        <p:spPr>
-          <a:xfrm>
-            <a:off x="6199632" y="1600200"/>
-            <a:ext cx="5532120" cy="4572000"/>
+          <p:cNvPr id="8" name="Panel una tinta sobre kraft"/>
+          <p:cNvSpPr/>
+          <p:nvPr/>
+        </p:nvSpPr>
+        <p:spPr>
+          <a:xfrm>
+            <a:off x="6199632" y="2331720"/>
+            <a:ext cx="5532120" cy="3840480"/>
           </a:xfrm>
           <a:prstGeom prst="roundRect">
             <a:avLst>
-              <a:gd name="adj" fmla="val 3600"/>
+              <a:gd name="adj" fmla="val 4286"/>
             </a:avLst>
           </a:prstGeom>
           <a:solidFill>
@@ -3855,7 +4084,7 @@
       </p:sp>
       <p:pic>
         <p:nvPicPr>
-          <p:cNvPr id="8" name="Logo una tinta sobre kraft" descr="Sello: anillos y araucaria · una tinta sobre kraft">    </p:cNvPr>
+          <p:cNvPr id="9" name="Logo una tinta sobre kraft" descr="Araucaria en sello · una tinta sobre kraft">    </p:cNvPr>
           <p:cNvPicPr>
             <a:picLocks noChangeAspect="1"/>
           </p:cNvPicPr>
@@ -3869,8 +4098,8 @@
         </p:blipFill>
         <p:spPr>
           <a:xfrm>
-            <a:off x="6908292" y="3041021"/>
-            <a:ext cx="4114800" cy="1507478"/>
+            <a:off x="7091172" y="3473780"/>
+            <a:ext cx="3749040" cy="1373480"/>
           </a:xfrm>
           <a:prstGeom prst="rect">
             <a:avLst/>
@@ -3879,7 +4108,7 @@
       </p:pic>
       <p:sp>
         <p:nvSpPr>
-          <p:cNvPr id="9" name="Rótulo"/>
+          <p:cNvPr id="10" name="Rótulo"/>
           <p:cNvSpPr txBox="1"/>
           <p:nvPr/>
         </p:nvSpPr>
@@ -3988,51 +4217,89 @@
           <p:cNvPr id="2" name="Text 0"/>
           <p:cNvSpPr/>
           <p:nvPr>
-            <p:ph idx="100" type="body" hasCustomPrompt="1"/>
-          </p:nvPr>
-        </p:nvSpPr>
-        <p:spPr>
-          <a:xfrm>
-            <a:off x="731520" y="2011680"/>
-            <a:ext cx="5486400" cy="457200"/>
-          </a:xfrm>
-          <a:prstGeom prst="rect">
-            <a:avLst/>
-          </a:prstGeom>
-          <a:noFill/>
-          <a:ln/>
-        </p:spPr>
-        <p:txBody>
-          <a:bodyPr wrap="square" lIns="0" tIns="0" rIns="0" bIns="0" rtlCol="0"/>
+            <p:ph idx="100" type="title" hasCustomPrompt="1"/>
+          </p:nvPr>
+        </p:nvSpPr>
+        <p:spPr>
+          <a:xfrm>
+            <a:off x="457200" y="365760"/>
+            <a:ext cx="8686800" cy="685800"/>
+          </a:xfrm>
+          <a:prstGeom prst="rect">
+            <a:avLst/>
+          </a:prstGeom>
+          <a:noFill/>
+          <a:ln/>
+        </p:spPr>
+        <p:txBody>
+          <a:bodyPr wrap="square" lIns="0" tIns="0" rIns="0" bIns="0" rtlCol="0" anchor="ctr"/>
+          <a:lstStyle/>
+          <a:p>
+            <a:pPr algn="l" indent="0" marL="0">
+              <a:buNone/>
+            </a:pPr>
+            <a:r>
+              <a:rPr lang="en-US" sz="3000" b="1" dirty="0">
+                <a:solidFill>
+                  <a:schemeClr val="tx1"/>
+                </a:solidFill>
+              </a:rPr>
+              <a:t>Corte del tronco</a:t>
+            </a:r>
+            <a:endParaRPr lang="en-US" sz="3000" dirty="0"/>
+          </a:p>
+        </p:txBody>
+      </p:sp>
+      <p:sp>
+        <p:nvSpPr>
+          <p:cNvPr id="3" name="Text 0"/>
+          <p:cNvSpPr/>
+          <p:nvPr>
+            <p:ph idx="101" type="body" hasCustomPrompt="1"/>
+          </p:nvPr>
+        </p:nvSpPr>
+        <p:spPr>
+          <a:xfrm>
+            <a:off x="457200" y="1005840"/>
+            <a:ext cx="8686800" cy="365760"/>
+          </a:xfrm>
+          <a:prstGeom prst="rect">
+            <a:avLst/>
+          </a:prstGeom>
+          <a:noFill/>
+          <a:ln/>
+        </p:spPr>
+        <p:txBody>
+          <a:bodyPr wrap="square" lIns="0" tIns="0" rIns="0" bIns="0" rtlCol="0" anchor="t"/>
           <a:lstStyle/>
           <a:p>
             <a:pPr indent="0" marL="0">
               <a:buNone/>
             </a:pPr>
             <a:r>
-              <a:rPr lang="en-US" sz="1400" spc="400" kern="0" dirty="0">
-                <a:solidFill>
-                  <a:schemeClr val="accent1"/>
-                </a:solidFill>
-              </a:rPr>
-              <a:t>SECCIÓN 3 · 5 PROPUESTAS</a:t>
-            </a:r>
-            <a:endParaRPr lang="en-US" sz="1400" dirty="0"/>
-          </a:p>
-        </p:txBody>
-      </p:sp>
-      <p:sp>
-        <p:nvSpPr>
-          <p:cNvPr id="3" name="Text 0"/>
-          <p:cNvSpPr/>
-          <p:nvPr>
-            <p:ph idx="101" type="title" hasCustomPrompt="1"/>
-          </p:nvPr>
-        </p:nvSpPr>
-        <p:spPr>
-          <a:xfrm>
-            <a:off x="731520" y="2560320"/>
-            <a:ext cx="10698480" cy="1280160"/>
+              <a:rPr lang="en-US" sz="1200" spc="300" kern="0" dirty="0">
+                <a:solidFill>
+                  <a:schemeClr val="accent6"/>
+                </a:solidFill>
+              </a:rPr>
+              <a:t>SELLOS Y CONTENEDORES · N2</a:t>
+            </a:r>
+            <a:endParaRPr lang="en-US" sz="1200" dirty="0"/>
+          </a:p>
+        </p:txBody>
+      </p:sp>
+      <p:sp>
+        <p:nvSpPr>
+          <p:cNvPr id="4" name="Text 0"/>
+          <p:cNvSpPr/>
+          <p:nvPr>
+            <p:ph idx="102" type="body" hasCustomPrompt="1"/>
+          </p:nvPr>
+        </p:nvSpPr>
+        <p:spPr>
+          <a:xfrm>
+            <a:off x="457200" y="1417320"/>
+            <a:ext cx="11247120" cy="777240"/>
           </a:xfrm>
           <a:prstGeom prst="rect">
             <a:avLst/>
@@ -4044,56 +4311,240 @@
           <a:bodyPr wrap="square" lIns="0" tIns="0" rIns="0" bIns="0" rtlCol="0" anchor="t"/>
           <a:lstStyle/>
           <a:p>
-            <a:pPr algn="l" indent="0" marL="0">
-              <a:buNone/>
-            </a:pPr>
-            <a:r>
-              <a:rPr lang="en-US" sz="5400" b="1" dirty="0">
-                <a:solidFill>
-                  <a:schemeClr val="bg2"/>
-                </a:solidFill>
-              </a:rPr>
-              <a:t>Árbol solo</a:t>
-            </a:r>
-            <a:endParaRPr lang="en-US" sz="5400" dirty="0"/>
-          </a:p>
-        </p:txBody>
-      </p:sp>
-      <p:sp>
-        <p:nvSpPr>
-          <p:cNvPr id="4" name="Text 0"/>
-          <p:cNvSpPr/>
-          <p:nvPr>
-            <p:ph idx="102" type="body" hasCustomPrompt="1"/>
-          </p:nvPr>
-        </p:nvSpPr>
-        <p:spPr>
-          <a:xfrm>
-            <a:off x="731520" y="3931920"/>
-            <a:ext cx="10698480" cy="731520"/>
-          </a:xfrm>
-          <a:prstGeom prst="rect">
-            <a:avLst/>
-          </a:prstGeom>
-          <a:noFill/>
-          <a:ln/>
-        </p:spPr>
-        <p:txBody>
-          <a:bodyPr wrap="square" lIns="0" tIns="0" rIns="0" bIns="0" rtlCol="0" anchor="t"/>
-          <a:lstStyle/>
-          <a:p>
             <a:pPr indent="0" marL="0">
-              <a:buNone/>
-            </a:pPr>
-            <a:r>
-              <a:rPr lang="en-US" sz="2000" dirty="0">
+              <a:lnSpc>
+                <a:spcPct val="115000"/>
+              </a:lnSpc>
+              <a:buNone/>
+            </a:pPr>
+            <a:r>
+              <a:rPr lang="en-US" sz="1500" dirty="0">
+                <a:solidFill>
+                  <a:schemeClr val="tx1"/>
+                </a:solidFill>
+              </a:rPr>
+              <a:t>Los anillos de crecimiento de un tronco real, levemente descentrados. Un símbolo abstracto y propio de la industria forestal, sin recurrir al dibujo del árbol.</a:t>
+            </a:r>
+            <a:endParaRPr lang="en-US" sz="1500" dirty="0"/>
+          </a:p>
+        </p:txBody>
+      </p:sp>
+      <p:sp>
+        <p:nvSpPr>
+          <p:cNvPr id="5" name="Panel negativo"/>
+          <p:cNvSpPr/>
+          <p:nvPr/>
+        </p:nvSpPr>
+        <p:spPr>
+          <a:xfrm>
+            <a:off x="457200" y="2331720"/>
+            <a:ext cx="5532120" cy="3840480"/>
+          </a:xfrm>
+          <a:prstGeom prst="roundRect">
+            <a:avLst>
+              <a:gd name="adj" fmla="val 4286"/>
+            </a:avLst>
+          </a:prstGeom>
+          <a:solidFill>
+            <a:schemeClr val="tx1"/>
+          </a:solidFill>
+          <a:ln w="12700">
+            <a:solidFill>
+              <a:schemeClr val="tx1"/>
+            </a:solidFill>
+            <a:prstDash val="solid"/>
+          </a:ln>
+        </p:spPr>
+      </p:sp>
+      <p:pic>
+        <p:nvPicPr>
+          <p:cNvPr id="6" name="Logo negativo" descr="Corte del tronco · negativo">    </p:cNvPr>
+          <p:cNvPicPr>
+            <a:picLocks noChangeAspect="1"/>
+          </p:cNvPicPr>
+          <p:nvPr/>
+        </p:nvPicPr>
+        <p:blipFill>
+          <a:blip r:embed="rId1"/>
+          <a:stretch>
+            <a:fillRect/>
+          </a:stretch>
+        </p:blipFill>
+        <p:spPr>
+          <a:xfrm>
+            <a:off x="1348740" y="3473780"/>
+            <a:ext cx="3749040" cy="1373480"/>
+          </a:xfrm>
+          <a:prstGeom prst="rect">
+            <a:avLst/>
+          </a:prstGeom>
+        </p:spPr>
+      </p:pic>
+      <p:sp>
+        <p:nvSpPr>
+          <p:cNvPr id="7" name="Rótulo"/>
+          <p:cNvSpPr txBox="1"/>
+          <p:nvPr/>
+        </p:nvSpPr>
+        <p:spPr>
+          <a:xfrm>
+            <a:off x="731520" y="5715000"/>
+            <a:ext cx="4572000" cy="274320"/>
+          </a:xfrm>
+          <a:prstGeom prst="rect">
+            <a:avLst/>
+          </a:prstGeom>
+          <a:noFill/>
+          <a:ln/>
+        </p:spPr>
+        <p:txBody>
+          <a:bodyPr wrap="square" lIns="0" tIns="0" rIns="0" bIns="0" rtlCol="0" anchor="ctr"/>
+          <a:lstStyle/>
+          <a:p>
+            <a:pPr indent="0" marL="0">
+              <a:buNone/>
+            </a:pPr>
+            <a:r>
+              <a:rPr lang="en-US" sz="1000" spc="300" kern="0" dirty="0">
                 <a:solidFill>
                   <a:schemeClr val="accent5"/>
                 </a:solidFill>
               </a:rPr>
-              <a:t>La silueta del árbol como símbolo</a:t>
-            </a:r>
-            <a:endParaRPr lang="en-US" sz="2000" dirty="0"/>
+              <a:t>NEGATIVO</a:t>
+            </a:r>
+            <a:endParaRPr lang="en-US" sz="1000" dirty="0"/>
+          </a:p>
+        </p:txBody>
+      </p:sp>
+      <p:sp>
+        <p:nvSpPr>
+          <p:cNvPr id="8" name="Panel una tinta sobre kraft"/>
+          <p:cNvSpPr/>
+          <p:nvPr/>
+        </p:nvSpPr>
+        <p:spPr>
+          <a:xfrm>
+            <a:off x="6199632" y="2331720"/>
+            <a:ext cx="5532120" cy="3840480"/>
+          </a:xfrm>
+          <a:prstGeom prst="roundRect">
+            <a:avLst>
+              <a:gd name="adj" fmla="val 4286"/>
+            </a:avLst>
+          </a:prstGeom>
+          <a:solidFill>
+            <a:schemeClr val="accent1"/>
+          </a:solidFill>
+          <a:ln w="12700">
+            <a:solidFill>
+              <a:schemeClr val="accent1"/>
+            </a:solidFill>
+            <a:prstDash val="solid"/>
+          </a:ln>
+        </p:spPr>
+      </p:sp>
+      <p:pic>
+        <p:nvPicPr>
+          <p:cNvPr id="9" name="Logo una tinta sobre kraft" descr="Corte del tronco · una tinta sobre kraft">    </p:cNvPr>
+          <p:cNvPicPr>
+            <a:picLocks noChangeAspect="1"/>
+          </p:cNvPicPr>
+          <p:nvPr/>
+        </p:nvPicPr>
+        <p:blipFill>
+          <a:blip r:embed="rId2"/>
+          <a:stretch>
+            <a:fillRect/>
+          </a:stretch>
+        </p:blipFill>
+        <p:spPr>
+          <a:xfrm>
+            <a:off x="7091172" y="3473780"/>
+            <a:ext cx="3749040" cy="1373480"/>
+          </a:xfrm>
+          <a:prstGeom prst="rect">
+            <a:avLst/>
+          </a:prstGeom>
+        </p:spPr>
+      </p:pic>
+      <p:sp>
+        <p:nvSpPr>
+          <p:cNvPr id="10" name="Rótulo"/>
+          <p:cNvSpPr txBox="1"/>
+          <p:nvPr/>
+        </p:nvSpPr>
+        <p:spPr>
+          <a:xfrm>
+            <a:off x="6473952" y="5715000"/>
+            <a:ext cx="4572000" cy="274320"/>
+          </a:xfrm>
+          <a:prstGeom prst="rect">
+            <a:avLst/>
+          </a:prstGeom>
+          <a:noFill/>
+          <a:ln/>
+        </p:spPr>
+        <p:txBody>
+          <a:bodyPr wrap="square" lIns="0" tIns="0" rIns="0" bIns="0" rtlCol="0" anchor="ctr"/>
+          <a:lstStyle/>
+          <a:p>
+            <a:pPr indent="0" marL="0">
+              <a:buNone/>
+            </a:pPr>
+            <a:r>
+              <a:rPr lang="en-US" sz="1000" spc="300" kern="0" dirty="0">
+                <a:solidFill>
+                  <a:schemeClr val="tx2"/>
+                </a:solidFill>
+              </a:rPr>
+              <a:t>UNA TINTA SOBRE KRAFT</a:t>
+            </a:r>
+            <a:endParaRPr lang="en-US" sz="1000" dirty="0"/>
+          </a:p>
+        </p:txBody>
+      </p:sp>
+      <p:sp>
+        <p:nvSpPr>
+          <p:cNvPr id="25" name="Slide Number Placeholder 0"/>
+          <p:cNvSpPr>
+            <a:spLocks noGrp="1"/>
+          </p:cNvSpPr>
+          <p:nvPr>
+            <p:ph type="sldNum" sz="quarter" idx="4294967295"/>
+          </p:nvPr>
+        </p:nvSpPr>
+        <p:spPr>
+          <a:xfrm>
+            <a:off x="11247120" y="6400800"/>
+            <a:ext cx="502920" cy="274320"/>
+          </a:xfrm>
+          <a:prstGeom prst="rect">
+            <a:avLst/>
+          </a:prstGeom>
+          <a:extLst>
+            <a:ext uri="{C572A759-6A51-4108-AA02-DFA0A04FC94B}">
+              <ma14:wrappingTextBoxFlag xmlns:ma14="http://schemas.microsoft.com/office/mac/drawingml/2011/main" val="0"/>
+            </a:ext>
+          </a:extLst>
+        </p:spPr>
+        <p:txBody>
+          <a:bodyPr/>
+          <a:lstStyle>
+            <a:lvl1pPr>
+              <a:defRPr sz="1000">
+                <a:solidFill>
+                  <a:schemeClr val="accent6"/>
+                </a:solidFill>
+              </a:defRPr>
+            </a:lvl1pPr>
+          </a:lstStyle>
+          <a:p>
+            <a:pPr algn="r"/>
+            <a:fld id="{F7021451-1387-4CA6-816F-3879F97B5CBC}" type="slidenum">
+              <a:rPr b="0" lang="en-US"/>
+              <a:t>13</a:t>
+            </a:fld>
+            <a:endParaRPr lang="en-US"/>
           </a:p>
         </p:txBody>
       </p:sp>
@@ -4154,7 +4605,7 @@
                   <a:schemeClr val="tx1"/>
                 </a:solidFill>
               </a:rPr>
-              <a:t>Araucaria de ramas</a:t>
+              <a:t>Sello: anillos y pino</a:t>
             </a:r>
             <a:endParaRPr lang="en-US" sz="3000" dirty="0"/>
           </a:p>
@@ -4192,7 +4643,7 @@
                   <a:schemeClr val="accent6"/>
                 </a:solidFill>
               </a:rPr>
-              <a:t>ÁRBOL SOLO · A2</a:t>
+              <a:t>SELLOS Y CONTENEDORES · N4</a:t>
             </a:r>
             <a:endParaRPr lang="en-US" sz="1200" dirty="0"/>
           </a:p>
@@ -4200,18 +4651,59 @@
       </p:sp>
       <p:sp>
         <p:nvSpPr>
-          <p:cNvPr id="4" name="Panel negativo"/>
-          <p:cNvSpPr/>
-          <p:nvPr/>
-        </p:nvSpPr>
-        <p:spPr>
-          <a:xfrm>
-            <a:off x="457200" y="1600200"/>
-            <a:ext cx="5532120" cy="4572000"/>
+          <p:cNvPr id="4" name="Text 0"/>
+          <p:cNvSpPr/>
+          <p:nvPr>
+            <p:ph idx="102" type="body" hasCustomPrompt="1"/>
+          </p:nvPr>
+        </p:nvSpPr>
+        <p:spPr>
+          <a:xfrm>
+            <a:off x="457200" y="1417320"/>
+            <a:ext cx="11247120" cy="777240"/>
+          </a:xfrm>
+          <a:prstGeom prst="rect">
+            <a:avLst/>
+          </a:prstGeom>
+          <a:noFill/>
+          <a:ln/>
+        </p:spPr>
+        <p:txBody>
+          <a:bodyPr wrap="square" lIns="0" tIns="0" rIns="0" bIns="0" rtlCol="0" anchor="t"/>
+          <a:lstStyle/>
+          <a:p>
+            <a:pPr indent="0" marL="0">
+              <a:lnSpc>
+                <a:spcPct val="115000"/>
+              </a:lnSpc>
+              <a:buNone/>
+            </a:pPr>
+            <a:r>
+              <a:rPr lang="en-US" sz="1500" dirty="0">
+                <a:solidFill>
+                  <a:schemeClr val="tx1"/>
+                </a:solidFill>
+              </a:rPr>
+              <a:t>El pino, la especie que se cultiva y se transforma en papel, en el corazón del tronco. Cuenta el ciclo completo: bosque, madera y fibra.</a:t>
+            </a:r>
+            <a:endParaRPr lang="en-US" sz="1500" dirty="0"/>
+          </a:p>
+        </p:txBody>
+      </p:sp>
+      <p:sp>
+        <p:nvSpPr>
+          <p:cNvPr id="5" name="Panel negativo"/>
+          <p:cNvSpPr/>
+          <p:nvPr/>
+        </p:nvSpPr>
+        <p:spPr>
+          <a:xfrm>
+            <a:off x="457200" y="2331720"/>
+            <a:ext cx="5532120" cy="3840480"/>
           </a:xfrm>
           <a:prstGeom prst="roundRect">
             <a:avLst>
-              <a:gd name="adj" fmla="val 3600"/>
+              <a:gd name="adj" fmla="val 4286"/>
             </a:avLst>
           </a:prstGeom>
           <a:solidFill>
@@ -4227,7 +4719,7 @@
       </p:sp>
       <p:pic>
         <p:nvPicPr>
-          <p:cNvPr id="5" name="Logo negativo" descr="Araucaria de ramas · negativo">    </p:cNvPr>
+          <p:cNvPr id="6" name="Logo negativo" descr="Sello: anillos y pino · negativo">    </p:cNvPr>
           <p:cNvPicPr>
             <a:picLocks noChangeAspect="1"/>
           </p:cNvPicPr>
@@ -4241,8 +4733,8 @@
         </p:blipFill>
         <p:spPr>
           <a:xfrm>
-            <a:off x="1165860" y="3041021"/>
-            <a:ext cx="4114800" cy="1507478"/>
+            <a:off x="1348740" y="3473780"/>
+            <a:ext cx="3749040" cy="1373480"/>
           </a:xfrm>
           <a:prstGeom prst="rect">
             <a:avLst/>
@@ -4251,7 +4743,7 @@
       </p:pic>
       <p:sp>
         <p:nvSpPr>
-          <p:cNvPr id="6" name="Rótulo"/>
+          <p:cNvPr id="7" name="Rótulo"/>
           <p:cNvSpPr txBox="1"/>
           <p:nvPr/>
         </p:nvSpPr>
@@ -4287,18 +4779,18 @@
       </p:sp>
       <p:sp>
         <p:nvSpPr>
-          <p:cNvPr id="7" name="Panel una tinta sobre kraft"/>
-          <p:cNvSpPr/>
-          <p:nvPr/>
-        </p:nvSpPr>
-        <p:spPr>
-          <a:xfrm>
-            <a:off x="6199632" y="1600200"/>
-            <a:ext cx="5532120" cy="4572000"/>
+          <p:cNvPr id="8" name="Panel una tinta sobre kraft"/>
+          <p:cNvSpPr/>
+          <p:nvPr/>
+        </p:nvSpPr>
+        <p:spPr>
+          <a:xfrm>
+            <a:off x="6199632" y="2331720"/>
+            <a:ext cx="5532120" cy="3840480"/>
           </a:xfrm>
           <a:prstGeom prst="roundRect">
             <a:avLst>
-              <a:gd name="adj" fmla="val 3600"/>
+              <a:gd name="adj" fmla="val 4286"/>
             </a:avLst>
           </a:prstGeom>
           <a:solidFill>
@@ -4314,7 +4806,7 @@
       </p:sp>
       <p:pic>
         <p:nvPicPr>
-          <p:cNvPr id="8" name="Logo una tinta sobre kraft" descr="Araucaria de ramas · una tinta sobre kraft">    </p:cNvPr>
+          <p:cNvPr id="9" name="Logo una tinta sobre kraft" descr="Sello: anillos y pino · una tinta sobre kraft">    </p:cNvPr>
           <p:cNvPicPr>
             <a:picLocks noChangeAspect="1"/>
           </p:cNvPicPr>
@@ -4328,8 +4820,8 @@
         </p:blipFill>
         <p:spPr>
           <a:xfrm>
-            <a:off x="6908292" y="3041021"/>
-            <a:ext cx="4114800" cy="1507478"/>
+            <a:off x="7091172" y="3473780"/>
+            <a:ext cx="3749040" cy="1373480"/>
           </a:xfrm>
           <a:prstGeom prst="rect">
             <a:avLst/>
@@ -4338,7 +4830,7 @@
       </p:pic>
       <p:sp>
         <p:nvSpPr>
-          <p:cNvPr id="9" name="Rótulo"/>
+          <p:cNvPr id="10" name="Rótulo"/>
           <p:cNvSpPr txBox="1"/>
           <p:nvPr/>
         </p:nvSpPr>
@@ -4474,7 +4966,7 @@
                   <a:schemeClr val="tx1"/>
                 </a:solidFill>
               </a:rPr>
-              <a:t>Araucaria</a:t>
+              <a:t>Sello: anillos y araucaria</a:t>
             </a:r>
             <a:endParaRPr lang="en-US" sz="3000" dirty="0"/>
           </a:p>
@@ -4512,7 +5004,7 @@
                   <a:schemeClr val="accent6"/>
                 </a:solidFill>
               </a:rPr>
-              <a:t>ÁRBOL SOLO · P4</a:t>
+              <a:t>SELLOS Y CONTENEDORES · N5</a:t>
             </a:r>
             <a:endParaRPr lang="en-US" sz="1200" dirty="0"/>
           </a:p>
@@ -4520,18 +5012,59 @@
       </p:sp>
       <p:sp>
         <p:nvSpPr>
-          <p:cNvPr id="4" name="Panel negativo"/>
-          <p:cNvSpPr/>
-          <p:nvPr/>
-        </p:nvSpPr>
-        <p:spPr>
-          <a:xfrm>
-            <a:off x="457200" y="1600200"/>
-            <a:ext cx="5532120" cy="4572000"/>
+          <p:cNvPr id="4" name="Text 0"/>
+          <p:cNvSpPr/>
+          <p:nvPr>
+            <p:ph idx="102" type="body" hasCustomPrompt="1"/>
+          </p:nvPr>
+        </p:nvSpPr>
+        <p:spPr>
+          <a:xfrm>
+            <a:off x="457200" y="1417320"/>
+            <a:ext cx="11247120" cy="777240"/>
+          </a:xfrm>
+          <a:prstGeom prst="rect">
+            <a:avLst/>
+          </a:prstGeom>
+          <a:noFill/>
+          <a:ln/>
+        </p:spPr>
+        <p:txBody>
+          <a:bodyPr wrap="square" lIns="0" tIns="0" rIns="0" bIns="0" rtlCol="0" anchor="t"/>
+          <a:lstStyle/>
+          <a:p>
+            <a:pPr indent="0" marL="0">
+              <a:lnSpc>
+                <a:spcPct val="115000"/>
+              </a:lnSpc>
+              <a:buNone/>
+            </a:pPr>
+            <a:r>
+              <a:rPr lang="en-US" sz="1500" dirty="0">
+                <a:solidFill>
+                  <a:schemeClr val="tx1"/>
+                </a:solidFill>
+              </a:rPr>
+              <a:t>La misma construcción con la araucaria: el corte de la madera protege al árbol nativo, un mensaje de conservación de la selva paranaense.</a:t>
+            </a:r>
+            <a:endParaRPr lang="en-US" sz="1500" dirty="0"/>
+          </a:p>
+        </p:txBody>
+      </p:sp>
+      <p:sp>
+        <p:nvSpPr>
+          <p:cNvPr id="5" name="Panel negativo"/>
+          <p:cNvSpPr/>
+          <p:nvPr/>
+        </p:nvSpPr>
+        <p:spPr>
+          <a:xfrm>
+            <a:off x="457200" y="2331720"/>
+            <a:ext cx="5532120" cy="3840480"/>
           </a:xfrm>
           <a:prstGeom prst="roundRect">
             <a:avLst>
-              <a:gd name="adj" fmla="val 3600"/>
+              <a:gd name="adj" fmla="val 4286"/>
             </a:avLst>
           </a:prstGeom>
           <a:solidFill>
@@ -4547,7 +5080,7 @@
       </p:sp>
       <p:pic>
         <p:nvPicPr>
-          <p:cNvPr id="5" name="Logo negativo" descr="Araucaria · negativo">    </p:cNvPr>
+          <p:cNvPr id="6" name="Logo negativo" descr="Sello: anillos y araucaria · negativo">    </p:cNvPr>
           <p:cNvPicPr>
             <a:picLocks noChangeAspect="1"/>
           </p:cNvPicPr>
@@ -4561,8 +5094,8 @@
         </p:blipFill>
         <p:spPr>
           <a:xfrm>
-            <a:off x="1165860" y="3041021"/>
-            <a:ext cx="4114800" cy="1507478"/>
+            <a:off x="1348740" y="3473780"/>
+            <a:ext cx="3749040" cy="1373480"/>
           </a:xfrm>
           <a:prstGeom prst="rect">
             <a:avLst/>
@@ -4571,7 +5104,7 @@
       </p:pic>
       <p:sp>
         <p:nvSpPr>
-          <p:cNvPr id="6" name="Rótulo"/>
+          <p:cNvPr id="7" name="Rótulo"/>
           <p:cNvSpPr txBox="1"/>
           <p:nvPr/>
         </p:nvSpPr>
@@ -4607,18 +5140,18 @@
       </p:sp>
       <p:sp>
         <p:nvSpPr>
-          <p:cNvPr id="7" name="Panel una tinta sobre kraft"/>
-          <p:cNvSpPr/>
-          <p:nvPr/>
-        </p:nvSpPr>
-        <p:spPr>
-          <a:xfrm>
-            <a:off x="6199632" y="1600200"/>
-            <a:ext cx="5532120" cy="4572000"/>
+          <p:cNvPr id="8" name="Panel una tinta sobre kraft"/>
+          <p:cNvSpPr/>
+          <p:nvPr/>
+        </p:nvSpPr>
+        <p:spPr>
+          <a:xfrm>
+            <a:off x="6199632" y="2331720"/>
+            <a:ext cx="5532120" cy="3840480"/>
           </a:xfrm>
           <a:prstGeom prst="roundRect">
             <a:avLst>
-              <a:gd name="adj" fmla="val 3600"/>
+              <a:gd name="adj" fmla="val 4286"/>
             </a:avLst>
           </a:prstGeom>
           <a:solidFill>
@@ -4634,7 +5167,7 @@
       </p:sp>
       <p:pic>
         <p:nvPicPr>
-          <p:cNvPr id="8" name="Logo una tinta sobre kraft" descr="Araucaria · una tinta sobre kraft">    </p:cNvPr>
+          <p:cNvPr id="9" name="Logo una tinta sobre kraft" descr="Sello: anillos y araucaria · una tinta sobre kraft">    </p:cNvPr>
           <p:cNvPicPr>
             <a:picLocks noChangeAspect="1"/>
           </p:cNvPicPr>
@@ -4648,8 +5181,8 @@
         </p:blipFill>
         <p:spPr>
           <a:xfrm>
-            <a:off x="6908292" y="3041021"/>
-            <a:ext cx="4114800" cy="1507478"/>
+            <a:off x="7091172" y="3473780"/>
+            <a:ext cx="3749040" cy="1373480"/>
           </a:xfrm>
           <a:prstGeom prst="rect">
             <a:avLst/>
@@ -4658,7 +5191,7 @@
       </p:pic>
       <p:sp>
         <p:nvSpPr>
-          <p:cNvPr id="9" name="Rótulo"/>
+          <p:cNvPr id="10" name="Rótulo"/>
           <p:cNvSpPr txBox="1"/>
           <p:nvPr/>
         </p:nvSpPr>
@@ -4767,51 +5300,89 @@
           <p:cNvPr id="2" name="Text 0"/>
           <p:cNvSpPr/>
           <p:nvPr>
-            <p:ph idx="100" type="title" hasCustomPrompt="1"/>
-          </p:nvPr>
-        </p:nvSpPr>
-        <p:spPr>
-          <a:xfrm>
-            <a:off x="457200" y="365760"/>
-            <a:ext cx="8686800" cy="685800"/>
-          </a:xfrm>
-          <a:prstGeom prst="rect">
-            <a:avLst/>
-          </a:prstGeom>
-          <a:noFill/>
-          <a:ln/>
-        </p:spPr>
-        <p:txBody>
-          <a:bodyPr wrap="square" lIns="0" tIns="0" rIns="0" bIns="0" rtlCol="0" anchor="ctr"/>
+            <p:ph idx="100" type="body" hasCustomPrompt="1"/>
+          </p:nvPr>
+        </p:nvSpPr>
+        <p:spPr>
+          <a:xfrm>
+            <a:off x="731520" y="2011680"/>
+            <a:ext cx="5486400" cy="457200"/>
+          </a:xfrm>
+          <a:prstGeom prst="rect">
+            <a:avLst/>
+          </a:prstGeom>
+          <a:noFill/>
+          <a:ln/>
+        </p:spPr>
+        <p:txBody>
+          <a:bodyPr wrap="square" lIns="0" tIns="0" rIns="0" bIns="0" rtlCol="0"/>
+          <a:lstStyle/>
+          <a:p>
+            <a:pPr indent="0" marL="0">
+              <a:buNone/>
+            </a:pPr>
+            <a:r>
+              <a:rPr lang="en-US" sz="1400" spc="400" kern="0" dirty="0">
+                <a:solidFill>
+                  <a:schemeClr val="accent1"/>
+                </a:solidFill>
+              </a:rPr>
+              <a:t>SECCIÓN 3 · 5 PROPUESTAS</a:t>
+            </a:r>
+            <a:endParaRPr lang="en-US" sz="1400" dirty="0"/>
+          </a:p>
+        </p:txBody>
+      </p:sp>
+      <p:sp>
+        <p:nvSpPr>
+          <p:cNvPr id="3" name="Text 0"/>
+          <p:cNvSpPr/>
+          <p:nvPr>
+            <p:ph idx="101" type="title" hasCustomPrompt="1"/>
+          </p:nvPr>
+        </p:nvSpPr>
+        <p:spPr>
+          <a:xfrm>
+            <a:off x="731520" y="2560320"/>
+            <a:ext cx="10698480" cy="1280160"/>
+          </a:xfrm>
+          <a:prstGeom prst="rect">
+            <a:avLst/>
+          </a:prstGeom>
+          <a:noFill/>
+          <a:ln/>
+        </p:spPr>
+        <p:txBody>
+          <a:bodyPr wrap="square" lIns="0" tIns="0" rIns="0" bIns="0" rtlCol="0" anchor="t"/>
           <a:lstStyle/>
           <a:p>
             <a:pPr algn="l" indent="0" marL="0">
               <a:buNone/>
             </a:pPr>
             <a:r>
-              <a:rPr lang="en-US" sz="3000" b="1" dirty="0">
-                <a:solidFill>
-                  <a:schemeClr val="tx1"/>
-                </a:solidFill>
-              </a:rPr>
-              <a:t>Pino</a:t>
-            </a:r>
-            <a:endParaRPr lang="en-US" sz="3000" dirty="0"/>
-          </a:p>
-        </p:txBody>
-      </p:sp>
-      <p:sp>
-        <p:nvSpPr>
-          <p:cNvPr id="3" name="Text 0"/>
-          <p:cNvSpPr/>
-          <p:nvPr>
-            <p:ph idx="101" type="body" hasCustomPrompt="1"/>
-          </p:nvPr>
-        </p:nvSpPr>
-        <p:spPr>
-          <a:xfrm>
-            <a:off x="457200" y="1005840"/>
-            <a:ext cx="8686800" cy="365760"/>
+              <a:rPr lang="en-US" sz="5400" b="1" dirty="0">
+                <a:solidFill>
+                  <a:schemeClr val="bg2"/>
+                </a:solidFill>
+              </a:rPr>
+              <a:t>Árbol solo</a:t>
+            </a:r>
+            <a:endParaRPr lang="en-US" sz="5400" dirty="0"/>
+          </a:p>
+        </p:txBody>
+      </p:sp>
+      <p:sp>
+        <p:nvSpPr>
+          <p:cNvPr id="4" name="Text 0"/>
+          <p:cNvSpPr/>
+          <p:nvPr>
+            <p:ph idx="102" type="body" hasCustomPrompt="1"/>
+          </p:nvPr>
+        </p:nvSpPr>
+        <p:spPr>
+          <a:xfrm>
+            <a:off x="731520" y="3931920"/>
+            <a:ext cx="8778240" cy="1645920"/>
           </a:xfrm>
           <a:prstGeom prst="rect">
             <a:avLst/>
@@ -4824,236 +5395,20 @@
           <a:lstStyle/>
           <a:p>
             <a:pPr indent="0" marL="0">
-              <a:buNone/>
-            </a:pPr>
-            <a:r>
-              <a:rPr lang="en-US" sz="1200" spc="300" kern="0" dirty="0">
-                <a:solidFill>
-                  <a:schemeClr val="accent6"/>
-                </a:solidFill>
-              </a:rPr>
-              <a:t>ÁRBOL SOLO · P1</a:t>
-            </a:r>
-            <a:endParaRPr lang="en-US" sz="1200" dirty="0"/>
-          </a:p>
-        </p:txBody>
-      </p:sp>
-      <p:sp>
-        <p:nvSpPr>
-          <p:cNvPr id="4" name="Panel negativo"/>
-          <p:cNvSpPr/>
-          <p:nvPr/>
-        </p:nvSpPr>
-        <p:spPr>
-          <a:xfrm>
-            <a:off x="457200" y="1600200"/>
-            <a:ext cx="5532120" cy="4572000"/>
-          </a:xfrm>
-          <a:prstGeom prst="roundRect">
-            <a:avLst>
-              <a:gd name="adj" fmla="val 3600"/>
-            </a:avLst>
-          </a:prstGeom>
-          <a:solidFill>
-            <a:schemeClr val="tx1"/>
-          </a:solidFill>
-          <a:ln w="12700">
-            <a:solidFill>
-              <a:schemeClr val="tx1"/>
-            </a:solidFill>
-            <a:prstDash val="solid"/>
-          </a:ln>
-        </p:spPr>
-      </p:sp>
-      <p:pic>
-        <p:nvPicPr>
-          <p:cNvPr id="5" name="Logo negativo" descr="Pino · negativo">    </p:cNvPr>
-          <p:cNvPicPr>
-            <a:picLocks noChangeAspect="1"/>
-          </p:cNvPicPr>
-          <p:nvPr/>
-        </p:nvPicPr>
-        <p:blipFill>
-          <a:blip r:embed="rId1"/>
-          <a:stretch>
-            <a:fillRect/>
-          </a:stretch>
-        </p:blipFill>
-        <p:spPr>
-          <a:xfrm>
-            <a:off x="1165860" y="3041021"/>
-            <a:ext cx="4114800" cy="1507478"/>
-          </a:xfrm>
-          <a:prstGeom prst="rect">
-            <a:avLst/>
-          </a:prstGeom>
-        </p:spPr>
-      </p:pic>
-      <p:sp>
-        <p:nvSpPr>
-          <p:cNvPr id="6" name="Rótulo"/>
-          <p:cNvSpPr txBox="1"/>
-          <p:nvPr/>
-        </p:nvSpPr>
-        <p:spPr>
-          <a:xfrm>
-            <a:off x="731520" y="5715000"/>
-            <a:ext cx="4572000" cy="274320"/>
-          </a:xfrm>
-          <a:prstGeom prst="rect">
-            <a:avLst/>
-          </a:prstGeom>
-          <a:noFill/>
-          <a:ln/>
-        </p:spPr>
-        <p:txBody>
-          <a:bodyPr wrap="square" lIns="0" tIns="0" rIns="0" bIns="0" rtlCol="0" anchor="ctr"/>
-          <a:lstStyle/>
-          <a:p>
-            <a:pPr indent="0" marL="0">
-              <a:buNone/>
-            </a:pPr>
-            <a:r>
-              <a:rPr lang="en-US" sz="1000" spc="300" kern="0" dirty="0">
+              <a:lnSpc>
+                <a:spcPct val="120000"/>
+              </a:lnSpc>
+              <a:buNone/>
+            </a:pPr>
+            <a:r>
+              <a:rPr lang="en-US" sz="1800" dirty="0">
                 <a:solidFill>
                   <a:schemeClr val="accent5"/>
                 </a:solidFill>
               </a:rPr>
-              <a:t>NEGATIVO</a:t>
-            </a:r>
-            <a:endParaRPr lang="en-US" sz="1000" dirty="0"/>
-          </a:p>
-        </p:txBody>
-      </p:sp>
-      <p:sp>
-        <p:nvSpPr>
-          <p:cNvPr id="7" name="Panel una tinta sobre kraft"/>
-          <p:cNvSpPr/>
-          <p:nvPr/>
-        </p:nvSpPr>
-        <p:spPr>
-          <a:xfrm>
-            <a:off x="6199632" y="1600200"/>
-            <a:ext cx="5532120" cy="4572000"/>
-          </a:xfrm>
-          <a:prstGeom prst="roundRect">
-            <a:avLst>
-              <a:gd name="adj" fmla="val 3600"/>
-            </a:avLst>
-          </a:prstGeom>
-          <a:solidFill>
-            <a:schemeClr val="accent1"/>
-          </a:solidFill>
-          <a:ln w="12700">
-            <a:solidFill>
-              <a:schemeClr val="accent1"/>
-            </a:solidFill>
-            <a:prstDash val="solid"/>
-          </a:ln>
-        </p:spPr>
-      </p:sp>
-      <p:pic>
-        <p:nvPicPr>
-          <p:cNvPr id="8" name="Logo una tinta sobre kraft" descr="Pino · una tinta sobre kraft">    </p:cNvPr>
-          <p:cNvPicPr>
-            <a:picLocks noChangeAspect="1"/>
-          </p:cNvPicPr>
-          <p:nvPr/>
-        </p:nvPicPr>
-        <p:blipFill>
-          <a:blip r:embed="rId2"/>
-          <a:stretch>
-            <a:fillRect/>
-          </a:stretch>
-        </p:blipFill>
-        <p:spPr>
-          <a:xfrm>
-            <a:off x="6908292" y="3041021"/>
-            <a:ext cx="4114800" cy="1507478"/>
-          </a:xfrm>
-          <a:prstGeom prst="rect">
-            <a:avLst/>
-          </a:prstGeom>
-        </p:spPr>
-      </p:pic>
-      <p:sp>
-        <p:nvSpPr>
-          <p:cNvPr id="9" name="Rótulo"/>
-          <p:cNvSpPr txBox="1"/>
-          <p:nvPr/>
-        </p:nvSpPr>
-        <p:spPr>
-          <a:xfrm>
-            <a:off x="6473952" y="5715000"/>
-            <a:ext cx="4572000" cy="274320"/>
-          </a:xfrm>
-          <a:prstGeom prst="rect">
-            <a:avLst/>
-          </a:prstGeom>
-          <a:noFill/>
-          <a:ln/>
-        </p:spPr>
-        <p:txBody>
-          <a:bodyPr wrap="square" lIns="0" tIns="0" rIns="0" bIns="0" rtlCol="0" anchor="ctr"/>
-          <a:lstStyle/>
-          <a:p>
-            <a:pPr indent="0" marL="0">
-              <a:buNone/>
-            </a:pPr>
-            <a:r>
-              <a:rPr lang="en-US" sz="1000" spc="300" kern="0" dirty="0">
-                <a:solidFill>
-                  <a:schemeClr val="tx2"/>
-                </a:solidFill>
-              </a:rPr>
-              <a:t>UNA TINTA SOBRE KRAFT</a:t>
-            </a:r>
-            <a:endParaRPr lang="en-US" sz="1000" dirty="0"/>
-          </a:p>
-        </p:txBody>
-      </p:sp>
-      <p:sp>
-        <p:nvSpPr>
-          <p:cNvPr id="25" name="Slide Number Placeholder 0"/>
-          <p:cNvSpPr>
-            <a:spLocks noGrp="1"/>
-          </p:cNvSpPr>
-          <p:nvPr>
-            <p:ph type="sldNum" sz="quarter" idx="4294967295"/>
-          </p:nvPr>
-        </p:nvSpPr>
-        <p:spPr>
-          <a:xfrm>
-            <a:off x="11247120" y="6400800"/>
-            <a:ext cx="502920" cy="274320"/>
-          </a:xfrm>
-          <a:prstGeom prst="rect">
-            <a:avLst/>
-          </a:prstGeom>
-          <a:extLst>
-            <a:ext uri="{C572A759-6A51-4108-AA02-DFA0A04FC94B}">
-              <ma14:wrappingTextBoxFlag xmlns:ma14="http://schemas.microsoft.com/office/mac/drawingml/2011/main" val="0"/>
-            </a:ext>
-          </a:extLst>
-        </p:spPr>
-        <p:txBody>
-          <a:bodyPr/>
-          <a:lstStyle>
-            <a:lvl1pPr>
-              <a:defRPr sz="1000">
-                <a:solidFill>
-                  <a:schemeClr val="accent6"/>
-                </a:solidFill>
-              </a:defRPr>
-            </a:lvl1pPr>
-          </a:lstStyle>
-          <a:p>
-            <a:pPr algn="r"/>
-            <a:fld id="{F7021451-1387-4CA6-816F-3879F97B5CBC}" type="slidenum">
-              <a:rPr b="0" lang="en-US"/>
-              <a:t>16</a:t>
-            </a:fld>
-            <a:endParaRPr lang="en-US"/>
+              <a:t>La silueta como signo. Sin contenedor ni letra, el árbol habla por sí mismo y se integra al logotipo con la mayor simplicidad. El desafío es la especie: araucaria como emblema o pino como materia prima.</a:t>
+            </a:r>
+            <a:endParaRPr lang="en-US" sz="1800" dirty="0"/>
           </a:p>
         </p:txBody>
       </p:sp>
@@ -5114,7 +5469,7 @@
                   <a:schemeClr val="tx1"/>
                 </a:solidFill>
               </a:rPr>
-              <a:t>Pino pleno</a:t>
+              <a:t>Araucaria de ramas</a:t>
             </a:r>
             <a:endParaRPr lang="en-US" sz="3000" dirty="0"/>
           </a:p>
@@ -5152,7 +5507,7 @@
                   <a:schemeClr val="accent6"/>
                 </a:solidFill>
               </a:rPr>
-              <a:t>ÁRBOL SOLO · P2</a:t>
+              <a:t>ÁRBOL SOLO · A2</a:t>
             </a:r>
             <a:endParaRPr lang="en-US" sz="1200" dirty="0"/>
           </a:p>
@@ -5160,18 +5515,59 @@
       </p:sp>
       <p:sp>
         <p:nvSpPr>
-          <p:cNvPr id="4" name="Panel negativo"/>
-          <p:cNvSpPr/>
-          <p:nvPr/>
-        </p:nvSpPr>
-        <p:spPr>
-          <a:xfrm>
-            <a:off x="457200" y="1600200"/>
-            <a:ext cx="5532120" cy="4572000"/>
+          <p:cNvPr id="4" name="Text 0"/>
+          <p:cNvSpPr/>
+          <p:nvPr>
+            <p:ph idx="102" type="body" hasCustomPrompt="1"/>
+          </p:nvPr>
+        </p:nvSpPr>
+        <p:spPr>
+          <a:xfrm>
+            <a:off x="457200" y="1417320"/>
+            <a:ext cx="11247120" cy="777240"/>
+          </a:xfrm>
+          <a:prstGeom prst="rect">
+            <a:avLst/>
+          </a:prstGeom>
+          <a:noFill/>
+          <a:ln/>
+        </p:spPr>
+        <p:txBody>
+          <a:bodyPr wrap="square" lIns="0" tIns="0" rIns="0" bIns="0" rtlCol="0" anchor="t"/>
+          <a:lstStyle/>
+          <a:p>
+            <a:pPr indent="0" marL="0">
+              <a:lnSpc>
+                <a:spcPct val="115000"/>
+              </a:lnSpc>
+              <a:buNone/>
+            </a:pPr>
+            <a:r>
+              <a:rPr lang="en-US" sz="1500" dirty="0">
+                <a:solidFill>
+                  <a:schemeClr val="tx1"/>
+                </a:solidFill>
+              </a:rPr>
+              <a:t>La silueta inconfundible del pino Paraná: copa plana en capas y fuste alto. Reconocida en todo el litoral como símbolo misionero.</a:t>
+            </a:r>
+            <a:endParaRPr lang="en-US" sz="1500" dirty="0"/>
+          </a:p>
+        </p:txBody>
+      </p:sp>
+      <p:sp>
+        <p:nvSpPr>
+          <p:cNvPr id="5" name="Panel negativo"/>
+          <p:cNvSpPr/>
+          <p:nvPr/>
+        </p:nvSpPr>
+        <p:spPr>
+          <a:xfrm>
+            <a:off x="457200" y="2331720"/>
+            <a:ext cx="5532120" cy="3840480"/>
           </a:xfrm>
           <a:prstGeom prst="roundRect">
             <a:avLst>
-              <a:gd name="adj" fmla="val 3600"/>
+              <a:gd name="adj" fmla="val 4286"/>
             </a:avLst>
           </a:prstGeom>
           <a:solidFill>
@@ -5187,7 +5583,7 @@
       </p:sp>
       <p:pic>
         <p:nvPicPr>
-          <p:cNvPr id="5" name="Logo negativo" descr="Pino pleno · negativo">    </p:cNvPr>
+          <p:cNvPr id="6" name="Logo negativo" descr="Araucaria de ramas · negativo">    </p:cNvPr>
           <p:cNvPicPr>
             <a:picLocks noChangeAspect="1"/>
           </p:cNvPicPr>
@@ -5201,8 +5597,8 @@
         </p:blipFill>
         <p:spPr>
           <a:xfrm>
-            <a:off x="1165860" y="3041021"/>
-            <a:ext cx="4114800" cy="1507478"/>
+            <a:off x="1348740" y="3473780"/>
+            <a:ext cx="3749040" cy="1373480"/>
           </a:xfrm>
           <a:prstGeom prst="rect">
             <a:avLst/>
@@ -5211,7 +5607,7 @@
       </p:pic>
       <p:sp>
         <p:nvSpPr>
-          <p:cNvPr id="6" name="Rótulo"/>
+          <p:cNvPr id="7" name="Rótulo"/>
           <p:cNvSpPr txBox="1"/>
           <p:nvPr/>
         </p:nvSpPr>
@@ -5247,18 +5643,18 @@
       </p:sp>
       <p:sp>
         <p:nvSpPr>
-          <p:cNvPr id="7" name="Panel una tinta sobre kraft"/>
-          <p:cNvSpPr/>
-          <p:nvPr/>
-        </p:nvSpPr>
-        <p:spPr>
-          <a:xfrm>
-            <a:off x="6199632" y="1600200"/>
-            <a:ext cx="5532120" cy="4572000"/>
+          <p:cNvPr id="8" name="Panel una tinta sobre kraft"/>
+          <p:cNvSpPr/>
+          <p:nvPr/>
+        </p:nvSpPr>
+        <p:spPr>
+          <a:xfrm>
+            <a:off x="6199632" y="2331720"/>
+            <a:ext cx="5532120" cy="3840480"/>
           </a:xfrm>
           <a:prstGeom prst="roundRect">
             <a:avLst>
-              <a:gd name="adj" fmla="val 3600"/>
+              <a:gd name="adj" fmla="val 4286"/>
             </a:avLst>
           </a:prstGeom>
           <a:solidFill>
@@ -5274,7 +5670,7 @@
       </p:sp>
       <p:pic>
         <p:nvPicPr>
-          <p:cNvPr id="8" name="Logo una tinta sobre kraft" descr="Pino pleno · una tinta sobre kraft">    </p:cNvPr>
+          <p:cNvPr id="9" name="Logo una tinta sobre kraft" descr="Araucaria de ramas · una tinta sobre kraft">    </p:cNvPr>
           <p:cNvPicPr>
             <a:picLocks noChangeAspect="1"/>
           </p:cNvPicPr>
@@ -5288,8 +5684,8 @@
         </p:blipFill>
         <p:spPr>
           <a:xfrm>
-            <a:off x="6908292" y="3041021"/>
-            <a:ext cx="4114800" cy="1507478"/>
+            <a:off x="7091172" y="3473780"/>
+            <a:ext cx="3749040" cy="1373480"/>
           </a:xfrm>
           <a:prstGeom prst="rect">
             <a:avLst/>
@@ -5298,7 +5694,7 @@
       </p:pic>
       <p:sp>
         <p:nvSpPr>
-          <p:cNvPr id="9" name="Rótulo"/>
+          <p:cNvPr id="10" name="Rótulo"/>
           <p:cNvSpPr txBox="1"/>
           <p:nvPr/>
         </p:nvSpPr>
@@ -5434,7 +5830,7 @@
                   <a:schemeClr val="tx1"/>
                 </a:solidFill>
               </a:rPr>
-              <a:t>Trazo pesado</a:t>
+              <a:t>Araucaria</a:t>
             </a:r>
             <a:endParaRPr lang="en-US" sz="3000" dirty="0"/>
           </a:p>
@@ -5472,7 +5868,7 @@
                   <a:schemeClr val="accent6"/>
                 </a:solidFill>
               </a:rPr>
-              <a:t>ÁRBOL SOLO · P3</a:t>
+              <a:t>ÁRBOL SOLO · P4</a:t>
             </a:r>
             <a:endParaRPr lang="en-US" sz="1200" dirty="0"/>
           </a:p>
@@ -5480,18 +5876,59 @@
       </p:sp>
       <p:sp>
         <p:nvSpPr>
-          <p:cNvPr id="4" name="Panel negativo"/>
-          <p:cNvSpPr/>
-          <p:nvPr/>
-        </p:nvSpPr>
-        <p:spPr>
-          <a:xfrm>
-            <a:off x="457200" y="1600200"/>
-            <a:ext cx="5532120" cy="4572000"/>
+          <p:cNvPr id="4" name="Text 0"/>
+          <p:cNvSpPr/>
+          <p:nvPr>
+            <p:ph idx="102" type="body" hasCustomPrompt="1"/>
+          </p:nvPr>
+        </p:nvSpPr>
+        <p:spPr>
+          <a:xfrm>
+            <a:off x="457200" y="1417320"/>
+            <a:ext cx="11247120" cy="777240"/>
+          </a:xfrm>
+          <a:prstGeom prst="rect">
+            <a:avLst/>
+          </a:prstGeom>
+          <a:noFill/>
+          <a:ln/>
+        </p:spPr>
+        <p:txBody>
+          <a:bodyPr wrap="square" lIns="0" tIns="0" rIns="0" bIns="0" rtlCol="0" anchor="t"/>
+          <a:lstStyle/>
+          <a:p>
+            <a:pPr indent="0" marL="0">
+              <a:lnSpc>
+                <a:spcPct val="115000"/>
+              </a:lnSpc>
+              <a:buNone/>
+            </a:pPr>
+            <a:r>
+              <a:rPr lang="en-US" sz="1500" dirty="0">
+                <a:solidFill>
+                  <a:schemeClr val="tx1"/>
+                </a:solidFill>
+              </a:rPr>
+              <a:t>Versión vertical y estilizada de la araucaria, de trazo afinado. Liviana y elegante junto al logotipo.</a:t>
+            </a:r>
+            <a:endParaRPr lang="en-US" sz="1500" dirty="0"/>
+          </a:p>
+        </p:txBody>
+      </p:sp>
+      <p:sp>
+        <p:nvSpPr>
+          <p:cNvPr id="5" name="Panel negativo"/>
+          <p:cNvSpPr/>
+          <p:nvPr/>
+        </p:nvSpPr>
+        <p:spPr>
+          <a:xfrm>
+            <a:off x="457200" y="2331720"/>
+            <a:ext cx="5532120" cy="3840480"/>
           </a:xfrm>
           <a:prstGeom prst="roundRect">
             <a:avLst>
-              <a:gd name="adj" fmla="val 3600"/>
+              <a:gd name="adj" fmla="val 4286"/>
             </a:avLst>
           </a:prstGeom>
           <a:solidFill>
@@ -5507,7 +5944,7 @@
       </p:sp>
       <p:pic>
         <p:nvPicPr>
-          <p:cNvPr id="5" name="Logo negativo" descr="Trazo pesado · negativo">    </p:cNvPr>
+          <p:cNvPr id="6" name="Logo negativo" descr="Araucaria · negativo">    </p:cNvPr>
           <p:cNvPicPr>
             <a:picLocks noChangeAspect="1"/>
           </p:cNvPicPr>
@@ -5521,8 +5958,8 @@
         </p:blipFill>
         <p:spPr>
           <a:xfrm>
-            <a:off x="1165860" y="3041021"/>
-            <a:ext cx="4114800" cy="1507478"/>
+            <a:off x="1348740" y="3473780"/>
+            <a:ext cx="3749040" cy="1373480"/>
           </a:xfrm>
           <a:prstGeom prst="rect">
             <a:avLst/>
@@ -5531,7 +5968,7 @@
       </p:pic>
       <p:sp>
         <p:nvSpPr>
-          <p:cNvPr id="6" name="Rótulo"/>
+          <p:cNvPr id="7" name="Rótulo"/>
           <p:cNvSpPr txBox="1"/>
           <p:nvPr/>
         </p:nvSpPr>
@@ -5567,18 +6004,18 @@
       </p:sp>
       <p:sp>
         <p:nvSpPr>
-          <p:cNvPr id="7" name="Panel una tinta sobre kraft"/>
-          <p:cNvSpPr/>
-          <p:nvPr/>
-        </p:nvSpPr>
-        <p:spPr>
-          <a:xfrm>
-            <a:off x="6199632" y="1600200"/>
-            <a:ext cx="5532120" cy="4572000"/>
+          <p:cNvPr id="8" name="Panel una tinta sobre kraft"/>
+          <p:cNvSpPr/>
+          <p:nvPr/>
+        </p:nvSpPr>
+        <p:spPr>
+          <a:xfrm>
+            <a:off x="6199632" y="2331720"/>
+            <a:ext cx="5532120" cy="3840480"/>
           </a:xfrm>
           <a:prstGeom prst="roundRect">
             <a:avLst>
-              <a:gd name="adj" fmla="val 3600"/>
+              <a:gd name="adj" fmla="val 4286"/>
             </a:avLst>
           </a:prstGeom>
           <a:solidFill>
@@ -5594,7 +6031,7 @@
       </p:sp>
       <p:pic>
         <p:nvPicPr>
-          <p:cNvPr id="8" name="Logo una tinta sobre kraft" descr="Trazo pesado · una tinta sobre kraft">    </p:cNvPr>
+          <p:cNvPr id="9" name="Logo una tinta sobre kraft" descr="Araucaria · una tinta sobre kraft">    </p:cNvPr>
           <p:cNvPicPr>
             <a:picLocks noChangeAspect="1"/>
           </p:cNvPicPr>
@@ -5608,8 +6045,8 @@
         </p:blipFill>
         <p:spPr>
           <a:xfrm>
-            <a:off x="6908292" y="3041021"/>
-            <a:ext cx="4114800" cy="1507478"/>
+            <a:off x="7091172" y="3473780"/>
+            <a:ext cx="3749040" cy="1373480"/>
           </a:xfrm>
           <a:prstGeom prst="rect">
             <a:avLst/>
@@ -5618,7 +6055,7 @@
       </p:pic>
       <p:sp>
         <p:nvSpPr>
-          <p:cNvPr id="9" name="Rótulo"/>
+          <p:cNvPr id="10" name="Rótulo"/>
           <p:cNvSpPr txBox="1"/>
           <p:nvPr/>
         </p:nvSpPr>
@@ -5692,6 +6129,367 @@
             <a:fld id="{F7021451-1387-4CA6-816F-3879F97B5CBC}" type="slidenum">
               <a:rPr b="0" lang="en-US"/>
               <a:t>18</a:t>
+            </a:fld>
+            <a:endParaRPr lang="en-US"/>
+          </a:p>
+        </p:txBody>
+      </p:sp>
+    </p:spTree>
+  </p:cSld>
+  <p:clrMapOvr>
+    <a:masterClrMapping/>
+  </p:clrMapOvr>
+</p:sld>
+</file>
+
+<file path=ppt/slides/slide19.xml><?xml version="1.0" encoding="utf-8"?>
+<p:sld xmlns:a="http://schemas.openxmlformats.org/drawingml/2006/main" xmlns:r="http://schemas.openxmlformats.org/officeDocument/2006/relationships" xmlns:p="http://schemas.openxmlformats.org/presentationml/2006/main">
+  <p:cSld name="Slide 19">
+    <p:spTree>
+      <p:nvGrpSpPr>
+        <p:cNvPr id="1" name=""/>
+        <p:cNvGrpSpPr/>
+        <p:nvPr/>
+      </p:nvGrpSpPr>
+      <p:grpSpPr>
+        <a:xfrm>
+          <a:off x="0" y="0"/>
+          <a:ext cx="0" cy="0"/>
+          <a:chOff x="0" y="0"/>
+          <a:chExt cx="0" cy="0"/>
+        </a:xfrm>
+      </p:grpSpPr>
+      <p:sp>
+        <p:nvSpPr>
+          <p:cNvPr id="2" name="Text 0"/>
+          <p:cNvSpPr/>
+          <p:nvPr>
+            <p:ph idx="100" type="title" hasCustomPrompt="1"/>
+          </p:nvPr>
+        </p:nvSpPr>
+        <p:spPr>
+          <a:xfrm>
+            <a:off x="457200" y="365760"/>
+            <a:ext cx="8686800" cy="685800"/>
+          </a:xfrm>
+          <a:prstGeom prst="rect">
+            <a:avLst/>
+          </a:prstGeom>
+          <a:noFill/>
+          <a:ln/>
+        </p:spPr>
+        <p:txBody>
+          <a:bodyPr wrap="square" lIns="0" tIns="0" rIns="0" bIns="0" rtlCol="0" anchor="ctr"/>
+          <a:lstStyle/>
+          <a:p>
+            <a:pPr algn="l" indent="0" marL="0">
+              <a:buNone/>
+            </a:pPr>
+            <a:r>
+              <a:rPr lang="en-US" sz="3000" b="1" dirty="0">
+                <a:solidFill>
+                  <a:schemeClr val="tx1"/>
+                </a:solidFill>
+              </a:rPr>
+              <a:t>Pino</a:t>
+            </a:r>
+            <a:endParaRPr lang="en-US" sz="3000" dirty="0"/>
+          </a:p>
+        </p:txBody>
+      </p:sp>
+      <p:sp>
+        <p:nvSpPr>
+          <p:cNvPr id="3" name="Text 0"/>
+          <p:cNvSpPr/>
+          <p:nvPr>
+            <p:ph idx="101" type="body" hasCustomPrompt="1"/>
+          </p:nvPr>
+        </p:nvSpPr>
+        <p:spPr>
+          <a:xfrm>
+            <a:off x="457200" y="1005840"/>
+            <a:ext cx="8686800" cy="365760"/>
+          </a:xfrm>
+          <a:prstGeom prst="rect">
+            <a:avLst/>
+          </a:prstGeom>
+          <a:noFill/>
+          <a:ln/>
+        </p:spPr>
+        <p:txBody>
+          <a:bodyPr wrap="square" lIns="0" tIns="0" rIns="0" bIns="0" rtlCol="0" anchor="t"/>
+          <a:lstStyle/>
+          <a:p>
+            <a:pPr indent="0" marL="0">
+              <a:buNone/>
+            </a:pPr>
+            <a:r>
+              <a:rPr lang="en-US" sz="1200" spc="300" kern="0" dirty="0">
+                <a:solidFill>
+                  <a:schemeClr val="accent6"/>
+                </a:solidFill>
+              </a:rPr>
+              <a:t>ÁRBOL SOLO · P1</a:t>
+            </a:r>
+            <a:endParaRPr lang="en-US" sz="1200" dirty="0"/>
+          </a:p>
+        </p:txBody>
+      </p:sp>
+      <p:sp>
+        <p:nvSpPr>
+          <p:cNvPr id="4" name="Text 0"/>
+          <p:cNvSpPr/>
+          <p:nvPr>
+            <p:ph idx="102" type="body" hasCustomPrompt="1"/>
+          </p:nvPr>
+        </p:nvSpPr>
+        <p:spPr>
+          <a:xfrm>
+            <a:off x="457200" y="1417320"/>
+            <a:ext cx="11247120" cy="777240"/>
+          </a:xfrm>
+          <a:prstGeom prst="rect">
+            <a:avLst/>
+          </a:prstGeom>
+          <a:noFill/>
+          <a:ln/>
+        </p:spPr>
+        <p:txBody>
+          <a:bodyPr wrap="square" lIns="0" tIns="0" rIns="0" bIns="0" rtlCol="0" anchor="t"/>
+          <a:lstStyle/>
+          <a:p>
+            <a:pPr indent="0" marL="0">
+              <a:lnSpc>
+                <a:spcPct val="115000"/>
+              </a:lnSpc>
+              <a:buNone/>
+            </a:pPr>
+            <a:r>
+              <a:rPr lang="en-US" sz="1500" dirty="0">
+                <a:solidFill>
+                  <a:schemeClr val="tx1"/>
+                </a:solidFill>
+              </a:rPr>
+              <a:t>El pino elliottii y taeda, materia prima de la compañía, dibujado con ramas que se afinan. Honestidad de origen: el árbol que se planta es el árbol que se muestra.</a:t>
+            </a:r>
+            <a:endParaRPr lang="en-US" sz="1500" dirty="0"/>
+          </a:p>
+        </p:txBody>
+      </p:sp>
+      <p:sp>
+        <p:nvSpPr>
+          <p:cNvPr id="5" name="Panel negativo"/>
+          <p:cNvSpPr/>
+          <p:nvPr/>
+        </p:nvSpPr>
+        <p:spPr>
+          <a:xfrm>
+            <a:off x="457200" y="2331720"/>
+            <a:ext cx="5532120" cy="3840480"/>
+          </a:xfrm>
+          <a:prstGeom prst="roundRect">
+            <a:avLst>
+              <a:gd name="adj" fmla="val 4286"/>
+            </a:avLst>
+          </a:prstGeom>
+          <a:solidFill>
+            <a:schemeClr val="tx1"/>
+          </a:solidFill>
+          <a:ln w="12700">
+            <a:solidFill>
+              <a:schemeClr val="tx1"/>
+            </a:solidFill>
+            <a:prstDash val="solid"/>
+          </a:ln>
+        </p:spPr>
+      </p:sp>
+      <p:pic>
+        <p:nvPicPr>
+          <p:cNvPr id="6" name="Logo negativo" descr="Pino · negativo">    </p:cNvPr>
+          <p:cNvPicPr>
+            <a:picLocks noChangeAspect="1"/>
+          </p:cNvPicPr>
+          <p:nvPr/>
+        </p:nvPicPr>
+        <p:blipFill>
+          <a:blip r:embed="rId1"/>
+          <a:stretch>
+            <a:fillRect/>
+          </a:stretch>
+        </p:blipFill>
+        <p:spPr>
+          <a:xfrm>
+            <a:off x="1348740" y="3473780"/>
+            <a:ext cx="3749040" cy="1373480"/>
+          </a:xfrm>
+          <a:prstGeom prst="rect">
+            <a:avLst/>
+          </a:prstGeom>
+        </p:spPr>
+      </p:pic>
+      <p:sp>
+        <p:nvSpPr>
+          <p:cNvPr id="7" name="Rótulo"/>
+          <p:cNvSpPr txBox="1"/>
+          <p:nvPr/>
+        </p:nvSpPr>
+        <p:spPr>
+          <a:xfrm>
+            <a:off x="731520" y="5715000"/>
+            <a:ext cx="4572000" cy="274320"/>
+          </a:xfrm>
+          <a:prstGeom prst="rect">
+            <a:avLst/>
+          </a:prstGeom>
+          <a:noFill/>
+          <a:ln/>
+        </p:spPr>
+        <p:txBody>
+          <a:bodyPr wrap="square" lIns="0" tIns="0" rIns="0" bIns="0" rtlCol="0" anchor="ctr"/>
+          <a:lstStyle/>
+          <a:p>
+            <a:pPr indent="0" marL="0">
+              <a:buNone/>
+            </a:pPr>
+            <a:r>
+              <a:rPr lang="en-US" sz="1000" spc="300" kern="0" dirty="0">
+                <a:solidFill>
+                  <a:schemeClr val="accent5"/>
+                </a:solidFill>
+              </a:rPr>
+              <a:t>NEGATIVO</a:t>
+            </a:r>
+            <a:endParaRPr lang="en-US" sz="1000" dirty="0"/>
+          </a:p>
+        </p:txBody>
+      </p:sp>
+      <p:sp>
+        <p:nvSpPr>
+          <p:cNvPr id="8" name="Panel una tinta sobre kraft"/>
+          <p:cNvSpPr/>
+          <p:nvPr/>
+        </p:nvSpPr>
+        <p:spPr>
+          <a:xfrm>
+            <a:off x="6199632" y="2331720"/>
+            <a:ext cx="5532120" cy="3840480"/>
+          </a:xfrm>
+          <a:prstGeom prst="roundRect">
+            <a:avLst>
+              <a:gd name="adj" fmla="val 4286"/>
+            </a:avLst>
+          </a:prstGeom>
+          <a:solidFill>
+            <a:schemeClr val="accent1"/>
+          </a:solidFill>
+          <a:ln w="12700">
+            <a:solidFill>
+              <a:schemeClr val="accent1"/>
+            </a:solidFill>
+            <a:prstDash val="solid"/>
+          </a:ln>
+        </p:spPr>
+      </p:sp>
+      <p:pic>
+        <p:nvPicPr>
+          <p:cNvPr id="9" name="Logo una tinta sobre kraft" descr="Pino · una tinta sobre kraft">    </p:cNvPr>
+          <p:cNvPicPr>
+            <a:picLocks noChangeAspect="1"/>
+          </p:cNvPicPr>
+          <p:nvPr/>
+        </p:nvPicPr>
+        <p:blipFill>
+          <a:blip r:embed="rId2"/>
+          <a:stretch>
+            <a:fillRect/>
+          </a:stretch>
+        </p:blipFill>
+        <p:spPr>
+          <a:xfrm>
+            <a:off x="7091172" y="3473780"/>
+            <a:ext cx="3749040" cy="1373480"/>
+          </a:xfrm>
+          <a:prstGeom prst="rect">
+            <a:avLst/>
+          </a:prstGeom>
+        </p:spPr>
+      </p:pic>
+      <p:sp>
+        <p:nvSpPr>
+          <p:cNvPr id="10" name="Rótulo"/>
+          <p:cNvSpPr txBox="1"/>
+          <p:nvPr/>
+        </p:nvSpPr>
+        <p:spPr>
+          <a:xfrm>
+            <a:off x="6473952" y="5715000"/>
+            <a:ext cx="4572000" cy="274320"/>
+          </a:xfrm>
+          <a:prstGeom prst="rect">
+            <a:avLst/>
+          </a:prstGeom>
+          <a:noFill/>
+          <a:ln/>
+        </p:spPr>
+        <p:txBody>
+          <a:bodyPr wrap="square" lIns="0" tIns="0" rIns="0" bIns="0" rtlCol="0" anchor="ctr"/>
+          <a:lstStyle/>
+          <a:p>
+            <a:pPr indent="0" marL="0">
+              <a:buNone/>
+            </a:pPr>
+            <a:r>
+              <a:rPr lang="en-US" sz="1000" spc="300" kern="0" dirty="0">
+                <a:solidFill>
+                  <a:schemeClr val="tx2"/>
+                </a:solidFill>
+              </a:rPr>
+              <a:t>UNA TINTA SOBRE KRAFT</a:t>
+            </a:r>
+            <a:endParaRPr lang="en-US" sz="1000" dirty="0"/>
+          </a:p>
+        </p:txBody>
+      </p:sp>
+      <p:sp>
+        <p:nvSpPr>
+          <p:cNvPr id="25" name="Slide Number Placeholder 0"/>
+          <p:cNvSpPr>
+            <a:spLocks noGrp="1"/>
+          </p:cNvSpPr>
+          <p:nvPr>
+            <p:ph type="sldNum" sz="quarter" idx="4294967295"/>
+          </p:nvPr>
+        </p:nvSpPr>
+        <p:spPr>
+          <a:xfrm>
+            <a:off x="11247120" y="6400800"/>
+            <a:ext cx="502920" cy="274320"/>
+          </a:xfrm>
+          <a:prstGeom prst="rect">
+            <a:avLst/>
+          </a:prstGeom>
+          <a:extLst>
+            <a:ext uri="{C572A759-6A51-4108-AA02-DFA0A04FC94B}">
+              <ma14:wrappingTextBoxFlag xmlns:ma14="http://schemas.microsoft.com/office/mac/drawingml/2011/main" val="0"/>
+            </a:ext>
+          </a:extLst>
+        </p:spPr>
+        <p:txBody>
+          <a:bodyPr/>
+          <a:lstStyle>
+            <a:lvl1pPr>
+              <a:defRPr sz="1000">
+                <a:solidFill>
+                  <a:schemeClr val="accent6"/>
+                </a:solidFill>
+              </a:defRPr>
+            </a:lvl1pPr>
+          </a:lstStyle>
+          <a:p>
+            <a:pPr algn="r"/>
+            <a:fld id="{F7021451-1387-4CA6-816F-3879F97B5CBC}" type="slidenum">
+              <a:rPr b="0" lang="en-US"/>
+              <a:t>19</a:t>
             </a:fld>
             <a:endParaRPr lang="en-US"/>
           </a:p>
@@ -5754,7 +6552,7 @@
                   <a:schemeClr val="accent1"/>
                 </a:solidFill>
               </a:rPr>
-              <a:t>SECCIÓN 1 · 4 PROPUESTAS</a:t>
+              <a:t>PUNTO DE PARTIDA</a:t>
             </a:r>
             <a:endParaRPr lang="en-US" sz="1400" dirty="0"/>
           </a:p>
@@ -5792,7 +6590,7 @@
                   <a:schemeClr val="bg2"/>
                 </a:solidFill>
               </a:rPr>
-              <a:t>La P</a:t>
+              <a:t>Benchmark de categoría</a:t>
             </a:r>
             <a:endParaRPr lang="en-US" sz="5400" dirty="0"/>
           </a:p>
@@ -5809,7 +6607,7 @@
         <p:spPr>
           <a:xfrm>
             <a:off x="731520" y="3931920"/>
-            <a:ext cx="10698480" cy="731520"/>
+            <a:ext cx="8778240" cy="1645920"/>
           </a:xfrm>
           <a:prstGeom prst="rect">
             <a:avLst/>
@@ -5822,17 +6620,742 @@
           <a:lstStyle/>
           <a:p>
             <a:pPr indent="0" marL="0">
-              <a:buNone/>
-            </a:pPr>
-            <a:r>
-              <a:rPr lang="en-US" sz="2000" dirty="0">
+              <a:lnSpc>
+                <a:spcPct val="120000"/>
+              </a:lnSpc>
+              <a:buNone/>
+            </a:pPr>
+            <a:r>
+              <a:rPr lang="en-US" sz="1800" dirty="0">
                 <a:solidFill>
                   <a:schemeClr val="accent5"/>
                 </a:solidFill>
               </a:rPr>
-              <a:t>La inicial integra el árbol o el papel</a:t>
-            </a:r>
-            <a:endParaRPr lang="en-US" sz="2000" dirty="0"/>
+              <a:t>Relevamos los tableros de referencia de marcas forestales y de madera. El árbol es el signo más usado de la categoría: diferenciarse exige contarlo desde lo que solo Papel Misionero tiene: la P, el papel y Misiones.</a:t>
+            </a:r>
+            <a:endParaRPr lang="en-US" sz="1800" dirty="0"/>
+          </a:p>
+        </p:txBody>
+      </p:sp>
+    </p:spTree>
+  </p:cSld>
+  <p:clrMapOvr>
+    <a:masterClrMapping/>
+  </p:clrMapOvr>
+</p:sld>
+</file>
+
+<file path=ppt/slides/slide20.xml><?xml version="1.0" encoding="utf-8"?>
+<p:sld xmlns:a="http://schemas.openxmlformats.org/drawingml/2006/main" xmlns:r="http://schemas.openxmlformats.org/officeDocument/2006/relationships" xmlns:p="http://schemas.openxmlformats.org/presentationml/2006/main">
+  <p:cSld name="Slide 20">
+    <p:spTree>
+      <p:nvGrpSpPr>
+        <p:cNvPr id="1" name=""/>
+        <p:cNvGrpSpPr/>
+        <p:nvPr/>
+      </p:nvGrpSpPr>
+      <p:grpSpPr>
+        <a:xfrm>
+          <a:off x="0" y="0"/>
+          <a:ext cx="0" cy="0"/>
+          <a:chOff x="0" y="0"/>
+          <a:chExt cx="0" cy="0"/>
+        </a:xfrm>
+      </p:grpSpPr>
+      <p:sp>
+        <p:nvSpPr>
+          <p:cNvPr id="2" name="Text 0"/>
+          <p:cNvSpPr/>
+          <p:nvPr>
+            <p:ph idx="100" type="title" hasCustomPrompt="1"/>
+          </p:nvPr>
+        </p:nvSpPr>
+        <p:spPr>
+          <a:xfrm>
+            <a:off x="457200" y="365760"/>
+            <a:ext cx="8686800" cy="685800"/>
+          </a:xfrm>
+          <a:prstGeom prst="rect">
+            <a:avLst/>
+          </a:prstGeom>
+          <a:noFill/>
+          <a:ln/>
+        </p:spPr>
+        <p:txBody>
+          <a:bodyPr wrap="square" lIns="0" tIns="0" rIns="0" bIns="0" rtlCol="0" anchor="ctr"/>
+          <a:lstStyle/>
+          <a:p>
+            <a:pPr algn="l" indent="0" marL="0">
+              <a:buNone/>
+            </a:pPr>
+            <a:r>
+              <a:rPr lang="en-US" sz="3000" b="1" dirty="0">
+                <a:solidFill>
+                  <a:schemeClr val="tx1"/>
+                </a:solidFill>
+              </a:rPr>
+              <a:t>Pino pleno</a:t>
+            </a:r>
+            <a:endParaRPr lang="en-US" sz="3000" dirty="0"/>
+          </a:p>
+        </p:txBody>
+      </p:sp>
+      <p:sp>
+        <p:nvSpPr>
+          <p:cNvPr id="3" name="Text 0"/>
+          <p:cNvSpPr/>
+          <p:nvPr>
+            <p:ph idx="101" type="body" hasCustomPrompt="1"/>
+          </p:nvPr>
+        </p:nvSpPr>
+        <p:spPr>
+          <a:xfrm>
+            <a:off x="457200" y="1005840"/>
+            <a:ext cx="8686800" cy="365760"/>
+          </a:xfrm>
+          <a:prstGeom prst="rect">
+            <a:avLst/>
+          </a:prstGeom>
+          <a:noFill/>
+          <a:ln/>
+        </p:spPr>
+        <p:txBody>
+          <a:bodyPr wrap="square" lIns="0" tIns="0" rIns="0" bIns="0" rtlCol="0" anchor="t"/>
+          <a:lstStyle/>
+          <a:p>
+            <a:pPr indent="0" marL="0">
+              <a:buNone/>
+            </a:pPr>
+            <a:r>
+              <a:rPr lang="en-US" sz="1200" spc="300" kern="0" dirty="0">
+                <a:solidFill>
+                  <a:schemeClr val="accent6"/>
+                </a:solidFill>
+              </a:rPr>
+              <a:t>ÁRBOL SOLO · P2</a:t>
+            </a:r>
+            <a:endParaRPr lang="en-US" sz="1200" dirty="0"/>
+          </a:p>
+        </p:txBody>
+      </p:sp>
+      <p:sp>
+        <p:nvSpPr>
+          <p:cNvPr id="4" name="Text 0"/>
+          <p:cNvSpPr/>
+          <p:nvPr>
+            <p:ph idx="102" type="body" hasCustomPrompt="1"/>
+          </p:nvPr>
+        </p:nvSpPr>
+        <p:spPr>
+          <a:xfrm>
+            <a:off x="457200" y="1417320"/>
+            <a:ext cx="11247120" cy="777240"/>
+          </a:xfrm>
+          <a:prstGeom prst="rect">
+            <a:avLst/>
+          </a:prstGeom>
+          <a:noFill/>
+          <a:ln/>
+        </p:spPr>
+        <p:txBody>
+          <a:bodyPr wrap="square" lIns="0" tIns="0" rIns="0" bIns="0" rtlCol="0" anchor="t"/>
+          <a:lstStyle/>
+          <a:p>
+            <a:pPr indent="0" marL="0">
+              <a:lnSpc>
+                <a:spcPct val="115000"/>
+              </a:lnSpc>
+              <a:buNone/>
+            </a:pPr>
+            <a:r>
+              <a:rPr lang="en-US" sz="1500" dirty="0">
+                <a:solidFill>
+                  <a:schemeClr val="tx1"/>
+                </a:solidFill>
+              </a:rPr>
+              <a:t>Más ramas y copa más ancha: mayor presencia y mejor equilibrio con el peso del logotipo en bold.</a:t>
+            </a:r>
+            <a:endParaRPr lang="en-US" sz="1500" dirty="0"/>
+          </a:p>
+        </p:txBody>
+      </p:sp>
+      <p:sp>
+        <p:nvSpPr>
+          <p:cNvPr id="5" name="Panel negativo"/>
+          <p:cNvSpPr/>
+          <p:nvPr/>
+        </p:nvSpPr>
+        <p:spPr>
+          <a:xfrm>
+            <a:off x="457200" y="2331720"/>
+            <a:ext cx="5532120" cy="3840480"/>
+          </a:xfrm>
+          <a:prstGeom prst="roundRect">
+            <a:avLst>
+              <a:gd name="adj" fmla="val 4286"/>
+            </a:avLst>
+          </a:prstGeom>
+          <a:solidFill>
+            <a:schemeClr val="tx1"/>
+          </a:solidFill>
+          <a:ln w="12700">
+            <a:solidFill>
+              <a:schemeClr val="tx1"/>
+            </a:solidFill>
+            <a:prstDash val="solid"/>
+          </a:ln>
+        </p:spPr>
+      </p:sp>
+      <p:pic>
+        <p:nvPicPr>
+          <p:cNvPr id="6" name="Logo negativo" descr="Pino pleno · negativo">    </p:cNvPr>
+          <p:cNvPicPr>
+            <a:picLocks noChangeAspect="1"/>
+          </p:cNvPicPr>
+          <p:nvPr/>
+        </p:nvPicPr>
+        <p:blipFill>
+          <a:blip r:embed="rId1"/>
+          <a:stretch>
+            <a:fillRect/>
+          </a:stretch>
+        </p:blipFill>
+        <p:spPr>
+          <a:xfrm>
+            <a:off x="1348740" y="3473780"/>
+            <a:ext cx="3749040" cy="1373480"/>
+          </a:xfrm>
+          <a:prstGeom prst="rect">
+            <a:avLst/>
+          </a:prstGeom>
+        </p:spPr>
+      </p:pic>
+      <p:sp>
+        <p:nvSpPr>
+          <p:cNvPr id="7" name="Rótulo"/>
+          <p:cNvSpPr txBox="1"/>
+          <p:nvPr/>
+        </p:nvSpPr>
+        <p:spPr>
+          <a:xfrm>
+            <a:off x="731520" y="5715000"/>
+            <a:ext cx="4572000" cy="274320"/>
+          </a:xfrm>
+          <a:prstGeom prst="rect">
+            <a:avLst/>
+          </a:prstGeom>
+          <a:noFill/>
+          <a:ln/>
+        </p:spPr>
+        <p:txBody>
+          <a:bodyPr wrap="square" lIns="0" tIns="0" rIns="0" bIns="0" rtlCol="0" anchor="ctr"/>
+          <a:lstStyle/>
+          <a:p>
+            <a:pPr indent="0" marL="0">
+              <a:buNone/>
+            </a:pPr>
+            <a:r>
+              <a:rPr lang="en-US" sz="1000" spc="300" kern="0" dirty="0">
+                <a:solidFill>
+                  <a:schemeClr val="accent5"/>
+                </a:solidFill>
+              </a:rPr>
+              <a:t>NEGATIVO</a:t>
+            </a:r>
+            <a:endParaRPr lang="en-US" sz="1000" dirty="0"/>
+          </a:p>
+        </p:txBody>
+      </p:sp>
+      <p:sp>
+        <p:nvSpPr>
+          <p:cNvPr id="8" name="Panel una tinta sobre kraft"/>
+          <p:cNvSpPr/>
+          <p:nvPr/>
+        </p:nvSpPr>
+        <p:spPr>
+          <a:xfrm>
+            <a:off x="6199632" y="2331720"/>
+            <a:ext cx="5532120" cy="3840480"/>
+          </a:xfrm>
+          <a:prstGeom prst="roundRect">
+            <a:avLst>
+              <a:gd name="adj" fmla="val 4286"/>
+            </a:avLst>
+          </a:prstGeom>
+          <a:solidFill>
+            <a:schemeClr val="accent1"/>
+          </a:solidFill>
+          <a:ln w="12700">
+            <a:solidFill>
+              <a:schemeClr val="accent1"/>
+            </a:solidFill>
+            <a:prstDash val="solid"/>
+          </a:ln>
+        </p:spPr>
+      </p:sp>
+      <p:pic>
+        <p:nvPicPr>
+          <p:cNvPr id="9" name="Logo una tinta sobre kraft" descr="Pino pleno · una tinta sobre kraft">    </p:cNvPr>
+          <p:cNvPicPr>
+            <a:picLocks noChangeAspect="1"/>
+          </p:cNvPicPr>
+          <p:nvPr/>
+        </p:nvPicPr>
+        <p:blipFill>
+          <a:blip r:embed="rId2"/>
+          <a:stretch>
+            <a:fillRect/>
+          </a:stretch>
+        </p:blipFill>
+        <p:spPr>
+          <a:xfrm>
+            <a:off x="7091172" y="3473780"/>
+            <a:ext cx="3749040" cy="1373480"/>
+          </a:xfrm>
+          <a:prstGeom prst="rect">
+            <a:avLst/>
+          </a:prstGeom>
+        </p:spPr>
+      </p:pic>
+      <p:sp>
+        <p:nvSpPr>
+          <p:cNvPr id="10" name="Rótulo"/>
+          <p:cNvSpPr txBox="1"/>
+          <p:nvPr/>
+        </p:nvSpPr>
+        <p:spPr>
+          <a:xfrm>
+            <a:off x="6473952" y="5715000"/>
+            <a:ext cx="4572000" cy="274320"/>
+          </a:xfrm>
+          <a:prstGeom prst="rect">
+            <a:avLst/>
+          </a:prstGeom>
+          <a:noFill/>
+          <a:ln/>
+        </p:spPr>
+        <p:txBody>
+          <a:bodyPr wrap="square" lIns="0" tIns="0" rIns="0" bIns="0" rtlCol="0" anchor="ctr"/>
+          <a:lstStyle/>
+          <a:p>
+            <a:pPr indent="0" marL="0">
+              <a:buNone/>
+            </a:pPr>
+            <a:r>
+              <a:rPr lang="en-US" sz="1000" spc="300" kern="0" dirty="0">
+                <a:solidFill>
+                  <a:schemeClr val="tx2"/>
+                </a:solidFill>
+              </a:rPr>
+              <a:t>UNA TINTA SOBRE KRAFT</a:t>
+            </a:r>
+            <a:endParaRPr lang="en-US" sz="1000" dirty="0"/>
+          </a:p>
+        </p:txBody>
+      </p:sp>
+      <p:sp>
+        <p:nvSpPr>
+          <p:cNvPr id="25" name="Slide Number Placeholder 0"/>
+          <p:cNvSpPr>
+            <a:spLocks noGrp="1"/>
+          </p:cNvSpPr>
+          <p:nvPr>
+            <p:ph type="sldNum" sz="quarter" idx="4294967295"/>
+          </p:nvPr>
+        </p:nvSpPr>
+        <p:spPr>
+          <a:xfrm>
+            <a:off x="11247120" y="6400800"/>
+            <a:ext cx="502920" cy="274320"/>
+          </a:xfrm>
+          <a:prstGeom prst="rect">
+            <a:avLst/>
+          </a:prstGeom>
+          <a:extLst>
+            <a:ext uri="{C572A759-6A51-4108-AA02-DFA0A04FC94B}">
+              <ma14:wrappingTextBoxFlag xmlns:ma14="http://schemas.microsoft.com/office/mac/drawingml/2011/main" val="0"/>
+            </a:ext>
+          </a:extLst>
+        </p:spPr>
+        <p:txBody>
+          <a:bodyPr/>
+          <a:lstStyle>
+            <a:lvl1pPr>
+              <a:defRPr sz="1000">
+                <a:solidFill>
+                  <a:schemeClr val="accent6"/>
+                </a:solidFill>
+              </a:defRPr>
+            </a:lvl1pPr>
+          </a:lstStyle>
+          <a:p>
+            <a:pPr algn="r"/>
+            <a:fld id="{F7021451-1387-4CA6-816F-3879F97B5CBC}" type="slidenum">
+              <a:rPr b="0" lang="en-US"/>
+              <a:t>20</a:t>
+            </a:fld>
+            <a:endParaRPr lang="en-US"/>
+          </a:p>
+        </p:txBody>
+      </p:sp>
+    </p:spTree>
+  </p:cSld>
+  <p:clrMapOvr>
+    <a:masterClrMapping/>
+  </p:clrMapOvr>
+</p:sld>
+</file>
+
+<file path=ppt/slides/slide21.xml><?xml version="1.0" encoding="utf-8"?>
+<p:sld xmlns:a="http://schemas.openxmlformats.org/drawingml/2006/main" xmlns:r="http://schemas.openxmlformats.org/officeDocument/2006/relationships" xmlns:p="http://schemas.openxmlformats.org/presentationml/2006/main">
+  <p:cSld name="Slide 21">
+    <p:spTree>
+      <p:nvGrpSpPr>
+        <p:cNvPr id="1" name=""/>
+        <p:cNvGrpSpPr/>
+        <p:nvPr/>
+      </p:nvGrpSpPr>
+      <p:grpSpPr>
+        <a:xfrm>
+          <a:off x="0" y="0"/>
+          <a:ext cx="0" cy="0"/>
+          <a:chOff x="0" y="0"/>
+          <a:chExt cx="0" cy="0"/>
+        </a:xfrm>
+      </p:grpSpPr>
+      <p:sp>
+        <p:nvSpPr>
+          <p:cNvPr id="2" name="Text 0"/>
+          <p:cNvSpPr/>
+          <p:nvPr>
+            <p:ph idx="100" type="title" hasCustomPrompt="1"/>
+          </p:nvPr>
+        </p:nvSpPr>
+        <p:spPr>
+          <a:xfrm>
+            <a:off x="457200" y="365760"/>
+            <a:ext cx="8686800" cy="685800"/>
+          </a:xfrm>
+          <a:prstGeom prst="rect">
+            <a:avLst/>
+          </a:prstGeom>
+          <a:noFill/>
+          <a:ln/>
+        </p:spPr>
+        <p:txBody>
+          <a:bodyPr wrap="square" lIns="0" tIns="0" rIns="0" bIns="0" rtlCol="0" anchor="ctr"/>
+          <a:lstStyle/>
+          <a:p>
+            <a:pPr algn="l" indent="0" marL="0">
+              <a:buNone/>
+            </a:pPr>
+            <a:r>
+              <a:rPr lang="en-US" sz="3000" b="1" dirty="0">
+                <a:solidFill>
+                  <a:schemeClr val="tx1"/>
+                </a:solidFill>
+              </a:rPr>
+              <a:t>Trazo pesado</a:t>
+            </a:r>
+            <a:endParaRPr lang="en-US" sz="3000" dirty="0"/>
+          </a:p>
+        </p:txBody>
+      </p:sp>
+      <p:sp>
+        <p:nvSpPr>
+          <p:cNvPr id="3" name="Text 0"/>
+          <p:cNvSpPr/>
+          <p:nvPr>
+            <p:ph idx="101" type="body" hasCustomPrompt="1"/>
+          </p:nvPr>
+        </p:nvSpPr>
+        <p:spPr>
+          <a:xfrm>
+            <a:off x="457200" y="1005840"/>
+            <a:ext cx="8686800" cy="365760"/>
+          </a:xfrm>
+          <a:prstGeom prst="rect">
+            <a:avLst/>
+          </a:prstGeom>
+          <a:noFill/>
+          <a:ln/>
+        </p:spPr>
+        <p:txBody>
+          <a:bodyPr wrap="square" lIns="0" tIns="0" rIns="0" bIns="0" rtlCol="0" anchor="t"/>
+          <a:lstStyle/>
+          <a:p>
+            <a:pPr indent="0" marL="0">
+              <a:buNone/>
+            </a:pPr>
+            <a:r>
+              <a:rPr lang="en-US" sz="1200" spc="300" kern="0" dirty="0">
+                <a:solidFill>
+                  <a:schemeClr val="accent6"/>
+                </a:solidFill>
+              </a:rPr>
+              <a:t>ÁRBOL SOLO · P3</a:t>
+            </a:r>
+            <a:endParaRPr lang="en-US" sz="1200" dirty="0"/>
+          </a:p>
+        </p:txBody>
+      </p:sp>
+      <p:sp>
+        <p:nvSpPr>
+          <p:cNvPr id="4" name="Text 0"/>
+          <p:cNvSpPr/>
+          <p:nvPr>
+            <p:ph idx="102" type="body" hasCustomPrompt="1"/>
+          </p:nvPr>
+        </p:nvSpPr>
+        <p:spPr>
+          <a:xfrm>
+            <a:off x="457200" y="1417320"/>
+            <a:ext cx="11247120" cy="777240"/>
+          </a:xfrm>
+          <a:prstGeom prst="rect">
+            <a:avLst/>
+          </a:prstGeom>
+          <a:noFill/>
+          <a:ln/>
+        </p:spPr>
+        <p:txBody>
+          <a:bodyPr wrap="square" lIns="0" tIns="0" rIns="0" bIns="0" rtlCol="0" anchor="t"/>
+          <a:lstStyle/>
+          <a:p>
+            <a:pPr indent="0" marL="0">
+              <a:lnSpc>
+                <a:spcPct val="115000"/>
+              </a:lnSpc>
+              <a:buNone/>
+            </a:pPr>
+            <a:r>
+              <a:rPr lang="en-US" sz="1500" dirty="0">
+                <a:solidFill>
+                  <a:schemeClr val="tx1"/>
+                </a:solidFill>
+              </a:rPr>
+              <a:t>Trazos robustos pensados para la impresión en bolsas y los tamaños mínimos. La versión de mayor resistencia técnica.</a:t>
+            </a:r>
+            <a:endParaRPr lang="en-US" sz="1500" dirty="0"/>
+          </a:p>
+        </p:txBody>
+      </p:sp>
+      <p:sp>
+        <p:nvSpPr>
+          <p:cNvPr id="5" name="Panel negativo"/>
+          <p:cNvSpPr/>
+          <p:nvPr/>
+        </p:nvSpPr>
+        <p:spPr>
+          <a:xfrm>
+            <a:off x="457200" y="2331720"/>
+            <a:ext cx="5532120" cy="3840480"/>
+          </a:xfrm>
+          <a:prstGeom prst="roundRect">
+            <a:avLst>
+              <a:gd name="adj" fmla="val 4286"/>
+            </a:avLst>
+          </a:prstGeom>
+          <a:solidFill>
+            <a:schemeClr val="tx1"/>
+          </a:solidFill>
+          <a:ln w="12700">
+            <a:solidFill>
+              <a:schemeClr val="tx1"/>
+            </a:solidFill>
+            <a:prstDash val="solid"/>
+          </a:ln>
+        </p:spPr>
+      </p:sp>
+      <p:pic>
+        <p:nvPicPr>
+          <p:cNvPr id="6" name="Logo negativo" descr="Trazo pesado · negativo">    </p:cNvPr>
+          <p:cNvPicPr>
+            <a:picLocks noChangeAspect="1"/>
+          </p:cNvPicPr>
+          <p:nvPr/>
+        </p:nvPicPr>
+        <p:blipFill>
+          <a:blip r:embed="rId1"/>
+          <a:stretch>
+            <a:fillRect/>
+          </a:stretch>
+        </p:blipFill>
+        <p:spPr>
+          <a:xfrm>
+            <a:off x="1348740" y="3473780"/>
+            <a:ext cx="3749040" cy="1373480"/>
+          </a:xfrm>
+          <a:prstGeom prst="rect">
+            <a:avLst/>
+          </a:prstGeom>
+        </p:spPr>
+      </p:pic>
+      <p:sp>
+        <p:nvSpPr>
+          <p:cNvPr id="7" name="Rótulo"/>
+          <p:cNvSpPr txBox="1"/>
+          <p:nvPr/>
+        </p:nvSpPr>
+        <p:spPr>
+          <a:xfrm>
+            <a:off x="731520" y="5715000"/>
+            <a:ext cx="4572000" cy="274320"/>
+          </a:xfrm>
+          <a:prstGeom prst="rect">
+            <a:avLst/>
+          </a:prstGeom>
+          <a:noFill/>
+          <a:ln/>
+        </p:spPr>
+        <p:txBody>
+          <a:bodyPr wrap="square" lIns="0" tIns="0" rIns="0" bIns="0" rtlCol="0" anchor="ctr"/>
+          <a:lstStyle/>
+          <a:p>
+            <a:pPr indent="0" marL="0">
+              <a:buNone/>
+            </a:pPr>
+            <a:r>
+              <a:rPr lang="en-US" sz="1000" spc="300" kern="0" dirty="0">
+                <a:solidFill>
+                  <a:schemeClr val="accent5"/>
+                </a:solidFill>
+              </a:rPr>
+              <a:t>NEGATIVO</a:t>
+            </a:r>
+            <a:endParaRPr lang="en-US" sz="1000" dirty="0"/>
+          </a:p>
+        </p:txBody>
+      </p:sp>
+      <p:sp>
+        <p:nvSpPr>
+          <p:cNvPr id="8" name="Panel una tinta sobre kraft"/>
+          <p:cNvSpPr/>
+          <p:nvPr/>
+        </p:nvSpPr>
+        <p:spPr>
+          <a:xfrm>
+            <a:off x="6199632" y="2331720"/>
+            <a:ext cx="5532120" cy="3840480"/>
+          </a:xfrm>
+          <a:prstGeom prst="roundRect">
+            <a:avLst>
+              <a:gd name="adj" fmla="val 4286"/>
+            </a:avLst>
+          </a:prstGeom>
+          <a:solidFill>
+            <a:schemeClr val="accent1"/>
+          </a:solidFill>
+          <a:ln w="12700">
+            <a:solidFill>
+              <a:schemeClr val="accent1"/>
+            </a:solidFill>
+            <a:prstDash val="solid"/>
+          </a:ln>
+        </p:spPr>
+      </p:sp>
+      <p:pic>
+        <p:nvPicPr>
+          <p:cNvPr id="9" name="Logo una tinta sobre kraft" descr="Trazo pesado · una tinta sobre kraft">    </p:cNvPr>
+          <p:cNvPicPr>
+            <a:picLocks noChangeAspect="1"/>
+          </p:cNvPicPr>
+          <p:nvPr/>
+        </p:nvPicPr>
+        <p:blipFill>
+          <a:blip r:embed="rId2"/>
+          <a:stretch>
+            <a:fillRect/>
+          </a:stretch>
+        </p:blipFill>
+        <p:spPr>
+          <a:xfrm>
+            <a:off x="7091172" y="3473780"/>
+            <a:ext cx="3749040" cy="1373480"/>
+          </a:xfrm>
+          <a:prstGeom prst="rect">
+            <a:avLst/>
+          </a:prstGeom>
+        </p:spPr>
+      </p:pic>
+      <p:sp>
+        <p:nvSpPr>
+          <p:cNvPr id="10" name="Rótulo"/>
+          <p:cNvSpPr txBox="1"/>
+          <p:nvPr/>
+        </p:nvSpPr>
+        <p:spPr>
+          <a:xfrm>
+            <a:off x="6473952" y="5715000"/>
+            <a:ext cx="4572000" cy="274320"/>
+          </a:xfrm>
+          <a:prstGeom prst="rect">
+            <a:avLst/>
+          </a:prstGeom>
+          <a:noFill/>
+          <a:ln/>
+        </p:spPr>
+        <p:txBody>
+          <a:bodyPr wrap="square" lIns="0" tIns="0" rIns="0" bIns="0" rtlCol="0" anchor="ctr"/>
+          <a:lstStyle/>
+          <a:p>
+            <a:pPr indent="0" marL="0">
+              <a:buNone/>
+            </a:pPr>
+            <a:r>
+              <a:rPr lang="en-US" sz="1000" spc="300" kern="0" dirty="0">
+                <a:solidFill>
+                  <a:schemeClr val="tx2"/>
+                </a:solidFill>
+              </a:rPr>
+              <a:t>UNA TINTA SOBRE KRAFT</a:t>
+            </a:r>
+            <a:endParaRPr lang="en-US" sz="1000" dirty="0"/>
+          </a:p>
+        </p:txBody>
+      </p:sp>
+      <p:sp>
+        <p:nvSpPr>
+          <p:cNvPr id="25" name="Slide Number Placeholder 0"/>
+          <p:cNvSpPr>
+            <a:spLocks noGrp="1"/>
+          </p:cNvSpPr>
+          <p:nvPr>
+            <p:ph type="sldNum" sz="quarter" idx="4294967295"/>
+          </p:nvPr>
+        </p:nvSpPr>
+        <p:spPr>
+          <a:xfrm>
+            <a:off x="11247120" y="6400800"/>
+            <a:ext cx="502920" cy="274320"/>
+          </a:xfrm>
+          <a:prstGeom prst="rect">
+            <a:avLst/>
+          </a:prstGeom>
+          <a:extLst>
+            <a:ext uri="{C572A759-6A51-4108-AA02-DFA0A04FC94B}">
+              <ma14:wrappingTextBoxFlag xmlns:ma14="http://schemas.microsoft.com/office/mac/drawingml/2011/main" val="0"/>
+            </a:ext>
+          </a:extLst>
+        </p:spPr>
+        <p:txBody>
+          <a:bodyPr/>
+          <a:lstStyle>
+            <a:lvl1pPr>
+              <a:defRPr sz="1000">
+                <a:solidFill>
+                  <a:schemeClr val="accent6"/>
+                </a:solidFill>
+              </a:defRPr>
+            </a:lvl1pPr>
+          </a:lstStyle>
+          <a:p>
+            <a:pPr algn="r"/>
+            <a:fld id="{F7021451-1387-4CA6-816F-3879F97B5CBC}" type="slidenum">
+              <a:rPr b="0" lang="en-US"/>
+              <a:t>21</a:t>
+            </a:fld>
+            <a:endParaRPr lang="en-US"/>
           </a:p>
         </p:txBody>
       </p:sp>
@@ -5893,7 +7416,7 @@
                   <a:schemeClr val="tx1"/>
                 </a:solidFill>
               </a:rPr>
-              <a:t>P monolínea con araucaria</a:t>
+              <a:t>Seis recursos que se repiten</a:t>
             </a:r>
             <a:endParaRPr lang="en-US" sz="3000" dirty="0"/>
           </a:p>
@@ -5931,7 +7454,7 @@
                   <a:schemeClr val="accent6"/>
                 </a:solidFill>
               </a:rPr>
-              <a:t>LA P · A1</a:t>
+              <a:t>BENCHMARK · RECURSOS DE LA CATEGORÍA</a:t>
             </a:r>
             <a:endParaRPr lang="en-US" sz="1200" dirty="0"/>
           </a:p>
@@ -5939,18 +7462,176 @@
       </p:sp>
       <p:sp>
         <p:nvSpPr>
-          <p:cNvPr id="4" name="Panel negativo"/>
-          <p:cNvSpPr/>
-          <p:nvPr/>
-        </p:nvSpPr>
-        <p:spPr>
-          <a:xfrm>
-            <a:off x="457200" y="1600200"/>
-            <a:ext cx="5532120" cy="4572000"/>
+          <p:cNvPr id="4" name="Text 0"/>
+          <p:cNvSpPr/>
+          <p:nvPr>
+            <p:ph idx="102" type="body" hasCustomPrompt="1"/>
+          </p:nvPr>
+        </p:nvSpPr>
+        <p:spPr>
+          <a:xfrm>
+            <a:off x="457200" y="1417320"/>
+            <a:ext cx="11247120" cy="777240"/>
+          </a:xfrm>
+          <a:prstGeom prst="rect">
+            <a:avLst/>
+          </a:prstGeom>
+          <a:noFill/>
+          <a:ln/>
+        </p:spPr>
+        <p:txBody>
+          <a:bodyPr wrap="square" lIns="0" tIns="0" rIns="0" bIns="0" rtlCol="0" anchor="t"/>
+          <a:lstStyle/>
+          <a:p>
+            <a:pPr indent="0" marL="0">
+              <a:lnSpc>
+                <a:spcPct val="115000"/>
+              </a:lnSpc>
+              <a:buNone/>
+            </a:pPr>
+            <a:r>
+              <a:rPr lang="en-US" sz="1500" dirty="0">
+                <a:solidFill>
+                  <a:schemeClr val="tx1"/>
+                </a:solidFill>
+              </a:rPr>
+              <a:t>Frecuencia estimada sobre el relevamiento de referencias aportadas.</a:t>
+            </a:r>
+            <a:endParaRPr lang="en-US" sz="1500" dirty="0"/>
+          </a:p>
+        </p:txBody>
+      </p:sp>
+      <p:sp>
+        <p:nvSpPr>
+          <p:cNvPr id="5" name="Recurso Pino de pisos"/>
+          <p:cNvSpPr/>
+          <p:nvPr/>
+        </p:nvSpPr>
+        <p:spPr>
+          <a:xfrm>
+            <a:off x="457200" y="2103120"/>
+            <a:ext cx="3611880" cy="1920240"/>
           </a:xfrm>
           <a:prstGeom prst="roundRect">
             <a:avLst>
-              <a:gd name="adj" fmla="val 3600"/>
+              <a:gd name="adj" fmla="val 6667"/>
+            </a:avLst>
+          </a:prstGeom>
+          <a:solidFill>
+            <a:schemeClr val="bg1"/>
+          </a:solidFill>
+          <a:ln w="12700">
+            <a:solidFill>
+              <a:schemeClr val="accent5"/>
+            </a:solidFill>
+            <a:prstDash val="solid"/>
+          </a:ln>
+        </p:spPr>
+      </p:sp>
+      <p:sp>
+        <p:nvSpPr>
+          <p:cNvPr id="6" name="Texto Pino de pisos"/>
+          <p:cNvSpPr txBox="1"/>
+          <p:nvPr/>
+        </p:nvSpPr>
+        <p:spPr>
+          <a:xfrm>
+            <a:off x="685800" y="2286000"/>
+            <a:ext cx="3154680" cy="1554480"/>
+          </a:xfrm>
+          <a:prstGeom prst="rect">
+            <a:avLst/>
+          </a:prstGeom>
+          <a:noFill/>
+          <a:ln/>
+        </p:spPr>
+        <p:txBody>
+          <a:bodyPr wrap="square" lIns="0" tIns="0" rIns="0" bIns="0" rtlCol="0" anchor="t"/>
+          <a:lstStyle/>
+          <a:p>
+            <a:pPr indent="0" marL="0">
+              <a:spcAft>
+                <a:spcPts val="400"/>
+              </a:spcAft>
+              <a:buNone/>
+            </a:pPr>
+            <a:r>
+              <a:rPr lang="en-US" sz="2000" b="1" dirty="0">
+                <a:solidFill>
+                  <a:schemeClr val="tx1"/>
+                </a:solidFill>
+              </a:rPr>
+              <a:t>Pino de pisos</a:t>
+            </a:r>
+            <a:endParaRPr lang="en-US" sz="2000" dirty="0"/>
+          </a:p>
+          <a:p>
+            <a:pPr indent="0" marL="0">
+              <a:spcAft>
+                <a:spcPts val="400"/>
+              </a:spcAft>
+              <a:buNone/>
+            </a:pPr>
+            <a:r>
+              <a:rPr lang="en-US" sz="1400" dirty="0">
+                <a:solidFill>
+                  <a:schemeClr val="accent6"/>
+                </a:solidFill>
+              </a:rPr>
+              <a:t>Triángulos o chevrones apilados, solos o en círculo.</a:t>
+            </a:r>
+            <a:endParaRPr lang="en-US" sz="2000" dirty="0"/>
+          </a:p>
+          <a:p>
+            <a:pPr indent="0" marL="0">
+              <a:spcAft>
+                <a:spcPts val="400"/>
+              </a:spcAft>
+              <a:buNone/>
+            </a:pPr>
+            <a:r>
+              <a:rPr lang="en-US" sz="1300" b="1" dirty="0">
+                <a:solidFill>
+                  <a:schemeClr val="accent1"/>
+                </a:solidFill>
+              </a:rPr>
+              <a:t>Frecuencia: Muy alta</a:t>
+            </a:r>
+            <a:endParaRPr lang="en-US" sz="2000" dirty="0"/>
+          </a:p>
+          <a:p>
+            <a:pPr indent="0" marL="0">
+              <a:spcAft>
+                <a:spcPts val="400"/>
+              </a:spcAft>
+              <a:buNone/>
+            </a:pPr>
+            <a:r>
+              <a:rPr lang="en-US" sz="1400" dirty="0">
+                <a:solidFill>
+                  <a:schemeClr val="tx1"/>
+                </a:solidFill>
+              </a:rPr>
+              <a:t>Genérico: se pierde entre cientos de marcas.</a:t>
+            </a:r>
+            <a:endParaRPr lang="en-US" sz="2000" dirty="0"/>
+          </a:p>
+        </p:txBody>
+      </p:sp>
+      <p:sp>
+        <p:nvSpPr>
+          <p:cNvPr id="7" name="Recurso Letra con árbol"/>
+          <p:cNvSpPr/>
+          <p:nvPr/>
+        </p:nvSpPr>
+        <p:spPr>
+          <a:xfrm>
+            <a:off x="4251960" y="2103120"/>
+            <a:ext cx="3611880" cy="1920240"/>
+          </a:xfrm>
+          <a:prstGeom prst="roundRect">
+            <a:avLst>
+              <a:gd name="adj" fmla="val 6667"/>
             </a:avLst>
           </a:prstGeom>
           <a:solidFill>
@@ -5964,150 +7645,561 @@
           </a:ln>
         </p:spPr>
       </p:sp>
-      <p:pic>
-        <p:nvPicPr>
-          <p:cNvPr id="5" name="Logo negativo" descr="P monolínea con araucaria · negativo">    </p:cNvPr>
-          <p:cNvPicPr>
-            <a:picLocks noChangeAspect="1"/>
-          </p:cNvPicPr>
-          <p:nvPr/>
-        </p:nvPicPr>
-        <p:blipFill>
-          <a:blip r:embed="rId1"/>
-          <a:stretch>
-            <a:fillRect/>
-          </a:stretch>
-        </p:blipFill>
-        <p:spPr>
-          <a:xfrm>
-            <a:off x="1165860" y="3041021"/>
-            <a:ext cx="4114800" cy="1507478"/>
-          </a:xfrm>
-          <a:prstGeom prst="rect">
-            <a:avLst/>
-          </a:prstGeom>
-        </p:spPr>
-      </p:pic>
-      <p:sp>
-        <p:nvSpPr>
-          <p:cNvPr id="6" name="Rótulo"/>
+      <p:sp>
+        <p:nvSpPr>
+          <p:cNvPr id="8" name="Texto Letra con árbol"/>
           <p:cNvSpPr txBox="1"/>
           <p:nvPr/>
         </p:nvSpPr>
         <p:spPr>
           <a:xfrm>
-            <a:off x="731520" y="5715000"/>
-            <a:ext cx="4572000" cy="274320"/>
-          </a:xfrm>
-          <a:prstGeom prst="rect">
-            <a:avLst/>
-          </a:prstGeom>
-          <a:noFill/>
-          <a:ln/>
-        </p:spPr>
-        <p:txBody>
-          <a:bodyPr wrap="square" lIns="0" tIns="0" rIns="0" bIns="0" rtlCol="0" anchor="ctr"/>
+            <a:off x="4480560" y="2286000"/>
+            <a:ext cx="3154680" cy="1554480"/>
+          </a:xfrm>
+          <a:prstGeom prst="rect">
+            <a:avLst/>
+          </a:prstGeom>
+          <a:noFill/>
+          <a:ln/>
+        </p:spPr>
+        <p:txBody>
+          <a:bodyPr wrap="square" lIns="0" tIns="0" rIns="0" bIns="0" rtlCol="0" anchor="t"/>
           <a:lstStyle/>
           <a:p>
             <a:pPr indent="0" marL="0">
-              <a:buNone/>
-            </a:pPr>
-            <a:r>
-              <a:rPr lang="en-US" sz="1000" spc="300" kern="0" dirty="0">
+              <a:spcAft>
+                <a:spcPts val="400"/>
+              </a:spcAft>
+              <a:buNone/>
+            </a:pPr>
+            <a:r>
+              <a:rPr lang="en-US" sz="2000" b="1" dirty="0">
+                <a:solidFill>
+                  <a:schemeClr val="bg2"/>
+                </a:solidFill>
+              </a:rPr>
+              <a:t>Letra con árbol</a:t>
+            </a:r>
+            <a:endParaRPr lang="en-US" sz="2000" dirty="0"/>
+          </a:p>
+          <a:p>
+            <a:pPr indent="0" marL="0">
+              <a:spcAft>
+                <a:spcPts val="400"/>
+              </a:spcAft>
+              <a:buNone/>
+            </a:pPr>
+            <a:r>
+              <a:rPr lang="en-US" sz="1400" dirty="0">
                 <a:solidFill>
                   <a:schemeClr val="accent5"/>
                 </a:solidFill>
               </a:rPr>
-              <a:t>NEGATIVO</a:t>
-            </a:r>
-            <a:endParaRPr lang="en-US" sz="1000" dirty="0"/>
-          </a:p>
-        </p:txBody>
-      </p:sp>
-      <p:sp>
-        <p:nvSpPr>
-          <p:cNvPr id="7" name="Panel una tinta sobre kraft"/>
-          <p:cNvSpPr/>
-          <p:nvPr/>
-        </p:nvSpPr>
-        <p:spPr>
-          <a:xfrm>
-            <a:off x="6199632" y="1600200"/>
-            <a:ext cx="5532120" cy="4572000"/>
+              <a:t>El pino se recorta dentro de una inicial.</a:t>
+            </a:r>
+            <a:endParaRPr lang="en-US" sz="2000" dirty="0"/>
+          </a:p>
+          <a:p>
+            <a:pPr indent="0" marL="0">
+              <a:spcAft>
+                <a:spcPts val="400"/>
+              </a:spcAft>
+              <a:buNone/>
+            </a:pPr>
+            <a:r>
+              <a:rPr lang="en-US" sz="1300" b="1" dirty="0">
+                <a:solidFill>
+                  <a:schemeClr val="accent1"/>
+                </a:solidFill>
+              </a:rPr>
+              <a:t>Frecuencia: Alta</a:t>
+            </a:r>
+            <a:endParaRPr lang="en-US" sz="2000" dirty="0"/>
+          </a:p>
+          <a:p>
+            <a:pPr indent="0" marL="0">
+              <a:spcAft>
+                <a:spcPts val="400"/>
+              </a:spcAft>
+              <a:buNone/>
+            </a:pPr>
+            <a:r>
+              <a:rPr lang="en-US" sz="1400" dirty="0">
+                <a:solidFill>
+                  <a:schemeClr val="bg2"/>
+                </a:solidFill>
+              </a:rPr>
+              <a:t>Recurso fuerte si la letra es propia: la P.</a:t>
+            </a:r>
+            <a:endParaRPr lang="en-US" sz="2000" dirty="0"/>
+          </a:p>
+        </p:txBody>
+      </p:sp>
+      <p:sp>
+        <p:nvSpPr>
+          <p:cNvPr id="9" name="Recurso Líneas paralelas"/>
+          <p:cNvSpPr/>
+          <p:nvPr/>
+        </p:nvSpPr>
+        <p:spPr>
+          <a:xfrm>
+            <a:off x="8046720" y="2103120"/>
+            <a:ext cx="3611880" cy="1920240"/>
           </a:xfrm>
           <a:prstGeom prst="roundRect">
             <a:avLst>
-              <a:gd name="adj" fmla="val 3600"/>
+              <a:gd name="adj" fmla="val 6667"/>
             </a:avLst>
           </a:prstGeom>
           <a:solidFill>
-            <a:schemeClr val="accent1"/>
+            <a:schemeClr val="bg1"/>
           </a:solidFill>
           <a:ln w="12700">
             <a:solidFill>
-              <a:schemeClr val="accent1"/>
+              <a:schemeClr val="accent5"/>
             </a:solidFill>
             <a:prstDash val="solid"/>
           </a:ln>
         </p:spPr>
       </p:sp>
-      <p:pic>
-        <p:nvPicPr>
-          <p:cNvPr id="8" name="Logo una tinta sobre kraft" descr="P monolínea con araucaria · una tinta sobre kraft">    </p:cNvPr>
-          <p:cNvPicPr>
-            <a:picLocks noChangeAspect="1"/>
-          </p:cNvPicPr>
-          <p:nvPr/>
-        </p:nvPicPr>
-        <p:blipFill>
-          <a:blip r:embed="rId2"/>
-          <a:stretch>
-            <a:fillRect/>
-          </a:stretch>
-        </p:blipFill>
-        <p:spPr>
-          <a:xfrm>
-            <a:off x="6908292" y="3041021"/>
-            <a:ext cx="4114800" cy="1507478"/>
-          </a:xfrm>
-          <a:prstGeom prst="rect">
-            <a:avLst/>
-          </a:prstGeom>
-        </p:spPr>
-      </p:pic>
-      <p:sp>
-        <p:nvSpPr>
-          <p:cNvPr id="9" name="Rótulo"/>
+      <p:sp>
+        <p:nvSpPr>
+          <p:cNvPr id="10" name="Texto Líneas paralelas"/>
           <p:cNvSpPr txBox="1"/>
           <p:nvPr/>
         </p:nvSpPr>
         <p:spPr>
           <a:xfrm>
-            <a:off x="6473952" y="5715000"/>
-            <a:ext cx="4572000" cy="274320"/>
-          </a:xfrm>
-          <a:prstGeom prst="rect">
-            <a:avLst/>
-          </a:prstGeom>
-          <a:noFill/>
-          <a:ln/>
-        </p:spPr>
-        <p:txBody>
-          <a:bodyPr wrap="square" lIns="0" tIns="0" rIns="0" bIns="0" rtlCol="0" anchor="ctr"/>
+            <a:off x="8275320" y="2286000"/>
+            <a:ext cx="3154680" cy="1554480"/>
+          </a:xfrm>
+          <a:prstGeom prst="rect">
+            <a:avLst/>
+          </a:prstGeom>
+          <a:noFill/>
+          <a:ln/>
+        </p:spPr>
+        <p:txBody>
+          <a:bodyPr wrap="square" lIns="0" tIns="0" rIns="0" bIns="0" rtlCol="0" anchor="t"/>
           <a:lstStyle/>
           <a:p>
             <a:pPr indent="0" marL="0">
-              <a:buNone/>
-            </a:pPr>
-            <a:r>
-              <a:rPr lang="en-US" sz="1000" spc="300" kern="0" dirty="0">
-                <a:solidFill>
-                  <a:schemeClr val="tx2"/>
-                </a:solidFill>
-              </a:rPr>
-              <a:t>UNA TINTA SOBRE KRAFT</a:t>
-            </a:r>
-            <a:endParaRPr lang="en-US" sz="1000" dirty="0"/>
+              <a:spcAft>
+                <a:spcPts val="400"/>
+              </a:spcAft>
+              <a:buNone/>
+            </a:pPr>
+            <a:r>
+              <a:rPr lang="en-US" sz="2000" b="1" dirty="0">
+                <a:solidFill>
+                  <a:schemeClr val="tx1"/>
+                </a:solidFill>
+              </a:rPr>
+              <a:t>Líneas paralelas</a:t>
+            </a:r>
+            <a:endParaRPr lang="en-US" sz="2000" dirty="0"/>
+          </a:p>
+          <a:p>
+            <a:pPr indent="0" marL="0">
+              <a:spcAft>
+                <a:spcPts val="400"/>
+              </a:spcAft>
+              <a:buNone/>
+            </a:pPr>
+            <a:r>
+              <a:rPr lang="en-US" sz="1400" dirty="0">
+                <a:solidFill>
+                  <a:schemeClr val="accent6"/>
+                </a:solidFill>
+              </a:rPr>
+              <a:t>El árbol se dibuja con trazos o hebras.</a:t>
+            </a:r>
+            <a:endParaRPr lang="en-US" sz="2000" dirty="0"/>
+          </a:p>
+          <a:p>
+            <a:pPr indent="0" marL="0">
+              <a:spcAft>
+                <a:spcPts val="400"/>
+              </a:spcAft>
+              <a:buNone/>
+            </a:pPr>
+            <a:r>
+              <a:rPr lang="en-US" sz="1300" b="1" dirty="0">
+                <a:solidFill>
+                  <a:schemeClr val="accent1"/>
+                </a:solidFill>
+              </a:rPr>
+              <a:t>Frecuencia: Media</a:t>
+            </a:r>
+            <a:endParaRPr lang="en-US" sz="2000" dirty="0"/>
+          </a:p>
+          <a:p>
+            <a:pPr indent="0" marL="0">
+              <a:spcAft>
+                <a:spcPts val="400"/>
+              </a:spcAft>
+              <a:buNone/>
+            </a:pPr>
+            <a:r>
+              <a:rPr lang="en-US" sz="1400" dirty="0">
+                <a:solidFill>
+                  <a:schemeClr val="tx1"/>
+                </a:solidFill>
+              </a:rPr>
+              <a:t>Elegante, pero se empasta en tamaños chicos.</a:t>
+            </a:r>
+            <a:endParaRPr lang="en-US" sz="2000" dirty="0"/>
+          </a:p>
+        </p:txBody>
+      </p:sp>
+      <p:sp>
+        <p:nvSpPr>
+          <p:cNvPr id="11" name="Recurso Insignia vintage"/>
+          <p:cNvSpPr/>
+          <p:nvPr/>
+        </p:nvSpPr>
+        <p:spPr>
+          <a:xfrm>
+            <a:off x="457200" y="4206240"/>
+            <a:ext cx="3611880" cy="1920240"/>
+          </a:xfrm>
+          <a:prstGeom prst="roundRect">
+            <a:avLst>
+              <a:gd name="adj" fmla="val 6667"/>
+            </a:avLst>
+          </a:prstGeom>
+          <a:solidFill>
+            <a:schemeClr val="bg1"/>
+          </a:solidFill>
+          <a:ln w="12700">
+            <a:solidFill>
+              <a:schemeClr val="accent5"/>
+            </a:solidFill>
+            <a:prstDash val="solid"/>
+          </a:ln>
+        </p:spPr>
+      </p:sp>
+      <p:sp>
+        <p:nvSpPr>
+          <p:cNvPr id="12" name="Texto Insignia vintage"/>
+          <p:cNvSpPr txBox="1"/>
+          <p:nvPr/>
+        </p:nvSpPr>
+        <p:spPr>
+          <a:xfrm>
+            <a:off x="685800" y="4389120"/>
+            <a:ext cx="3154680" cy="1554480"/>
+          </a:xfrm>
+          <a:prstGeom prst="rect">
+            <a:avLst/>
+          </a:prstGeom>
+          <a:noFill/>
+          <a:ln/>
+        </p:spPr>
+        <p:txBody>
+          <a:bodyPr wrap="square" lIns="0" tIns="0" rIns="0" bIns="0" rtlCol="0" anchor="t"/>
+          <a:lstStyle/>
+          <a:p>
+            <a:pPr indent="0" marL="0">
+              <a:spcAft>
+                <a:spcPts val="400"/>
+              </a:spcAft>
+              <a:buNone/>
+            </a:pPr>
+            <a:r>
+              <a:rPr lang="en-US" sz="2000" b="1" dirty="0">
+                <a:solidFill>
+                  <a:schemeClr val="tx1"/>
+                </a:solidFill>
+              </a:rPr>
+              <a:t>Insignia vintage</a:t>
+            </a:r>
+            <a:endParaRPr lang="en-US" sz="2000" dirty="0"/>
+          </a:p>
+          <a:p>
+            <a:pPr indent="0" marL="0">
+              <a:spcAft>
+                <a:spcPts val="400"/>
+              </a:spcAft>
+              <a:buNone/>
+            </a:pPr>
+            <a:r>
+              <a:rPr lang="en-US" sz="1400" dirty="0">
+                <a:solidFill>
+                  <a:schemeClr val="accent6"/>
+                </a:solidFill>
+              </a:rPr>
+              <a:t>Escudos y grabados con estética de cabaña.</a:t>
+            </a:r>
+            <a:endParaRPr lang="en-US" sz="2000" dirty="0"/>
+          </a:p>
+          <a:p>
+            <a:pPr indent="0" marL="0">
+              <a:spcAft>
+                <a:spcPts val="400"/>
+              </a:spcAft>
+              <a:buNone/>
+            </a:pPr>
+            <a:r>
+              <a:rPr lang="en-US" sz="1300" b="1" dirty="0">
+                <a:solidFill>
+                  <a:schemeClr val="accent1"/>
+                </a:solidFill>
+              </a:rPr>
+              <a:t>Frecuencia: Media</a:t>
+            </a:r>
+            <a:endParaRPr lang="en-US" sz="2000" dirty="0"/>
+          </a:p>
+          <a:p>
+            <a:pPr indent="0" marL="0">
+              <a:spcAft>
+                <a:spcPts val="400"/>
+              </a:spcAft>
+              <a:buNone/>
+            </a:pPr>
+            <a:r>
+              <a:rPr lang="en-US" sz="1400" dirty="0">
+                <a:solidFill>
+                  <a:schemeClr val="tx1"/>
+                </a:solidFill>
+              </a:rPr>
+              <a:t>Ajena a una industria papelera moderna.</a:t>
+            </a:r>
+            <a:endParaRPr lang="en-US" sz="2000" dirty="0"/>
+          </a:p>
+        </p:txBody>
+      </p:sp>
+      <p:sp>
+        <p:nvSpPr>
+          <p:cNvPr id="13" name="Recurso Árbol orgánico"/>
+          <p:cNvSpPr/>
+          <p:nvPr/>
+        </p:nvSpPr>
+        <p:spPr>
+          <a:xfrm>
+            <a:off x="4251960" y="4206240"/>
+            <a:ext cx="3611880" cy="1920240"/>
+          </a:xfrm>
+          <a:prstGeom prst="roundRect">
+            <a:avLst>
+              <a:gd name="adj" fmla="val 6667"/>
+            </a:avLst>
+          </a:prstGeom>
+          <a:solidFill>
+            <a:schemeClr val="tx1"/>
+          </a:solidFill>
+          <a:ln w="12700">
+            <a:solidFill>
+              <a:schemeClr val="tx1"/>
+            </a:solidFill>
+            <a:prstDash val="solid"/>
+          </a:ln>
+        </p:spPr>
+      </p:sp>
+      <p:sp>
+        <p:nvSpPr>
+          <p:cNvPr id="14" name="Texto Árbol orgánico"/>
+          <p:cNvSpPr txBox="1"/>
+          <p:nvPr/>
+        </p:nvSpPr>
+        <p:spPr>
+          <a:xfrm>
+            <a:off x="4480560" y="4389120"/>
+            <a:ext cx="3154680" cy="1554480"/>
+          </a:xfrm>
+          <a:prstGeom prst="rect">
+            <a:avLst/>
+          </a:prstGeom>
+          <a:noFill/>
+          <a:ln/>
+        </p:spPr>
+        <p:txBody>
+          <a:bodyPr wrap="square" lIns="0" tIns="0" rIns="0" bIns="0" rtlCol="0" anchor="t"/>
+          <a:lstStyle/>
+          <a:p>
+            <a:pPr indent="0" marL="0">
+              <a:spcAft>
+                <a:spcPts val="400"/>
+              </a:spcAft>
+              <a:buNone/>
+            </a:pPr>
+            <a:r>
+              <a:rPr lang="en-US" sz="2000" b="1" dirty="0">
+                <a:solidFill>
+                  <a:schemeClr val="bg2"/>
+                </a:solidFill>
+              </a:rPr>
+              <a:t>Árbol orgánico</a:t>
+            </a:r>
+            <a:endParaRPr lang="en-US" sz="2000" dirty="0"/>
+          </a:p>
+          <a:p>
+            <a:pPr indent="0" marL="0">
+              <a:spcAft>
+                <a:spcPts val="400"/>
+              </a:spcAft>
+              <a:buNone/>
+            </a:pPr>
+            <a:r>
+              <a:rPr lang="en-US" sz="1400" dirty="0">
+                <a:solidFill>
+                  <a:schemeClr val="accent5"/>
+                </a:solidFill>
+              </a:rPr>
+              <a:t>Copas redondeadas y ramas de trazo afinado.</a:t>
+            </a:r>
+            <a:endParaRPr lang="en-US" sz="2000" dirty="0"/>
+          </a:p>
+          <a:p>
+            <a:pPr indent="0" marL="0">
+              <a:spcAft>
+                <a:spcPts val="400"/>
+              </a:spcAft>
+              <a:buNone/>
+            </a:pPr>
+            <a:r>
+              <a:rPr lang="en-US" sz="1300" b="1" dirty="0">
+                <a:solidFill>
+                  <a:schemeClr val="accent1"/>
+                </a:solidFill>
+              </a:rPr>
+              <a:t>Frecuencia: Alta</a:t>
+            </a:r>
+            <a:endParaRPr lang="en-US" sz="2000" dirty="0"/>
+          </a:p>
+          <a:p>
+            <a:pPr indent="0" marL="0">
+              <a:spcAft>
+                <a:spcPts val="400"/>
+              </a:spcAft>
+              <a:buNone/>
+            </a:pPr>
+            <a:r>
+              <a:rPr lang="en-US" sz="1400" dirty="0">
+                <a:solidFill>
+                  <a:schemeClr val="bg2"/>
+                </a:solidFill>
+              </a:rPr>
+              <a:t>Calidez y oficio; el tono que adoptamos.</a:t>
+            </a:r>
+            <a:endParaRPr lang="en-US" sz="2000" dirty="0"/>
+          </a:p>
+        </p:txBody>
+      </p:sp>
+      <p:sp>
+        <p:nvSpPr>
+          <p:cNvPr id="15" name="Recurso Piña y anillos"/>
+          <p:cNvSpPr/>
+          <p:nvPr/>
+        </p:nvSpPr>
+        <p:spPr>
+          <a:xfrm>
+            <a:off x="8046720" y="4206240"/>
+            <a:ext cx="3611880" cy="1920240"/>
+          </a:xfrm>
+          <a:prstGeom prst="roundRect">
+            <a:avLst>
+              <a:gd name="adj" fmla="val 6667"/>
+            </a:avLst>
+          </a:prstGeom>
+          <a:solidFill>
+            <a:schemeClr val="tx1"/>
+          </a:solidFill>
+          <a:ln w="12700">
+            <a:solidFill>
+              <a:schemeClr val="tx1"/>
+            </a:solidFill>
+            <a:prstDash val="solid"/>
+          </a:ln>
+        </p:spPr>
+      </p:sp>
+      <p:sp>
+        <p:nvSpPr>
+          <p:cNvPr id="16" name="Texto Piña y anillos"/>
+          <p:cNvSpPr txBox="1"/>
+          <p:nvPr/>
+        </p:nvSpPr>
+        <p:spPr>
+          <a:xfrm>
+            <a:off x="8275320" y="4389120"/>
+            <a:ext cx="3154680" cy="1554480"/>
+          </a:xfrm>
+          <a:prstGeom prst="rect">
+            <a:avLst/>
+          </a:prstGeom>
+          <a:noFill/>
+          <a:ln/>
+        </p:spPr>
+        <p:txBody>
+          <a:bodyPr wrap="square" lIns="0" tIns="0" rIns="0" bIns="0" rtlCol="0" anchor="t"/>
+          <a:lstStyle/>
+          <a:p>
+            <a:pPr indent="0" marL="0">
+              <a:spcAft>
+                <a:spcPts val="400"/>
+              </a:spcAft>
+              <a:buNone/>
+            </a:pPr>
+            <a:r>
+              <a:rPr lang="en-US" sz="2000" b="1" dirty="0">
+                <a:solidFill>
+                  <a:schemeClr val="bg2"/>
+                </a:solidFill>
+              </a:rPr>
+              <a:t>Piña y anillos</a:t>
+            </a:r>
+            <a:endParaRPr lang="en-US" sz="2000" dirty="0"/>
+          </a:p>
+          <a:p>
+            <a:pPr indent="0" marL="0">
+              <a:spcAft>
+                <a:spcPts val="400"/>
+              </a:spcAft>
+              <a:buNone/>
+            </a:pPr>
+            <a:r>
+              <a:rPr lang="en-US" sz="1400" dirty="0">
+                <a:solidFill>
+                  <a:schemeClr val="accent5"/>
+                </a:solidFill>
+              </a:rPr>
+              <a:t>La semilla o el corte del tronco como signo.</a:t>
+            </a:r>
+            <a:endParaRPr lang="en-US" sz="2000" dirty="0"/>
+          </a:p>
+          <a:p>
+            <a:pPr indent="0" marL="0">
+              <a:spcAft>
+                <a:spcPts val="400"/>
+              </a:spcAft>
+              <a:buNone/>
+            </a:pPr>
+            <a:r>
+              <a:rPr lang="en-US" sz="1300" b="1" dirty="0">
+                <a:solidFill>
+                  <a:schemeClr val="accent1"/>
+                </a:solidFill>
+              </a:rPr>
+              <a:t>Frecuencia: Baja</a:t>
+            </a:r>
+            <a:endParaRPr lang="en-US" sz="2000" dirty="0"/>
+          </a:p>
+          <a:p>
+            <a:pPr indent="0" marL="0">
+              <a:spcAft>
+                <a:spcPts val="400"/>
+              </a:spcAft>
+              <a:buNone/>
+            </a:pPr>
+            <a:r>
+              <a:rPr lang="en-US" sz="1400" dirty="0">
+                <a:solidFill>
+                  <a:schemeClr val="bg2"/>
+                </a:solidFill>
+              </a:rPr>
+              <a:t>Espacio poco explorado: territorio propio.</a:t>
+            </a:r>
+            <a:endParaRPr lang="en-US" sz="2000" dirty="0"/>
           </a:p>
         </p:txBody>
       </p:sp>
@@ -6213,7 +8305,7 @@
                   <a:schemeClr val="tx1"/>
                 </a:solidFill>
               </a:rPr>
-              <a:t>P con araucaria calada</a:t>
+              <a:t>Dónde se ubican las propuestas</a:t>
             </a:r>
             <a:endParaRPr lang="en-US" sz="3000" dirty="0"/>
           </a:p>
@@ -6251,7 +8343,7 @@
                   <a:schemeClr val="accent6"/>
                 </a:solidFill>
               </a:rPr>
-              <a:t>LA P · A4</a:t>
+              <a:t>BENCHMARK · MAPA DE POSICIONAMIENTO</a:t>
             </a:r>
             <a:endParaRPr lang="en-US" sz="1200" dirty="0"/>
           </a:p>
@@ -6259,19 +8351,578 @@
       </p:sp>
       <p:sp>
         <p:nvSpPr>
-          <p:cNvPr id="4" name="Panel negativo"/>
-          <p:cNvSpPr/>
-          <p:nvPr/>
-        </p:nvSpPr>
-        <p:spPr>
-          <a:xfrm>
-            <a:off x="457200" y="1600200"/>
-            <a:ext cx="5532120" cy="4572000"/>
-          </a:xfrm>
-          <a:prstGeom prst="roundRect">
-            <a:avLst>
-              <a:gd name="adj" fmla="val 3600"/>
-            </a:avLst>
+          <p:cNvPr id="4" name="Text 0"/>
+          <p:cNvSpPr/>
+          <p:nvPr>
+            <p:ph idx="102" type="body" hasCustomPrompt="1"/>
+          </p:nvPr>
+        </p:nvSpPr>
+        <p:spPr>
+          <a:xfrm>
+            <a:off x="457200" y="1417320"/>
+            <a:ext cx="11247120" cy="777240"/>
+          </a:xfrm>
+          <a:prstGeom prst="rect">
+            <a:avLst/>
+          </a:prstGeom>
+          <a:noFill/>
+          <a:ln/>
+        </p:spPr>
+        <p:txBody>
+          <a:bodyPr wrap="square" lIns="0" tIns="0" rIns="0" bIns="0" rtlCol="0" anchor="t"/>
+          <a:lstStyle/>
+          <a:p>
+            <a:pPr indent="0" marL="0">
+              <a:lnSpc>
+                <a:spcPct val="115000"/>
+              </a:lnSpc>
+              <a:buNone/>
+            </a:pPr>
+            <a:r>
+              <a:rPr lang="en-US" sz="1500" dirty="0">
+                <a:solidFill>
+                  <a:schemeClr val="tx1"/>
+                </a:solidFill>
+              </a:rPr>
+              <a:t>La mayoría de la categoría se agrupa en lo literal y genérico. Las tres familias de propuestas ocupan el cuadrante propio de Papel Misionero.</a:t>
+            </a:r>
+            <a:endParaRPr lang="en-US" sz="1500" dirty="0"/>
+          </a:p>
+        </p:txBody>
+      </p:sp>
+      <p:sp>
+        <p:nvSpPr>
+          <p:cNvPr id="5" name="Mapa"/>
+          <p:cNvSpPr/>
+          <p:nvPr/>
+        </p:nvSpPr>
+        <p:spPr>
+          <a:xfrm>
+            <a:off x="2103120" y="2286000"/>
+            <a:ext cx="8595360" cy="3703320"/>
+          </a:xfrm>
+          <a:prstGeom prst="rect">
+            <a:avLst/>
+          </a:prstGeom>
+          <a:solidFill>
+            <a:schemeClr val="bg1"/>
+          </a:solidFill>
+          <a:ln w="12700">
+            <a:solidFill>
+              <a:schemeClr val="accent5"/>
+            </a:solidFill>
+            <a:prstDash val="solid"/>
+          </a:ln>
+        </p:spPr>
+      </p:sp>
+      <p:sp>
+        <p:nvSpPr>
+          <p:cNvPr id="6" name="Shape 4"/>
+          <p:cNvSpPr/>
+          <p:nvPr/>
+        </p:nvSpPr>
+        <p:spPr>
+          <a:xfrm>
+            <a:off x="6400800" y="2286000"/>
+            <a:ext cx="0" cy="3703320"/>
+          </a:xfrm>
+          <a:prstGeom prst="line">
+            <a:avLst/>
+          </a:prstGeom>
+          <a:noFill/>
+          <a:ln w="12700">
+            <a:solidFill>
+              <a:schemeClr val="accent5"/>
+            </a:solidFill>
+            <a:prstDash val="solid"/>
+          </a:ln>
+        </p:spPr>
+      </p:sp>
+      <p:sp>
+        <p:nvSpPr>
+          <p:cNvPr id="7" name="Shape 5"/>
+          <p:cNvSpPr/>
+          <p:nvPr/>
+        </p:nvSpPr>
+        <p:spPr>
+          <a:xfrm>
+            <a:off x="2103120" y="4137660"/>
+            <a:ext cx="8595360" cy="0"/>
+          </a:xfrm>
+          <a:prstGeom prst="line">
+            <a:avLst/>
+          </a:prstGeom>
+          <a:noFill/>
+          <a:ln w="12700">
+            <a:solidFill>
+              <a:schemeClr val="accent5"/>
+            </a:solidFill>
+            <a:prstDash val="solid"/>
+          </a:ln>
+        </p:spPr>
+      </p:sp>
+      <p:sp>
+        <p:nvSpPr>
+          <p:cNvPr id="8" name="Text 6"/>
+          <p:cNvSpPr txBox="1"/>
+          <p:nvPr/>
+        </p:nvSpPr>
+        <p:spPr>
+          <a:xfrm>
+            <a:off x="2103120" y="6062472"/>
+            <a:ext cx="2743200" cy="274320"/>
+          </a:xfrm>
+          <a:prstGeom prst="rect">
+            <a:avLst/>
+          </a:prstGeom>
+          <a:noFill/>
+          <a:ln/>
+        </p:spPr>
+        <p:txBody>
+          <a:bodyPr wrap="square" lIns="0" tIns="0" rIns="0" bIns="0" rtlCol="0" anchor="ctr"/>
+          <a:lstStyle/>
+          <a:p>
+            <a:pPr indent="0" marL="0">
+              <a:buNone/>
+            </a:pPr>
+            <a:r>
+              <a:rPr lang="en-US" sz="1100" spc="200" kern="0" dirty="0">
+                <a:solidFill>
+                  <a:schemeClr val="accent6"/>
+                </a:solidFill>
+              </a:rPr>
+              <a:t>GENÉRICO DE LA CATEGORÍA</a:t>
+            </a:r>
+            <a:endParaRPr lang="en-US" sz="1100" dirty="0"/>
+          </a:p>
+        </p:txBody>
+      </p:sp>
+      <p:sp>
+        <p:nvSpPr>
+          <p:cNvPr id="9" name="Text 7"/>
+          <p:cNvSpPr txBox="1"/>
+          <p:nvPr/>
+        </p:nvSpPr>
+        <p:spPr>
+          <a:xfrm>
+            <a:off x="7955280" y="6062472"/>
+            <a:ext cx="2743200" cy="274320"/>
+          </a:xfrm>
+          <a:prstGeom prst="rect">
+            <a:avLst/>
+          </a:prstGeom>
+          <a:noFill/>
+          <a:ln/>
+        </p:spPr>
+        <p:txBody>
+          <a:bodyPr wrap="square" lIns="0" tIns="0" rIns="0" bIns="0" rtlCol="0" anchor="ctr"/>
+          <a:lstStyle/>
+          <a:p>
+            <a:pPr algn="r" indent="0" marL="0">
+              <a:buNone/>
+            </a:pPr>
+            <a:r>
+              <a:rPr lang="en-US" sz="1100" spc="200" kern="0" dirty="0">
+                <a:solidFill>
+                  <a:schemeClr val="accent6"/>
+                </a:solidFill>
+              </a:rPr>
+              <a:t>PROPIO DE PAPEL MISIONERO</a:t>
+            </a:r>
+            <a:endParaRPr lang="en-US" sz="1100" dirty="0"/>
+          </a:p>
+        </p:txBody>
+      </p:sp>
+      <p:sp>
+        <p:nvSpPr>
+          <p:cNvPr id="10" name="Text 8"/>
+          <p:cNvSpPr txBox="1"/>
+          <p:nvPr/>
+        </p:nvSpPr>
+        <p:spPr>
+          <a:xfrm>
+            <a:off x="640080" y="2286000"/>
+            <a:ext cx="1325880" cy="274320"/>
+          </a:xfrm>
+          <a:prstGeom prst="rect">
+            <a:avLst/>
+          </a:prstGeom>
+          <a:noFill/>
+          <a:ln/>
+        </p:spPr>
+        <p:txBody>
+          <a:bodyPr wrap="square" lIns="0" tIns="0" rIns="0" bIns="0" rtlCol="0" anchor="ctr"/>
+          <a:lstStyle/>
+          <a:p>
+            <a:pPr algn="r" indent="0" marL="0">
+              <a:buNone/>
+            </a:pPr>
+            <a:r>
+              <a:rPr lang="en-US" sz="1100" spc="200" kern="0" dirty="0">
+                <a:solidFill>
+                  <a:schemeClr val="accent6"/>
+                </a:solidFill>
+              </a:rPr>
+              <a:t>ABSTRACTO</a:t>
+            </a:r>
+            <a:endParaRPr lang="en-US" sz="1100" dirty="0"/>
+          </a:p>
+        </p:txBody>
+      </p:sp>
+      <p:sp>
+        <p:nvSpPr>
+          <p:cNvPr id="11" name="Text 9"/>
+          <p:cNvSpPr txBox="1"/>
+          <p:nvPr/>
+        </p:nvSpPr>
+        <p:spPr>
+          <a:xfrm>
+            <a:off x="640080" y="5715000"/>
+            <a:ext cx="1325880" cy="274320"/>
+          </a:xfrm>
+          <a:prstGeom prst="rect">
+            <a:avLst/>
+          </a:prstGeom>
+          <a:noFill/>
+          <a:ln/>
+        </p:spPr>
+        <p:txBody>
+          <a:bodyPr wrap="square" lIns="0" tIns="0" rIns="0" bIns="0" rtlCol="0" anchor="ctr"/>
+          <a:lstStyle/>
+          <a:p>
+            <a:pPr algn="r" indent="0" marL="0">
+              <a:buNone/>
+            </a:pPr>
+            <a:r>
+              <a:rPr lang="en-US" sz="1100" spc="200" kern="0" dirty="0">
+                <a:solidFill>
+                  <a:schemeClr val="accent6"/>
+                </a:solidFill>
+              </a:rPr>
+              <a:t>LITERAL</a:t>
+            </a:r>
+            <a:endParaRPr lang="en-US" sz="1100" dirty="0"/>
+          </a:p>
+        </p:txBody>
+      </p:sp>
+      <p:sp>
+        <p:nvSpPr>
+          <p:cNvPr id="12" name="Punto Pino de pisos"/>
+          <p:cNvSpPr/>
+          <p:nvPr/>
+        </p:nvSpPr>
+        <p:spPr>
+          <a:xfrm>
+            <a:off x="3033979" y="5296205"/>
+            <a:ext cx="201168" cy="201168"/>
+          </a:xfrm>
+          <a:prstGeom prst="ellipse">
+            <a:avLst/>
+          </a:prstGeom>
+          <a:solidFill>
+            <a:schemeClr val="accent5"/>
+          </a:solidFill>
+          <a:ln w="12700">
+            <a:solidFill>
+              <a:schemeClr val="accent5"/>
+            </a:solidFill>
+            <a:prstDash val="solid"/>
+          </a:ln>
+        </p:spPr>
+      </p:sp>
+      <p:sp>
+        <p:nvSpPr>
+          <p:cNvPr id="13" name="Rótulo Pino de pisos"/>
+          <p:cNvSpPr txBox="1"/>
+          <p:nvPr/>
+        </p:nvSpPr>
+        <p:spPr>
+          <a:xfrm>
+            <a:off x="3308299" y="5241341"/>
+            <a:ext cx="2743200" cy="329184"/>
+          </a:xfrm>
+          <a:prstGeom prst="rect">
+            <a:avLst/>
+          </a:prstGeom>
+          <a:noFill/>
+          <a:ln/>
+        </p:spPr>
+        <p:txBody>
+          <a:bodyPr wrap="square" lIns="0" tIns="0" rIns="0" bIns="0" rtlCol="0" anchor="ctr"/>
+          <a:lstStyle/>
+          <a:p>
+            <a:pPr indent="0" marL="0">
+              <a:buNone/>
+            </a:pPr>
+            <a:r>
+              <a:rPr lang="en-US" sz="1300" dirty="0">
+                <a:solidFill>
+                  <a:schemeClr val="accent6"/>
+                </a:solidFill>
+              </a:rPr>
+              <a:t>Pino de pisos</a:t>
+            </a:r>
+            <a:endParaRPr lang="en-US" sz="1300" dirty="0"/>
+          </a:p>
+        </p:txBody>
+      </p:sp>
+      <p:sp>
+        <p:nvSpPr>
+          <p:cNvPr id="14" name="Punto Insignia vintage"/>
+          <p:cNvSpPr/>
+          <p:nvPr/>
+        </p:nvSpPr>
+        <p:spPr>
+          <a:xfrm>
+            <a:off x="3893515" y="4629607"/>
+            <a:ext cx="201168" cy="201168"/>
+          </a:xfrm>
+          <a:prstGeom prst="ellipse">
+            <a:avLst/>
+          </a:prstGeom>
+          <a:solidFill>
+            <a:schemeClr val="accent5"/>
+          </a:solidFill>
+          <a:ln w="12700">
+            <a:solidFill>
+              <a:schemeClr val="accent5"/>
+            </a:solidFill>
+            <a:prstDash val="solid"/>
+          </a:ln>
+        </p:spPr>
+      </p:sp>
+      <p:sp>
+        <p:nvSpPr>
+          <p:cNvPr id="15" name="Rótulo Insignia vintage"/>
+          <p:cNvSpPr txBox="1"/>
+          <p:nvPr/>
+        </p:nvSpPr>
+        <p:spPr>
+          <a:xfrm>
+            <a:off x="4167835" y="4574743"/>
+            <a:ext cx="2743200" cy="329184"/>
+          </a:xfrm>
+          <a:prstGeom prst="rect">
+            <a:avLst/>
+          </a:prstGeom>
+          <a:noFill/>
+          <a:ln/>
+        </p:spPr>
+        <p:txBody>
+          <a:bodyPr wrap="square" lIns="0" tIns="0" rIns="0" bIns="0" rtlCol="0" anchor="ctr"/>
+          <a:lstStyle/>
+          <a:p>
+            <a:pPr indent="0" marL="0">
+              <a:buNone/>
+            </a:pPr>
+            <a:r>
+              <a:rPr lang="en-US" sz="1300" dirty="0">
+                <a:solidFill>
+                  <a:schemeClr val="accent6"/>
+                </a:solidFill>
+              </a:rPr>
+              <a:t>Insignia vintage</a:t>
+            </a:r>
+            <a:endParaRPr lang="en-US" sz="1300" dirty="0"/>
+          </a:p>
+        </p:txBody>
+      </p:sp>
+      <p:sp>
+        <p:nvSpPr>
+          <p:cNvPr id="16" name="Punto Letra con árbol"/>
+          <p:cNvSpPr/>
+          <p:nvPr/>
+        </p:nvSpPr>
+        <p:spPr>
+          <a:xfrm>
+            <a:off x="5096866" y="4259275"/>
+            <a:ext cx="201168" cy="201168"/>
+          </a:xfrm>
+          <a:prstGeom prst="ellipse">
+            <a:avLst/>
+          </a:prstGeom>
+          <a:solidFill>
+            <a:schemeClr val="accent5"/>
+          </a:solidFill>
+          <a:ln w="12700">
+            <a:solidFill>
+              <a:schemeClr val="accent5"/>
+            </a:solidFill>
+            <a:prstDash val="solid"/>
+          </a:ln>
+        </p:spPr>
+      </p:sp>
+      <p:sp>
+        <p:nvSpPr>
+          <p:cNvPr id="17" name="Rótulo Letra con árbol"/>
+          <p:cNvSpPr txBox="1"/>
+          <p:nvPr/>
+        </p:nvSpPr>
+        <p:spPr>
+          <a:xfrm>
+            <a:off x="5371186" y="4204411"/>
+            <a:ext cx="2743200" cy="329184"/>
+          </a:xfrm>
+          <a:prstGeom prst="rect">
+            <a:avLst/>
+          </a:prstGeom>
+          <a:noFill/>
+          <a:ln/>
+        </p:spPr>
+        <p:txBody>
+          <a:bodyPr wrap="square" lIns="0" tIns="0" rIns="0" bIns="0" rtlCol="0" anchor="ctr"/>
+          <a:lstStyle/>
+          <a:p>
+            <a:pPr indent="0" marL="0">
+              <a:buNone/>
+            </a:pPr>
+            <a:r>
+              <a:rPr lang="en-US" sz="1300" dirty="0">
+                <a:solidFill>
+                  <a:schemeClr val="accent6"/>
+                </a:solidFill>
+              </a:rPr>
+              <a:t>Letra con árbol</a:t>
+            </a:r>
+            <a:endParaRPr lang="en-US" sz="1300" dirty="0"/>
+          </a:p>
+        </p:txBody>
+      </p:sp>
+      <p:sp>
+        <p:nvSpPr>
+          <p:cNvPr id="18" name="Punto Líneas paralelas"/>
+          <p:cNvSpPr/>
+          <p:nvPr/>
+        </p:nvSpPr>
+        <p:spPr>
+          <a:xfrm>
+            <a:off x="3721608" y="3296412"/>
+            <a:ext cx="201168" cy="201168"/>
+          </a:xfrm>
+          <a:prstGeom prst="ellipse">
+            <a:avLst/>
+          </a:prstGeom>
+          <a:solidFill>
+            <a:schemeClr val="accent5"/>
+          </a:solidFill>
+          <a:ln w="12700">
+            <a:solidFill>
+              <a:schemeClr val="accent5"/>
+            </a:solidFill>
+            <a:prstDash val="solid"/>
+          </a:ln>
+        </p:spPr>
+      </p:sp>
+      <p:sp>
+        <p:nvSpPr>
+          <p:cNvPr id="19" name="Rótulo Líneas paralelas"/>
+          <p:cNvSpPr txBox="1"/>
+          <p:nvPr/>
+        </p:nvSpPr>
+        <p:spPr>
+          <a:xfrm>
+            <a:off x="3995928" y="3241548"/>
+            <a:ext cx="2743200" cy="329184"/>
+          </a:xfrm>
+          <a:prstGeom prst="rect">
+            <a:avLst/>
+          </a:prstGeom>
+          <a:noFill/>
+          <a:ln/>
+        </p:spPr>
+        <p:txBody>
+          <a:bodyPr wrap="square" lIns="0" tIns="0" rIns="0" bIns="0" rtlCol="0" anchor="ctr"/>
+          <a:lstStyle/>
+          <a:p>
+            <a:pPr indent="0" marL="0">
+              <a:buNone/>
+            </a:pPr>
+            <a:r>
+              <a:rPr lang="en-US" sz="1300" dirty="0">
+                <a:solidFill>
+                  <a:schemeClr val="accent6"/>
+                </a:solidFill>
+              </a:rPr>
+              <a:t>Líneas paralelas</a:t>
+            </a:r>
+            <a:endParaRPr lang="en-US" sz="1300" dirty="0"/>
+          </a:p>
+        </p:txBody>
+      </p:sp>
+      <p:sp>
+        <p:nvSpPr>
+          <p:cNvPr id="20" name="Punto Árbol orgánico"/>
+          <p:cNvSpPr/>
+          <p:nvPr/>
+        </p:nvSpPr>
+        <p:spPr>
+          <a:xfrm>
+            <a:off x="2690165" y="4037076"/>
+            <a:ext cx="201168" cy="201168"/>
+          </a:xfrm>
+          <a:prstGeom prst="ellipse">
+            <a:avLst/>
+          </a:prstGeom>
+          <a:solidFill>
+            <a:schemeClr val="accent5"/>
+          </a:solidFill>
+          <a:ln w="12700">
+            <a:solidFill>
+              <a:schemeClr val="accent5"/>
+            </a:solidFill>
+            <a:prstDash val="solid"/>
+          </a:ln>
+        </p:spPr>
+      </p:sp>
+      <p:sp>
+        <p:nvSpPr>
+          <p:cNvPr id="21" name="Rótulo Árbol orgánico"/>
+          <p:cNvSpPr txBox="1"/>
+          <p:nvPr/>
+        </p:nvSpPr>
+        <p:spPr>
+          <a:xfrm>
+            <a:off x="2964485" y="3982212"/>
+            <a:ext cx="2743200" cy="329184"/>
+          </a:xfrm>
+          <a:prstGeom prst="rect">
+            <a:avLst/>
+          </a:prstGeom>
+          <a:noFill/>
+          <a:ln/>
+        </p:spPr>
+        <p:txBody>
+          <a:bodyPr wrap="square" lIns="0" tIns="0" rIns="0" bIns="0" rtlCol="0" anchor="ctr"/>
+          <a:lstStyle/>
+          <a:p>
+            <a:pPr indent="0" marL="0">
+              <a:buNone/>
+            </a:pPr>
+            <a:r>
+              <a:rPr lang="en-US" sz="1300" dirty="0">
+                <a:solidFill>
+                  <a:schemeClr val="accent6"/>
+                </a:solidFill>
+              </a:rPr>
+              <a:t>Árbol orgánico</a:t>
+            </a:r>
+            <a:endParaRPr lang="en-US" sz="1300" dirty="0"/>
+          </a:p>
+        </p:txBody>
+      </p:sp>
+      <p:sp>
+        <p:nvSpPr>
+          <p:cNvPr id="22" name="Punto Árbol solo"/>
+          <p:cNvSpPr/>
+          <p:nvPr/>
+        </p:nvSpPr>
+        <p:spPr>
+          <a:xfrm>
+            <a:off x="6770218" y="4806086"/>
+            <a:ext cx="292608" cy="292608"/>
+          </a:xfrm>
+          <a:prstGeom prst="ellipse">
+            <a:avLst/>
           </a:prstGeom>
           <a:solidFill>
             <a:schemeClr val="tx1"/>
@@ -6284,40 +8935,16 @@
           </a:ln>
         </p:spPr>
       </p:sp>
-      <p:pic>
-        <p:nvPicPr>
-          <p:cNvPr id="5" name="Logo negativo" descr="P con araucaria calada · negativo">    </p:cNvPr>
-          <p:cNvPicPr>
-            <a:picLocks noChangeAspect="1"/>
-          </p:cNvPicPr>
-          <p:nvPr/>
-        </p:nvPicPr>
-        <p:blipFill>
-          <a:blip r:embed="rId1"/>
-          <a:stretch>
-            <a:fillRect/>
-          </a:stretch>
-        </p:blipFill>
-        <p:spPr>
-          <a:xfrm>
-            <a:off x="1165860" y="3041021"/>
-            <a:ext cx="4114800" cy="1507478"/>
-          </a:xfrm>
-          <a:prstGeom prst="rect">
-            <a:avLst/>
-          </a:prstGeom>
-        </p:spPr>
-      </p:pic>
-      <p:sp>
-        <p:nvSpPr>
-          <p:cNvPr id="6" name="Rótulo"/>
+      <p:sp>
+        <p:nvSpPr>
+          <p:cNvPr id="23" name="Rótulo Árbol solo"/>
           <p:cNvSpPr txBox="1"/>
           <p:nvPr/>
         </p:nvSpPr>
         <p:spPr>
           <a:xfrm>
-            <a:off x="731520" y="5715000"/>
-            <a:ext cx="4572000" cy="274320"/>
+            <a:off x="7135978" y="4796942"/>
+            <a:ext cx="2743200" cy="329184"/>
           </a:xfrm>
           <a:prstGeom prst="rect">
             <a:avLst/>
@@ -6333,78 +8960,52 @@
               <a:buNone/>
             </a:pPr>
             <a:r>
-              <a:rPr lang="en-US" sz="1000" spc="300" kern="0" dirty="0">
-                <a:solidFill>
-                  <a:schemeClr val="accent5"/>
-                </a:solidFill>
-              </a:rPr>
-              <a:t>NEGATIVO</a:t>
-            </a:r>
-            <a:endParaRPr lang="en-US" sz="1000" dirty="0"/>
-          </a:p>
-        </p:txBody>
-      </p:sp>
-      <p:sp>
-        <p:nvSpPr>
-          <p:cNvPr id="7" name="Panel una tinta sobre kraft"/>
-          <p:cNvSpPr/>
-          <p:nvPr/>
-        </p:nvSpPr>
-        <p:spPr>
-          <a:xfrm>
-            <a:off x="6199632" y="1600200"/>
-            <a:ext cx="5532120" cy="4572000"/>
-          </a:xfrm>
-          <a:prstGeom prst="roundRect">
-            <a:avLst>
-              <a:gd name="adj" fmla="val 3600"/>
-            </a:avLst>
+              <a:rPr lang="en-US" sz="1500" b="1" dirty="0">
+                <a:solidFill>
+                  <a:schemeClr val="tx1"/>
+                </a:solidFill>
+              </a:rPr>
+              <a:t>Árbol solo</a:t>
+            </a:r>
+            <a:endParaRPr lang="en-US" sz="1500" dirty="0"/>
+          </a:p>
+        </p:txBody>
+      </p:sp>
+      <p:sp>
+        <p:nvSpPr>
+          <p:cNvPr id="24" name="Punto Sellos y contenedores"/>
+          <p:cNvSpPr/>
+          <p:nvPr/>
+        </p:nvSpPr>
+        <p:spPr>
+          <a:xfrm>
+            <a:off x="7285939" y="3472891"/>
+            <a:ext cx="292608" cy="292608"/>
+          </a:xfrm>
+          <a:prstGeom prst="ellipse">
+            <a:avLst/>
           </a:prstGeom>
           <a:solidFill>
-            <a:schemeClr val="accent1"/>
+            <a:schemeClr val="tx1"/>
           </a:solidFill>
           <a:ln w="12700">
             <a:solidFill>
-              <a:schemeClr val="accent1"/>
+              <a:schemeClr val="tx1"/>
             </a:solidFill>
             <a:prstDash val="solid"/>
           </a:ln>
         </p:spPr>
       </p:sp>
-      <p:pic>
-        <p:nvPicPr>
-          <p:cNvPr id="8" name="Logo una tinta sobre kraft" descr="P con araucaria calada · una tinta sobre kraft">    </p:cNvPr>
-          <p:cNvPicPr>
-            <a:picLocks noChangeAspect="1"/>
-          </p:cNvPicPr>
-          <p:nvPr/>
-        </p:nvPicPr>
-        <p:blipFill>
-          <a:blip r:embed="rId2"/>
-          <a:stretch>
-            <a:fillRect/>
-          </a:stretch>
-        </p:blipFill>
-        <p:spPr>
-          <a:xfrm>
-            <a:off x="6908292" y="3041021"/>
-            <a:ext cx="4114800" cy="1507478"/>
-          </a:xfrm>
-          <a:prstGeom prst="rect">
-            <a:avLst/>
-          </a:prstGeom>
-        </p:spPr>
-      </p:pic>
-      <p:sp>
-        <p:nvSpPr>
-          <p:cNvPr id="9" name="Rótulo"/>
+      <p:sp>
+        <p:nvSpPr>
+          <p:cNvPr id="25" name="Rótulo Sellos y contenedores"/>
           <p:cNvSpPr txBox="1"/>
           <p:nvPr/>
         </p:nvSpPr>
         <p:spPr>
           <a:xfrm>
-            <a:off x="6473952" y="5715000"/>
-            <a:ext cx="4572000" cy="274320"/>
+            <a:off x="7651699" y="3463747"/>
+            <a:ext cx="2743200" cy="329184"/>
           </a:xfrm>
           <a:prstGeom prst="rect">
             <a:avLst/>
@@ -6420,14 +9021,75 @@
               <a:buNone/>
             </a:pPr>
             <a:r>
-              <a:rPr lang="en-US" sz="1000" spc="300" kern="0" dirty="0">
-                <a:solidFill>
-                  <a:schemeClr val="tx2"/>
-                </a:solidFill>
-              </a:rPr>
-              <a:t>UNA TINTA SOBRE KRAFT</a:t>
-            </a:r>
-            <a:endParaRPr lang="en-US" sz="1000" dirty="0"/>
+              <a:rPr lang="en-US" sz="1500" b="1" dirty="0">
+                <a:solidFill>
+                  <a:schemeClr val="tx1"/>
+                </a:solidFill>
+              </a:rPr>
+              <a:t>Sellos y contenedores</a:t>
+            </a:r>
+            <a:endParaRPr lang="en-US" sz="1500" dirty="0"/>
+          </a:p>
+        </p:txBody>
+      </p:sp>
+      <p:sp>
+        <p:nvSpPr>
+          <p:cNvPr id="26" name="Punto La P"/>
+          <p:cNvSpPr/>
+          <p:nvPr/>
+        </p:nvSpPr>
+        <p:spPr>
+          <a:xfrm>
+            <a:off x="8661197" y="2806294"/>
+            <a:ext cx="292608" cy="292608"/>
+          </a:xfrm>
+          <a:prstGeom prst="ellipse">
+            <a:avLst/>
+          </a:prstGeom>
+          <a:solidFill>
+            <a:schemeClr val="tx1"/>
+          </a:solidFill>
+          <a:ln w="12700">
+            <a:solidFill>
+              <a:schemeClr val="tx1"/>
+            </a:solidFill>
+            <a:prstDash val="solid"/>
+          </a:ln>
+        </p:spPr>
+      </p:sp>
+      <p:sp>
+        <p:nvSpPr>
+          <p:cNvPr id="27" name="Rótulo La P"/>
+          <p:cNvSpPr txBox="1"/>
+          <p:nvPr/>
+        </p:nvSpPr>
+        <p:spPr>
+          <a:xfrm>
+            <a:off x="9026957" y="2797150"/>
+            <a:ext cx="2743200" cy="329184"/>
+          </a:xfrm>
+          <a:prstGeom prst="rect">
+            <a:avLst/>
+          </a:prstGeom>
+          <a:noFill/>
+          <a:ln/>
+        </p:spPr>
+        <p:txBody>
+          <a:bodyPr wrap="square" lIns="0" tIns="0" rIns="0" bIns="0" rtlCol="0" anchor="ctr"/>
+          <a:lstStyle/>
+          <a:p>
+            <a:pPr indent="0" marL="0">
+              <a:buNone/>
+            </a:pPr>
+            <a:r>
+              <a:rPr lang="en-US" sz="1500" b="1" dirty="0">
+                <a:solidFill>
+                  <a:schemeClr val="tx1"/>
+                </a:solidFill>
+              </a:rPr>
+              <a:t>La P</a:t>
+            </a:r>
+            <a:endParaRPr lang="en-US" sz="1500" dirty="0"/>
           </a:p>
         </p:txBody>
       </p:sp>
@@ -6506,51 +9168,89 @@
           <p:cNvPr id="2" name="Text 0"/>
           <p:cNvSpPr/>
           <p:nvPr>
-            <p:ph idx="100" type="title" hasCustomPrompt="1"/>
-          </p:nvPr>
-        </p:nvSpPr>
-        <p:spPr>
-          <a:xfrm>
-            <a:off x="457200" y="365760"/>
-            <a:ext cx="8686800" cy="685800"/>
-          </a:xfrm>
-          <a:prstGeom prst="rect">
-            <a:avLst/>
-          </a:prstGeom>
-          <a:noFill/>
-          <a:ln/>
-        </p:spPr>
-        <p:txBody>
-          <a:bodyPr wrap="square" lIns="0" tIns="0" rIns="0" bIns="0" rtlCol="0" anchor="ctr"/>
+            <p:ph idx="100" type="body" hasCustomPrompt="1"/>
+          </p:nvPr>
+        </p:nvSpPr>
+        <p:spPr>
+          <a:xfrm>
+            <a:off x="731520" y="2011680"/>
+            <a:ext cx="5486400" cy="457200"/>
+          </a:xfrm>
+          <a:prstGeom prst="rect">
+            <a:avLst/>
+          </a:prstGeom>
+          <a:noFill/>
+          <a:ln/>
+        </p:spPr>
+        <p:txBody>
+          <a:bodyPr wrap="square" lIns="0" tIns="0" rIns="0" bIns="0" rtlCol="0"/>
+          <a:lstStyle/>
+          <a:p>
+            <a:pPr indent="0" marL="0">
+              <a:buNone/>
+            </a:pPr>
+            <a:r>
+              <a:rPr lang="en-US" sz="1400" spc="400" kern="0" dirty="0">
+                <a:solidFill>
+                  <a:schemeClr val="accent1"/>
+                </a:solidFill>
+              </a:rPr>
+              <a:t>SECCIÓN 1 · 4 PROPUESTAS</a:t>
+            </a:r>
+            <a:endParaRPr lang="en-US" sz="1400" dirty="0"/>
+          </a:p>
+        </p:txBody>
+      </p:sp>
+      <p:sp>
+        <p:nvSpPr>
+          <p:cNvPr id="3" name="Text 0"/>
+          <p:cNvSpPr/>
+          <p:nvPr>
+            <p:ph idx="101" type="title" hasCustomPrompt="1"/>
+          </p:nvPr>
+        </p:nvSpPr>
+        <p:spPr>
+          <a:xfrm>
+            <a:off x="731520" y="2560320"/>
+            <a:ext cx="10698480" cy="1280160"/>
+          </a:xfrm>
+          <a:prstGeom prst="rect">
+            <a:avLst/>
+          </a:prstGeom>
+          <a:noFill/>
+          <a:ln/>
+        </p:spPr>
+        <p:txBody>
+          <a:bodyPr wrap="square" lIns="0" tIns="0" rIns="0" bIns="0" rtlCol="0" anchor="t"/>
           <a:lstStyle/>
           <a:p>
             <a:pPr algn="l" indent="0" marL="0">
               <a:buNone/>
             </a:pPr>
             <a:r>
-              <a:rPr lang="en-US" sz="3000" b="1" dirty="0">
-                <a:solidFill>
-                  <a:schemeClr val="tx1"/>
-                </a:solidFill>
-              </a:rPr>
-              <a:t>P espiral</a:t>
-            </a:r>
-            <a:endParaRPr lang="en-US" sz="3000" dirty="0"/>
-          </a:p>
-        </p:txBody>
-      </p:sp>
-      <p:sp>
-        <p:nvSpPr>
-          <p:cNvPr id="3" name="Text 0"/>
-          <p:cNvSpPr/>
-          <p:nvPr>
-            <p:ph idx="101" type="body" hasCustomPrompt="1"/>
-          </p:nvPr>
-        </p:nvSpPr>
-        <p:spPr>
-          <a:xfrm>
-            <a:off x="457200" y="1005840"/>
-            <a:ext cx="8686800" cy="365760"/>
+              <a:rPr lang="en-US" sz="5400" b="1" dirty="0">
+                <a:solidFill>
+                  <a:schemeClr val="bg2"/>
+                </a:solidFill>
+              </a:rPr>
+              <a:t>La P</a:t>
+            </a:r>
+            <a:endParaRPr lang="en-US" sz="5400" dirty="0"/>
+          </a:p>
+        </p:txBody>
+      </p:sp>
+      <p:sp>
+        <p:nvSpPr>
+          <p:cNvPr id="4" name="Text 0"/>
+          <p:cNvSpPr/>
+          <p:nvPr>
+            <p:ph idx="102" type="body" hasCustomPrompt="1"/>
+          </p:nvPr>
+        </p:nvSpPr>
+        <p:spPr>
+          <a:xfrm>
+            <a:off x="731520" y="3931920"/>
+            <a:ext cx="8778240" cy="1645920"/>
           </a:xfrm>
           <a:prstGeom prst="rect">
             <a:avLst/>
@@ -6563,236 +9263,20 @@
           <a:lstStyle/>
           <a:p>
             <a:pPr indent="0" marL="0">
-              <a:buNone/>
-            </a:pPr>
-            <a:r>
-              <a:rPr lang="en-US" sz="1200" spc="300" kern="0" dirty="0">
-                <a:solidFill>
-                  <a:schemeClr val="accent6"/>
-                </a:solidFill>
-              </a:rPr>
-              <a:t>LA P · N1</a:t>
-            </a:r>
-            <a:endParaRPr lang="en-US" sz="1200" dirty="0"/>
-          </a:p>
-        </p:txBody>
-      </p:sp>
-      <p:sp>
-        <p:nvSpPr>
-          <p:cNvPr id="4" name="Panel negativo"/>
-          <p:cNvSpPr/>
-          <p:nvPr/>
-        </p:nvSpPr>
-        <p:spPr>
-          <a:xfrm>
-            <a:off x="457200" y="1600200"/>
-            <a:ext cx="5532120" cy="4572000"/>
-          </a:xfrm>
-          <a:prstGeom prst="roundRect">
-            <a:avLst>
-              <a:gd name="adj" fmla="val 3600"/>
-            </a:avLst>
-          </a:prstGeom>
-          <a:solidFill>
-            <a:schemeClr val="tx1"/>
-          </a:solidFill>
-          <a:ln w="12700">
-            <a:solidFill>
-              <a:schemeClr val="tx1"/>
-            </a:solidFill>
-            <a:prstDash val="solid"/>
-          </a:ln>
-        </p:spPr>
-      </p:sp>
-      <p:pic>
-        <p:nvPicPr>
-          <p:cNvPr id="5" name="Logo negativo" descr="P espiral · negativo">    </p:cNvPr>
-          <p:cNvPicPr>
-            <a:picLocks noChangeAspect="1"/>
-          </p:cNvPicPr>
-          <p:nvPr/>
-        </p:nvPicPr>
-        <p:blipFill>
-          <a:blip r:embed="rId1"/>
-          <a:stretch>
-            <a:fillRect/>
-          </a:stretch>
-        </p:blipFill>
-        <p:spPr>
-          <a:xfrm>
-            <a:off x="1165860" y="3041021"/>
-            <a:ext cx="4114800" cy="1507478"/>
-          </a:xfrm>
-          <a:prstGeom prst="rect">
-            <a:avLst/>
-          </a:prstGeom>
-        </p:spPr>
-      </p:pic>
-      <p:sp>
-        <p:nvSpPr>
-          <p:cNvPr id="6" name="Rótulo"/>
-          <p:cNvSpPr txBox="1"/>
-          <p:nvPr/>
-        </p:nvSpPr>
-        <p:spPr>
-          <a:xfrm>
-            <a:off x="731520" y="5715000"/>
-            <a:ext cx="4572000" cy="274320"/>
-          </a:xfrm>
-          <a:prstGeom prst="rect">
-            <a:avLst/>
-          </a:prstGeom>
-          <a:noFill/>
-          <a:ln/>
-        </p:spPr>
-        <p:txBody>
-          <a:bodyPr wrap="square" lIns="0" tIns="0" rIns="0" bIns="0" rtlCol="0" anchor="ctr"/>
-          <a:lstStyle/>
-          <a:p>
-            <a:pPr indent="0" marL="0">
-              <a:buNone/>
-            </a:pPr>
-            <a:r>
-              <a:rPr lang="en-US" sz="1000" spc="300" kern="0" dirty="0">
+              <a:lnSpc>
+                <a:spcPct val="120000"/>
+              </a:lnSpc>
+              <a:buNone/>
+            </a:pPr>
+            <a:r>
+              <a:rPr lang="en-US" sz="1800" dirty="0">
                 <a:solidFill>
                   <a:schemeClr val="accent5"/>
                 </a:solidFill>
               </a:rPr>
-              <a:t>NEGATIVO</a:t>
-            </a:r>
-            <a:endParaRPr lang="en-US" sz="1000" dirty="0"/>
-          </a:p>
-        </p:txBody>
-      </p:sp>
-      <p:sp>
-        <p:nvSpPr>
-          <p:cNvPr id="7" name="Panel una tinta sobre kraft"/>
-          <p:cNvSpPr/>
-          <p:nvPr/>
-        </p:nvSpPr>
-        <p:spPr>
-          <a:xfrm>
-            <a:off x="6199632" y="1600200"/>
-            <a:ext cx="5532120" cy="4572000"/>
-          </a:xfrm>
-          <a:prstGeom prst="roundRect">
-            <a:avLst>
-              <a:gd name="adj" fmla="val 3600"/>
-            </a:avLst>
-          </a:prstGeom>
-          <a:solidFill>
-            <a:schemeClr val="accent1"/>
-          </a:solidFill>
-          <a:ln w="12700">
-            <a:solidFill>
-              <a:schemeClr val="accent1"/>
-            </a:solidFill>
-            <a:prstDash val="solid"/>
-          </a:ln>
-        </p:spPr>
-      </p:sp>
-      <p:pic>
-        <p:nvPicPr>
-          <p:cNvPr id="8" name="Logo una tinta sobre kraft" descr="P espiral · una tinta sobre kraft">    </p:cNvPr>
-          <p:cNvPicPr>
-            <a:picLocks noChangeAspect="1"/>
-          </p:cNvPicPr>
-          <p:nvPr/>
-        </p:nvPicPr>
-        <p:blipFill>
-          <a:blip r:embed="rId2"/>
-          <a:stretch>
-            <a:fillRect/>
-          </a:stretch>
-        </p:blipFill>
-        <p:spPr>
-          <a:xfrm>
-            <a:off x="6908292" y="3041021"/>
-            <a:ext cx="4114800" cy="1507478"/>
-          </a:xfrm>
-          <a:prstGeom prst="rect">
-            <a:avLst/>
-          </a:prstGeom>
-        </p:spPr>
-      </p:pic>
-      <p:sp>
-        <p:nvSpPr>
-          <p:cNvPr id="9" name="Rótulo"/>
-          <p:cNvSpPr txBox="1"/>
-          <p:nvPr/>
-        </p:nvSpPr>
-        <p:spPr>
-          <a:xfrm>
-            <a:off x="6473952" y="5715000"/>
-            <a:ext cx="4572000" cy="274320"/>
-          </a:xfrm>
-          <a:prstGeom prst="rect">
-            <a:avLst/>
-          </a:prstGeom>
-          <a:noFill/>
-          <a:ln/>
-        </p:spPr>
-        <p:txBody>
-          <a:bodyPr wrap="square" lIns="0" tIns="0" rIns="0" bIns="0" rtlCol="0" anchor="ctr"/>
-          <a:lstStyle/>
-          <a:p>
-            <a:pPr indent="0" marL="0">
-              <a:buNone/>
-            </a:pPr>
-            <a:r>
-              <a:rPr lang="en-US" sz="1000" spc="300" kern="0" dirty="0">
-                <a:solidFill>
-                  <a:schemeClr val="tx2"/>
-                </a:solidFill>
-              </a:rPr>
-              <a:t>UNA TINTA SOBRE KRAFT</a:t>
-            </a:r>
-            <a:endParaRPr lang="en-US" sz="1000" dirty="0"/>
-          </a:p>
-        </p:txBody>
-      </p:sp>
-      <p:sp>
-        <p:nvSpPr>
-          <p:cNvPr id="25" name="Slide Number Placeholder 0"/>
-          <p:cNvSpPr>
-            <a:spLocks noGrp="1"/>
-          </p:cNvSpPr>
-          <p:nvPr>
-            <p:ph type="sldNum" sz="quarter" idx="4294967295"/>
-          </p:nvPr>
-        </p:nvSpPr>
-        <p:spPr>
-          <a:xfrm>
-            <a:off x="11247120" y="6400800"/>
-            <a:ext cx="502920" cy="274320"/>
-          </a:xfrm>
-          <a:prstGeom prst="rect">
-            <a:avLst/>
-          </a:prstGeom>
-          <a:extLst>
-            <a:ext uri="{C572A759-6A51-4108-AA02-DFA0A04FC94B}">
-              <ma14:wrappingTextBoxFlag xmlns:ma14="http://schemas.microsoft.com/office/mac/drawingml/2011/main" val="0"/>
-            </a:ext>
-          </a:extLst>
-        </p:spPr>
-        <p:txBody>
-          <a:bodyPr/>
-          <a:lstStyle>
-            <a:lvl1pPr>
-              <a:defRPr sz="1000">
-                <a:solidFill>
-                  <a:schemeClr val="accent6"/>
-                </a:solidFill>
-              </a:defRPr>
-            </a:lvl1pPr>
-          </a:lstStyle>
-          <a:p>
-            <a:pPr algn="r"/>
-            <a:fld id="{F7021451-1387-4CA6-816F-3879F97B5CBC}" type="slidenum">
-              <a:rPr b="0" lang="en-US"/>
-              <a:t>5</a:t>
-            </a:fld>
-            <a:endParaRPr lang="en-US"/>
+              <a:t>La inicial como contenedor del origen. La P de Papel abraza el árbol, la bobina o la madera: el nombre y el territorio se leen en un mismo signo, propio e imposible de confundir con otras marcas forestales.</a:t>
+            </a:r>
+            <a:endParaRPr lang="en-US" sz="1800" dirty="0"/>
           </a:p>
         </p:txBody>
       </p:sp>
@@ -6853,7 +9337,7 @@
                   <a:schemeClr val="tx1"/>
                 </a:solidFill>
               </a:rPr>
-              <a:t>P de anillos</a:t>
+              <a:t>P monolínea con araucaria</a:t>
             </a:r>
             <a:endParaRPr lang="en-US" sz="3000" dirty="0"/>
           </a:p>
@@ -6891,7 +9375,7 @@
                   <a:schemeClr val="accent6"/>
                 </a:solidFill>
               </a:rPr>
-              <a:t>LA P · N3</a:t>
+              <a:t>LA P · A1</a:t>
             </a:r>
             <a:endParaRPr lang="en-US" sz="1200" dirty="0"/>
           </a:p>
@@ -6899,18 +9383,59 @@
       </p:sp>
       <p:sp>
         <p:nvSpPr>
-          <p:cNvPr id="4" name="Panel negativo"/>
-          <p:cNvSpPr/>
-          <p:nvPr/>
-        </p:nvSpPr>
-        <p:spPr>
-          <a:xfrm>
-            <a:off x="457200" y="1600200"/>
-            <a:ext cx="5532120" cy="4572000"/>
+          <p:cNvPr id="4" name="Text 0"/>
+          <p:cNvSpPr/>
+          <p:nvPr>
+            <p:ph idx="102" type="body" hasCustomPrompt="1"/>
+          </p:nvPr>
+        </p:nvSpPr>
+        <p:spPr>
+          <a:xfrm>
+            <a:off x="457200" y="1417320"/>
+            <a:ext cx="11247120" cy="777240"/>
+          </a:xfrm>
+          <a:prstGeom prst="rect">
+            <a:avLst/>
+          </a:prstGeom>
+          <a:noFill/>
+          <a:ln/>
+        </p:spPr>
+        <p:txBody>
+          <a:bodyPr wrap="square" lIns="0" tIns="0" rIns="0" bIns="0" rtlCol="0" anchor="t"/>
+          <a:lstStyle/>
+          <a:p>
+            <a:pPr indent="0" marL="0">
+              <a:lnSpc>
+                <a:spcPct val="115000"/>
+              </a:lnSpc>
+              <a:buNone/>
+            </a:pPr>
+            <a:r>
+              <a:rPr lang="en-US" sz="1500" dirty="0">
+                <a:solidFill>
+                  <a:schemeClr val="tx1"/>
+                </a:solidFill>
+              </a:rPr>
+              <a:t>Una sola línea dibuja la P y abraza a la araucaria, el árbol emblema de Misiones. El ojo de la letra se cierra sobre el tronco: marca y territorio en un mismo gesto. Liviana y elegante para la comunicación institucional.</a:t>
+            </a:r>
+            <a:endParaRPr lang="en-US" sz="1500" dirty="0"/>
+          </a:p>
+        </p:txBody>
+      </p:sp>
+      <p:sp>
+        <p:nvSpPr>
+          <p:cNvPr id="5" name="Panel negativo"/>
+          <p:cNvSpPr/>
+          <p:nvPr/>
+        </p:nvSpPr>
+        <p:spPr>
+          <a:xfrm>
+            <a:off x="457200" y="2331720"/>
+            <a:ext cx="5532120" cy="3840480"/>
           </a:xfrm>
           <a:prstGeom prst="roundRect">
             <a:avLst>
-              <a:gd name="adj" fmla="val 3600"/>
+              <a:gd name="adj" fmla="val 4286"/>
             </a:avLst>
           </a:prstGeom>
           <a:solidFill>
@@ -6926,7 +9451,7 @@
       </p:sp>
       <p:pic>
         <p:nvPicPr>
-          <p:cNvPr id="5" name="Logo negativo" descr="P de anillos · negativo">    </p:cNvPr>
+          <p:cNvPr id="6" name="Logo negativo" descr="P monolínea con araucaria · negativo">    </p:cNvPr>
           <p:cNvPicPr>
             <a:picLocks noChangeAspect="1"/>
           </p:cNvPicPr>
@@ -6940,8 +9465,8 @@
         </p:blipFill>
         <p:spPr>
           <a:xfrm>
-            <a:off x="1165860" y="3041021"/>
-            <a:ext cx="4114800" cy="1507478"/>
+            <a:off x="1348740" y="3473780"/>
+            <a:ext cx="3749040" cy="1373480"/>
           </a:xfrm>
           <a:prstGeom prst="rect">
             <a:avLst/>
@@ -6950,7 +9475,7 @@
       </p:pic>
       <p:sp>
         <p:nvSpPr>
-          <p:cNvPr id="6" name="Rótulo"/>
+          <p:cNvPr id="7" name="Rótulo"/>
           <p:cNvSpPr txBox="1"/>
           <p:nvPr/>
         </p:nvSpPr>
@@ -6986,18 +9511,18 @@
       </p:sp>
       <p:sp>
         <p:nvSpPr>
-          <p:cNvPr id="7" name="Panel una tinta sobre kraft"/>
-          <p:cNvSpPr/>
-          <p:nvPr/>
-        </p:nvSpPr>
-        <p:spPr>
-          <a:xfrm>
-            <a:off x="6199632" y="1600200"/>
-            <a:ext cx="5532120" cy="4572000"/>
+          <p:cNvPr id="8" name="Panel una tinta sobre kraft"/>
+          <p:cNvSpPr/>
+          <p:nvPr/>
+        </p:nvSpPr>
+        <p:spPr>
+          <a:xfrm>
+            <a:off x="6199632" y="2331720"/>
+            <a:ext cx="5532120" cy="3840480"/>
           </a:xfrm>
           <a:prstGeom prst="roundRect">
             <a:avLst>
-              <a:gd name="adj" fmla="val 3600"/>
+              <a:gd name="adj" fmla="val 4286"/>
             </a:avLst>
           </a:prstGeom>
           <a:solidFill>
@@ -7013,7 +9538,7 @@
       </p:sp>
       <p:pic>
         <p:nvPicPr>
-          <p:cNvPr id="8" name="Logo una tinta sobre kraft" descr="P de anillos · una tinta sobre kraft">    </p:cNvPr>
+          <p:cNvPr id="9" name="Logo una tinta sobre kraft" descr="P monolínea con araucaria · una tinta sobre kraft">    </p:cNvPr>
           <p:cNvPicPr>
             <a:picLocks noChangeAspect="1"/>
           </p:cNvPicPr>
@@ -7027,8 +9552,8 @@
         </p:blipFill>
         <p:spPr>
           <a:xfrm>
-            <a:off x="6908292" y="3041021"/>
-            <a:ext cx="4114800" cy="1507478"/>
+            <a:off x="7091172" y="3473780"/>
+            <a:ext cx="3749040" cy="1373480"/>
           </a:xfrm>
           <a:prstGeom prst="rect">
             <a:avLst/>
@@ -7037,7 +9562,7 @@
       </p:pic>
       <p:sp>
         <p:nvSpPr>
-          <p:cNvPr id="9" name="Rótulo"/>
+          <p:cNvPr id="10" name="Rótulo"/>
           <p:cNvSpPr txBox="1"/>
           <p:nvPr/>
         </p:nvSpPr>
@@ -7146,51 +9671,89 @@
           <p:cNvPr id="2" name="Text 0"/>
           <p:cNvSpPr/>
           <p:nvPr>
-            <p:ph idx="100" type="body" hasCustomPrompt="1"/>
-          </p:nvPr>
-        </p:nvSpPr>
-        <p:spPr>
-          <a:xfrm>
-            <a:off x="731520" y="2011680"/>
-            <a:ext cx="5486400" cy="457200"/>
-          </a:xfrm>
-          <a:prstGeom prst="rect">
-            <a:avLst/>
-          </a:prstGeom>
-          <a:noFill/>
-          <a:ln/>
-        </p:spPr>
-        <p:txBody>
-          <a:bodyPr wrap="square" lIns="0" tIns="0" rIns="0" bIns="0" rtlCol="0"/>
+            <p:ph idx="100" type="title" hasCustomPrompt="1"/>
+          </p:nvPr>
+        </p:nvSpPr>
+        <p:spPr>
+          <a:xfrm>
+            <a:off x="457200" y="365760"/>
+            <a:ext cx="8686800" cy="685800"/>
+          </a:xfrm>
+          <a:prstGeom prst="rect">
+            <a:avLst/>
+          </a:prstGeom>
+          <a:noFill/>
+          <a:ln/>
+        </p:spPr>
+        <p:txBody>
+          <a:bodyPr wrap="square" lIns="0" tIns="0" rIns="0" bIns="0" rtlCol="0" anchor="ctr"/>
+          <a:lstStyle/>
+          <a:p>
+            <a:pPr algn="l" indent="0" marL="0">
+              <a:buNone/>
+            </a:pPr>
+            <a:r>
+              <a:rPr lang="en-US" sz="3000" b="1" dirty="0">
+                <a:solidFill>
+                  <a:schemeClr val="tx1"/>
+                </a:solidFill>
+              </a:rPr>
+              <a:t>P con araucaria calada</a:t>
+            </a:r>
+            <a:endParaRPr lang="en-US" sz="3000" dirty="0"/>
+          </a:p>
+        </p:txBody>
+      </p:sp>
+      <p:sp>
+        <p:nvSpPr>
+          <p:cNvPr id="3" name="Text 0"/>
+          <p:cNvSpPr/>
+          <p:nvPr>
+            <p:ph idx="101" type="body" hasCustomPrompt="1"/>
+          </p:nvPr>
+        </p:nvSpPr>
+        <p:spPr>
+          <a:xfrm>
+            <a:off x="457200" y="1005840"/>
+            <a:ext cx="8686800" cy="365760"/>
+          </a:xfrm>
+          <a:prstGeom prst="rect">
+            <a:avLst/>
+          </a:prstGeom>
+          <a:noFill/>
+          <a:ln/>
+        </p:spPr>
+        <p:txBody>
+          <a:bodyPr wrap="square" lIns="0" tIns="0" rIns="0" bIns="0" rtlCol="0" anchor="t"/>
           <a:lstStyle/>
           <a:p>
             <a:pPr indent="0" marL="0">
               <a:buNone/>
             </a:pPr>
             <a:r>
-              <a:rPr lang="en-US" sz="1400" spc="400" kern="0" dirty="0">
-                <a:solidFill>
-                  <a:schemeClr val="accent1"/>
-                </a:solidFill>
-              </a:rPr>
-              <a:t>SECCIÓN 2 · 5 PROPUESTAS</a:t>
-            </a:r>
-            <a:endParaRPr lang="en-US" sz="1400" dirty="0"/>
-          </a:p>
-        </p:txBody>
-      </p:sp>
-      <p:sp>
-        <p:nvSpPr>
-          <p:cNvPr id="3" name="Text 0"/>
-          <p:cNvSpPr/>
-          <p:nvPr>
-            <p:ph idx="101" type="title" hasCustomPrompt="1"/>
-          </p:nvPr>
-        </p:nvSpPr>
-        <p:spPr>
-          <a:xfrm>
-            <a:off x="731520" y="2560320"/>
-            <a:ext cx="10698480" cy="1280160"/>
+              <a:rPr lang="en-US" sz="1200" spc="300" kern="0" dirty="0">
+                <a:solidFill>
+                  <a:schemeClr val="accent6"/>
+                </a:solidFill>
+              </a:rPr>
+              <a:t>LA P · A4</a:t>
+            </a:r>
+            <a:endParaRPr lang="en-US" sz="1200" dirty="0"/>
+          </a:p>
+        </p:txBody>
+      </p:sp>
+      <p:sp>
+        <p:nvSpPr>
+          <p:cNvPr id="4" name="Text 0"/>
+          <p:cNvSpPr/>
+          <p:nvPr>
+            <p:ph idx="102" type="body" hasCustomPrompt="1"/>
+          </p:nvPr>
+        </p:nvSpPr>
+        <p:spPr>
+          <a:xfrm>
+            <a:off x="457200" y="1417320"/>
+            <a:ext cx="11247120" cy="777240"/>
           </a:xfrm>
           <a:prstGeom prst="rect">
             <a:avLst/>
@@ -7202,56 +9765,240 @@
           <a:bodyPr wrap="square" lIns="0" tIns="0" rIns="0" bIns="0" rtlCol="0" anchor="t"/>
           <a:lstStyle/>
           <a:p>
-            <a:pPr algn="l" indent="0" marL="0">
-              <a:buNone/>
-            </a:pPr>
-            <a:r>
-              <a:rPr lang="en-US" sz="5400" b="1" dirty="0">
-                <a:solidFill>
-                  <a:schemeClr val="bg2"/>
-                </a:solidFill>
-              </a:rPr>
-              <a:t>Sellos y contenedores</a:t>
-            </a:r>
-            <a:endParaRPr lang="en-US" sz="5400" dirty="0"/>
-          </a:p>
-        </p:txBody>
-      </p:sp>
-      <p:sp>
-        <p:nvSpPr>
-          <p:cNvPr id="4" name="Text 0"/>
-          <p:cNvSpPr/>
-          <p:nvPr>
-            <p:ph idx="102" type="body" hasCustomPrompt="1"/>
-          </p:nvPr>
-        </p:nvSpPr>
-        <p:spPr>
-          <a:xfrm>
-            <a:off x="731520" y="3931920"/>
-            <a:ext cx="10698480" cy="731520"/>
-          </a:xfrm>
-          <a:prstGeom prst="rect">
-            <a:avLst/>
-          </a:prstGeom>
-          <a:noFill/>
-          <a:ln/>
-        </p:spPr>
-        <p:txBody>
-          <a:bodyPr wrap="square" lIns="0" tIns="0" rIns="0" bIns="0" rtlCol="0" anchor="t"/>
-          <a:lstStyle/>
-          <a:p>
             <a:pPr indent="0" marL="0">
-              <a:buNone/>
-            </a:pPr>
-            <a:r>
-              <a:rPr lang="en-US" sz="2000" dirty="0">
+              <a:lnSpc>
+                <a:spcPct val="115000"/>
+              </a:lnSpc>
+              <a:buNone/>
+            </a:pPr>
+            <a:r>
+              <a:rPr lang="en-US" sz="1500" dirty="0">
+                <a:solidFill>
+                  <a:schemeClr val="tx1"/>
+                </a:solidFill>
+              </a:rPr>
+              <a:t>La P de cuerpo pleno recorta la araucaria en negativo. Máxima pregnancia y resistencia en impresión flexográfica: funciona como sello sobre bolsas y bobinas.</a:t>
+            </a:r>
+            <a:endParaRPr lang="en-US" sz="1500" dirty="0"/>
+          </a:p>
+        </p:txBody>
+      </p:sp>
+      <p:sp>
+        <p:nvSpPr>
+          <p:cNvPr id="5" name="Panel negativo"/>
+          <p:cNvSpPr/>
+          <p:nvPr/>
+        </p:nvSpPr>
+        <p:spPr>
+          <a:xfrm>
+            <a:off x="457200" y="2331720"/>
+            <a:ext cx="5532120" cy="3840480"/>
+          </a:xfrm>
+          <a:prstGeom prst="roundRect">
+            <a:avLst>
+              <a:gd name="adj" fmla="val 4286"/>
+            </a:avLst>
+          </a:prstGeom>
+          <a:solidFill>
+            <a:schemeClr val="tx1"/>
+          </a:solidFill>
+          <a:ln w="12700">
+            <a:solidFill>
+              <a:schemeClr val="tx1"/>
+            </a:solidFill>
+            <a:prstDash val="solid"/>
+          </a:ln>
+        </p:spPr>
+      </p:sp>
+      <p:pic>
+        <p:nvPicPr>
+          <p:cNvPr id="6" name="Logo negativo" descr="P con araucaria calada · negativo">    </p:cNvPr>
+          <p:cNvPicPr>
+            <a:picLocks noChangeAspect="1"/>
+          </p:cNvPicPr>
+          <p:nvPr/>
+        </p:nvPicPr>
+        <p:blipFill>
+          <a:blip r:embed="rId1"/>
+          <a:stretch>
+            <a:fillRect/>
+          </a:stretch>
+        </p:blipFill>
+        <p:spPr>
+          <a:xfrm>
+            <a:off x="1348740" y="3473780"/>
+            <a:ext cx="3749040" cy="1373480"/>
+          </a:xfrm>
+          <a:prstGeom prst="rect">
+            <a:avLst/>
+          </a:prstGeom>
+        </p:spPr>
+      </p:pic>
+      <p:sp>
+        <p:nvSpPr>
+          <p:cNvPr id="7" name="Rótulo"/>
+          <p:cNvSpPr txBox="1"/>
+          <p:nvPr/>
+        </p:nvSpPr>
+        <p:spPr>
+          <a:xfrm>
+            <a:off x="731520" y="5715000"/>
+            <a:ext cx="4572000" cy="274320"/>
+          </a:xfrm>
+          <a:prstGeom prst="rect">
+            <a:avLst/>
+          </a:prstGeom>
+          <a:noFill/>
+          <a:ln/>
+        </p:spPr>
+        <p:txBody>
+          <a:bodyPr wrap="square" lIns="0" tIns="0" rIns="0" bIns="0" rtlCol="0" anchor="ctr"/>
+          <a:lstStyle/>
+          <a:p>
+            <a:pPr indent="0" marL="0">
+              <a:buNone/>
+            </a:pPr>
+            <a:r>
+              <a:rPr lang="en-US" sz="1000" spc="300" kern="0" dirty="0">
                 <a:solidFill>
                   <a:schemeClr val="accent5"/>
                 </a:solidFill>
               </a:rPr>
-              <a:t>El símbolo dentro de una forma cerrada</a:t>
-            </a:r>
-            <a:endParaRPr lang="en-US" sz="2000" dirty="0"/>
+              <a:t>NEGATIVO</a:t>
+            </a:r>
+            <a:endParaRPr lang="en-US" sz="1000" dirty="0"/>
+          </a:p>
+        </p:txBody>
+      </p:sp>
+      <p:sp>
+        <p:nvSpPr>
+          <p:cNvPr id="8" name="Panel una tinta sobre kraft"/>
+          <p:cNvSpPr/>
+          <p:nvPr/>
+        </p:nvSpPr>
+        <p:spPr>
+          <a:xfrm>
+            <a:off x="6199632" y="2331720"/>
+            <a:ext cx="5532120" cy="3840480"/>
+          </a:xfrm>
+          <a:prstGeom prst="roundRect">
+            <a:avLst>
+              <a:gd name="adj" fmla="val 4286"/>
+            </a:avLst>
+          </a:prstGeom>
+          <a:solidFill>
+            <a:schemeClr val="accent1"/>
+          </a:solidFill>
+          <a:ln w="12700">
+            <a:solidFill>
+              <a:schemeClr val="accent1"/>
+            </a:solidFill>
+            <a:prstDash val="solid"/>
+          </a:ln>
+        </p:spPr>
+      </p:sp>
+      <p:pic>
+        <p:nvPicPr>
+          <p:cNvPr id="9" name="Logo una tinta sobre kraft" descr="P con araucaria calada · una tinta sobre kraft">    </p:cNvPr>
+          <p:cNvPicPr>
+            <a:picLocks noChangeAspect="1"/>
+          </p:cNvPicPr>
+          <p:nvPr/>
+        </p:nvPicPr>
+        <p:blipFill>
+          <a:blip r:embed="rId2"/>
+          <a:stretch>
+            <a:fillRect/>
+          </a:stretch>
+        </p:blipFill>
+        <p:spPr>
+          <a:xfrm>
+            <a:off x="7091172" y="3473780"/>
+            <a:ext cx="3749040" cy="1373480"/>
+          </a:xfrm>
+          <a:prstGeom prst="rect">
+            <a:avLst/>
+          </a:prstGeom>
+        </p:spPr>
+      </p:pic>
+      <p:sp>
+        <p:nvSpPr>
+          <p:cNvPr id="10" name="Rótulo"/>
+          <p:cNvSpPr txBox="1"/>
+          <p:nvPr/>
+        </p:nvSpPr>
+        <p:spPr>
+          <a:xfrm>
+            <a:off x="6473952" y="5715000"/>
+            <a:ext cx="4572000" cy="274320"/>
+          </a:xfrm>
+          <a:prstGeom prst="rect">
+            <a:avLst/>
+          </a:prstGeom>
+          <a:noFill/>
+          <a:ln/>
+        </p:spPr>
+        <p:txBody>
+          <a:bodyPr wrap="square" lIns="0" tIns="0" rIns="0" bIns="0" rtlCol="0" anchor="ctr"/>
+          <a:lstStyle/>
+          <a:p>
+            <a:pPr indent="0" marL="0">
+              <a:buNone/>
+            </a:pPr>
+            <a:r>
+              <a:rPr lang="en-US" sz="1000" spc="300" kern="0" dirty="0">
+                <a:solidFill>
+                  <a:schemeClr val="tx2"/>
+                </a:solidFill>
+              </a:rPr>
+              <a:t>UNA TINTA SOBRE KRAFT</a:t>
+            </a:r>
+            <a:endParaRPr lang="en-US" sz="1000" dirty="0"/>
+          </a:p>
+        </p:txBody>
+      </p:sp>
+      <p:sp>
+        <p:nvSpPr>
+          <p:cNvPr id="25" name="Slide Number Placeholder 0"/>
+          <p:cNvSpPr>
+            <a:spLocks noGrp="1"/>
+          </p:cNvSpPr>
+          <p:nvPr>
+            <p:ph type="sldNum" sz="quarter" idx="4294967295"/>
+          </p:nvPr>
+        </p:nvSpPr>
+        <p:spPr>
+          <a:xfrm>
+            <a:off x="11247120" y="6400800"/>
+            <a:ext cx="502920" cy="274320"/>
+          </a:xfrm>
+          <a:prstGeom prst="rect">
+            <a:avLst/>
+          </a:prstGeom>
+          <a:extLst>
+            <a:ext uri="{C572A759-6A51-4108-AA02-DFA0A04FC94B}">
+              <ma14:wrappingTextBoxFlag xmlns:ma14="http://schemas.microsoft.com/office/mac/drawingml/2011/main" val="0"/>
+            </a:ext>
+          </a:extLst>
+        </p:spPr>
+        <p:txBody>
+          <a:bodyPr/>
+          <a:lstStyle>
+            <a:lvl1pPr>
+              <a:defRPr sz="1000">
+                <a:solidFill>
+                  <a:schemeClr val="accent6"/>
+                </a:solidFill>
+              </a:defRPr>
+            </a:lvl1pPr>
+          </a:lstStyle>
+          <a:p>
+            <a:pPr algn="r"/>
+            <a:fld id="{F7021451-1387-4CA6-816F-3879F97B5CBC}" type="slidenum">
+              <a:rPr b="0" lang="en-US"/>
+              <a:t>7</a:t>
+            </a:fld>
+            <a:endParaRPr lang="en-US"/>
           </a:p>
         </p:txBody>
       </p:sp>
@@ -7312,7 +10059,7 @@
                   <a:schemeClr val="tx1"/>
                 </a:solidFill>
               </a:rPr>
-              <a:t>Araucaria en arco</a:t>
+              <a:t>P espiral</a:t>
             </a:r>
             <a:endParaRPr lang="en-US" sz="3000" dirty="0"/>
           </a:p>
@@ -7350,7 +10097,7 @@
                   <a:schemeClr val="accent6"/>
                 </a:solidFill>
               </a:rPr>
-              <a:t>SELLOS Y CONTENEDORES · A3</a:t>
+              <a:t>LA P · N1</a:t>
             </a:r>
             <a:endParaRPr lang="en-US" sz="1200" dirty="0"/>
           </a:p>
@@ -7358,18 +10105,59 @@
       </p:sp>
       <p:sp>
         <p:nvSpPr>
-          <p:cNvPr id="4" name="Panel negativo"/>
-          <p:cNvSpPr/>
-          <p:nvPr/>
-        </p:nvSpPr>
-        <p:spPr>
-          <a:xfrm>
-            <a:off x="457200" y="1600200"/>
-            <a:ext cx="5532120" cy="4572000"/>
+          <p:cNvPr id="4" name="Text 0"/>
+          <p:cNvSpPr/>
+          <p:nvPr>
+            <p:ph idx="102" type="body" hasCustomPrompt="1"/>
+          </p:nvPr>
+        </p:nvSpPr>
+        <p:spPr>
+          <a:xfrm>
+            <a:off x="457200" y="1417320"/>
+            <a:ext cx="11247120" cy="777240"/>
+          </a:xfrm>
+          <a:prstGeom prst="rect">
+            <a:avLst/>
+          </a:prstGeom>
+          <a:noFill/>
+          <a:ln/>
+        </p:spPr>
+        <p:txBody>
+          <a:bodyPr wrap="square" lIns="0" tIns="0" rIns="0" bIns="0" rtlCol="0" anchor="t"/>
+          <a:lstStyle/>
+          <a:p>
+            <a:pPr indent="0" marL="0">
+              <a:lnSpc>
+                <a:spcPct val="115000"/>
+              </a:lnSpc>
+              <a:buNone/>
+            </a:pPr>
+            <a:r>
+              <a:rPr lang="en-US" sz="1500" dirty="0">
+                <a:solidFill>
+                  <a:schemeClr val="tx1"/>
+                </a:solidFill>
+              </a:rPr>
+              <a:t>El pliego se enrolla como una bobina y baja para formar la P. Habla del producto, el papel en movimiento, con un único trazo continuo, simple y memorable.</a:t>
+            </a:r>
+            <a:endParaRPr lang="en-US" sz="1500" dirty="0"/>
+          </a:p>
+        </p:txBody>
+      </p:sp>
+      <p:sp>
+        <p:nvSpPr>
+          <p:cNvPr id="5" name="Panel negativo"/>
+          <p:cNvSpPr/>
+          <p:nvPr/>
+        </p:nvSpPr>
+        <p:spPr>
+          <a:xfrm>
+            <a:off x="457200" y="2331720"/>
+            <a:ext cx="5532120" cy="3840480"/>
           </a:xfrm>
           <a:prstGeom prst="roundRect">
             <a:avLst>
-              <a:gd name="adj" fmla="val 3600"/>
+              <a:gd name="adj" fmla="val 4286"/>
             </a:avLst>
           </a:prstGeom>
           <a:solidFill>
@@ -7385,7 +10173,7 @@
       </p:sp>
       <p:pic>
         <p:nvPicPr>
-          <p:cNvPr id="5" name="Logo negativo" descr="Araucaria en arco · negativo">    </p:cNvPr>
+          <p:cNvPr id="6" name="Logo negativo" descr="P espiral · negativo">    </p:cNvPr>
           <p:cNvPicPr>
             <a:picLocks noChangeAspect="1"/>
           </p:cNvPicPr>
@@ -7399,8 +10187,8 @@
         </p:blipFill>
         <p:spPr>
           <a:xfrm>
-            <a:off x="1165860" y="3041021"/>
-            <a:ext cx="4114800" cy="1507478"/>
+            <a:off x="1348740" y="3473780"/>
+            <a:ext cx="3749040" cy="1373480"/>
           </a:xfrm>
           <a:prstGeom prst="rect">
             <a:avLst/>
@@ -7409,7 +10197,7 @@
       </p:pic>
       <p:sp>
         <p:nvSpPr>
-          <p:cNvPr id="6" name="Rótulo"/>
+          <p:cNvPr id="7" name="Rótulo"/>
           <p:cNvSpPr txBox="1"/>
           <p:nvPr/>
         </p:nvSpPr>
@@ -7445,18 +10233,18 @@
       </p:sp>
       <p:sp>
         <p:nvSpPr>
-          <p:cNvPr id="7" name="Panel una tinta sobre kraft"/>
-          <p:cNvSpPr/>
-          <p:nvPr/>
-        </p:nvSpPr>
-        <p:spPr>
-          <a:xfrm>
-            <a:off x="6199632" y="1600200"/>
-            <a:ext cx="5532120" cy="4572000"/>
+          <p:cNvPr id="8" name="Panel una tinta sobre kraft"/>
+          <p:cNvSpPr/>
+          <p:nvPr/>
+        </p:nvSpPr>
+        <p:spPr>
+          <a:xfrm>
+            <a:off x="6199632" y="2331720"/>
+            <a:ext cx="5532120" cy="3840480"/>
           </a:xfrm>
           <a:prstGeom prst="roundRect">
             <a:avLst>
-              <a:gd name="adj" fmla="val 3600"/>
+              <a:gd name="adj" fmla="val 4286"/>
             </a:avLst>
           </a:prstGeom>
           <a:solidFill>
@@ -7472,7 +10260,7 @@
       </p:sp>
       <p:pic>
         <p:nvPicPr>
-          <p:cNvPr id="8" name="Logo una tinta sobre kraft" descr="Araucaria en arco · una tinta sobre kraft">    </p:cNvPr>
+          <p:cNvPr id="9" name="Logo una tinta sobre kraft" descr="P espiral · una tinta sobre kraft">    </p:cNvPr>
           <p:cNvPicPr>
             <a:picLocks noChangeAspect="1"/>
           </p:cNvPicPr>
@@ -7486,8 +10274,8 @@
         </p:blipFill>
         <p:spPr>
           <a:xfrm>
-            <a:off x="6908292" y="3041021"/>
-            <a:ext cx="4114800" cy="1507478"/>
+            <a:off x="7091172" y="3473780"/>
+            <a:ext cx="3749040" cy="1373480"/>
           </a:xfrm>
           <a:prstGeom prst="rect">
             <a:avLst/>
@@ -7496,7 +10284,7 @@
       </p:pic>
       <p:sp>
         <p:nvSpPr>
-          <p:cNvPr id="9" name="Rótulo"/>
+          <p:cNvPr id="10" name="Rótulo"/>
           <p:cNvSpPr txBox="1"/>
           <p:nvPr/>
         </p:nvSpPr>
@@ -7632,7 +10420,7 @@
                   <a:schemeClr val="tx1"/>
                 </a:solidFill>
               </a:rPr>
-              <a:t>Araucaria en sello</a:t>
+              <a:t>P de anillos</a:t>
             </a:r>
             <a:endParaRPr lang="en-US" sz="3000" dirty="0"/>
           </a:p>
@@ -7670,7 +10458,7 @@
                   <a:schemeClr val="accent6"/>
                 </a:solidFill>
               </a:rPr>
-              <a:t>SELLOS Y CONTENEDORES · A5</a:t>
+              <a:t>LA P · N3</a:t>
             </a:r>
             <a:endParaRPr lang="en-US" sz="1200" dirty="0"/>
           </a:p>
@@ -7678,18 +10466,59 @@
       </p:sp>
       <p:sp>
         <p:nvSpPr>
-          <p:cNvPr id="4" name="Panel negativo"/>
-          <p:cNvSpPr/>
-          <p:nvPr/>
-        </p:nvSpPr>
-        <p:spPr>
-          <a:xfrm>
-            <a:off x="457200" y="1600200"/>
-            <a:ext cx="5532120" cy="4572000"/>
+          <p:cNvPr id="4" name="Text 0"/>
+          <p:cNvSpPr/>
+          <p:nvPr>
+            <p:ph idx="102" type="body" hasCustomPrompt="1"/>
+          </p:nvPr>
+        </p:nvSpPr>
+        <p:spPr>
+          <a:xfrm>
+            <a:off x="457200" y="1417320"/>
+            <a:ext cx="11247120" cy="777240"/>
+          </a:xfrm>
+          <a:prstGeom prst="rect">
+            <a:avLst/>
+          </a:prstGeom>
+          <a:noFill/>
+          <a:ln/>
+        </p:spPr>
+        <p:txBody>
+          <a:bodyPr wrap="square" lIns="0" tIns="0" rIns="0" bIns="0" rtlCol="0" anchor="t"/>
+          <a:lstStyle/>
+          <a:p>
+            <a:pPr indent="0" marL="0">
+              <a:lnSpc>
+                <a:spcPct val="115000"/>
+              </a:lnSpc>
+              <a:buNone/>
+            </a:pPr>
+            <a:r>
+              <a:rPr lang="en-US" sz="1500" dirty="0">
+                <a:solidFill>
+                  <a:schemeClr val="tx1"/>
+                </a:solidFill>
+              </a:rPr>
+              <a:t>El ojo de la P es un corte de tronco: los anillos de crecimiento cuentan tiempo, madera y origen. Une la inicial con la materia prima.</a:t>
+            </a:r>
+            <a:endParaRPr lang="en-US" sz="1500" dirty="0"/>
+          </a:p>
+        </p:txBody>
+      </p:sp>
+      <p:sp>
+        <p:nvSpPr>
+          <p:cNvPr id="5" name="Panel negativo"/>
+          <p:cNvSpPr/>
+          <p:nvPr/>
+        </p:nvSpPr>
+        <p:spPr>
+          <a:xfrm>
+            <a:off x="457200" y="2331720"/>
+            <a:ext cx="5532120" cy="3840480"/>
           </a:xfrm>
           <a:prstGeom prst="roundRect">
             <a:avLst>
-              <a:gd name="adj" fmla="val 3600"/>
+              <a:gd name="adj" fmla="val 4286"/>
             </a:avLst>
           </a:prstGeom>
           <a:solidFill>
@@ -7705,7 +10534,7 @@
       </p:sp>
       <p:pic>
         <p:nvPicPr>
-          <p:cNvPr id="5" name="Logo negativo" descr="Araucaria en sello · negativo">    </p:cNvPr>
+          <p:cNvPr id="6" name="Logo negativo" descr="P de anillos · negativo">    </p:cNvPr>
           <p:cNvPicPr>
             <a:picLocks noChangeAspect="1"/>
           </p:cNvPicPr>
@@ -7719,8 +10548,8 @@
         </p:blipFill>
         <p:spPr>
           <a:xfrm>
-            <a:off x="1165860" y="3041021"/>
-            <a:ext cx="4114800" cy="1507478"/>
+            <a:off x="1348740" y="3473780"/>
+            <a:ext cx="3749040" cy="1373480"/>
           </a:xfrm>
           <a:prstGeom prst="rect">
             <a:avLst/>
@@ -7729,7 +10558,7 @@
       </p:pic>
       <p:sp>
         <p:nvSpPr>
-          <p:cNvPr id="6" name="Rótulo"/>
+          <p:cNvPr id="7" name="Rótulo"/>
           <p:cNvSpPr txBox="1"/>
           <p:nvPr/>
         </p:nvSpPr>
@@ -7765,18 +10594,18 @@
       </p:sp>
       <p:sp>
         <p:nvSpPr>
-          <p:cNvPr id="7" name="Panel una tinta sobre kraft"/>
-          <p:cNvSpPr/>
-          <p:nvPr/>
-        </p:nvSpPr>
-        <p:spPr>
-          <a:xfrm>
-            <a:off x="6199632" y="1600200"/>
-            <a:ext cx="5532120" cy="4572000"/>
+          <p:cNvPr id="8" name="Panel una tinta sobre kraft"/>
+          <p:cNvSpPr/>
+          <p:nvPr/>
+        </p:nvSpPr>
+        <p:spPr>
+          <a:xfrm>
+            <a:off x="6199632" y="2331720"/>
+            <a:ext cx="5532120" cy="3840480"/>
           </a:xfrm>
           <a:prstGeom prst="roundRect">
             <a:avLst>
-              <a:gd name="adj" fmla="val 3600"/>
+              <a:gd name="adj" fmla="val 4286"/>
             </a:avLst>
           </a:prstGeom>
           <a:solidFill>
@@ -7792,7 +10621,7 @@
       </p:sp>
       <p:pic>
         <p:nvPicPr>
-          <p:cNvPr id="8" name="Logo una tinta sobre kraft" descr="Araucaria en sello · una tinta sobre kraft">    </p:cNvPr>
+          <p:cNvPr id="9" name="Logo una tinta sobre kraft" descr="P de anillos · una tinta sobre kraft">    </p:cNvPr>
           <p:cNvPicPr>
             <a:picLocks noChangeAspect="1"/>
           </p:cNvPicPr>
@@ -7806,8 +10635,8 @@
         </p:blipFill>
         <p:spPr>
           <a:xfrm>
-            <a:off x="6908292" y="3041021"/>
-            <a:ext cx="4114800" cy="1507478"/>
+            <a:off x="7091172" y="3473780"/>
+            <a:ext cx="3749040" cy="1373480"/>
           </a:xfrm>
           <a:prstGeom prst="rect">
             <a:avLst/>
@@ -7816,7 +10645,7 @@
       </p:pic>
       <p:sp>
         <p:nvSpPr>
-          <p:cNvPr id="9" name="Rótulo"/>
+          <p:cNvPr id="10" name="Rótulo"/>
           <p:cNvSpPr txBox="1"/>
           <p:nvPr/>
         </p:nvSpPr>

--- a/papel-misionero/marcas-finalistas.pptx
+++ b/papel-misionero/marcas-finalistas.pptx
@@ -26,9 +26,12 @@
     <p:sldId id="274" r:id="rId20"/>
     <p:sldId id="275" r:id="rId21"/>
     <p:sldId id="276" r:id="rId22"/>
+    <p:sldId id="277" r:id="rId23"/>
+    <p:sldId id="278" r:id="rId24"/>
+    <p:sldId id="279" r:id="rId25"/>
   </p:sldIdLst>
   <p:notesMasterIdLst>
-    <p:notesMasterId r:id="rId23"/>
+    <p:notesMasterId r:id="rId26"/>
   </p:notesMasterIdLst>
   <p:sldSz cx="12192000" cy="6858000"/>
   <p:notesSz cx="6858000" cy="12192000"/>
@@ -127,19 +130,19 @@
   <p:extLst>
     <p:ext uri="{521415D9-36F7-43E2-AB2F-B90AF26B5E84}">
       <p14:sectionLst xmlns:p14="http://schemas.microsoft.com/office/powerpoint/2010/main">
-        <p14:section name="Portada" id="{6e48cb91-f32d-3918-b54c-7c712739917f}">
+        <p14:section name="Portada" id="{ee9fdf11-12b6-5cd7-80da-b125bfada7dc}">
           <p14:sldIdLst>
             <p14:sldId id="256"/>
           </p14:sldIdLst>
         </p14:section>
-        <p14:section name="Benchmark" id="{f1e0886a-009c-8f7d-d204-0093a61b66ac}">
+        <p14:section name="Benchmark" id="{227b8bb6-4aab-7a76-6c70-05a20218d4fc}">
           <p14:sldIdLst>
             <p14:sldId id="257"/>
             <p14:sldId id="258"/>
             <p14:sldId id="259"/>
           </p14:sldIdLst>
         </p14:section>
-        <p14:section name="La P" id="{bf965b05-fd78-98e7-4974-47772c8d1466}">
+        <p14:section name="La P" id="{7ba5f088-28af-7cec-3f59-d189f22c7999}">
           <p14:sldIdLst>
             <p14:sldId id="260"/>
             <p14:sldId id="261"/>
@@ -148,7 +151,7 @@
             <p14:sldId id="264"/>
           </p14:sldIdLst>
         </p14:section>
-        <p14:section name="Sellos y contenedores" id="{d5c36879-0084-dcd1-f01d-f31d1d863340}">
+        <p14:section name="Sellos y contenedores" id="{9f737b1c-962f-8b1f-274b-6e66baebe353}">
           <p14:sldIdLst>
             <p14:sldId id="265"/>
             <p14:sldId id="266"/>
@@ -158,7 +161,7 @@
             <p14:sldId id="270"/>
           </p14:sldIdLst>
         </p14:section>
-        <p14:section name="Árbol solo" id="{67668bb5-d2be-53e7-b8ef-eb3cb6e6c991}">
+        <p14:section name="Árbol solo" id="{9b4072e4-3814-f0d6-d2b0-fc2b652eebed}">
           <p14:sldIdLst>
             <p14:sldId id="271"/>
             <p14:sldId id="272"/>
@@ -166,6 +169,13 @@
             <p14:sldId id="274"/>
             <p14:sldId id="275"/>
             <p14:sldId id="276"/>
+          </p14:sldIdLst>
+        </p14:section>
+        <p14:section name="Sistema" id="{5a554a84-bc48-efde-070d-d88b1805e952}">
+          <p14:sldIdLst>
+            <p14:sldId id="277"/>
+            <p14:sldId id="278"/>
+            <p14:sldId id="279"/>
           </p14:sldIdLst>
         </p14:section>
       </p14:sectionLst>
@@ -1740,6 +1750,270 @@
             <a:fld id="{F7021451-1387-4CA6-816F-3879F97B5CBC}" type="slidenum">
               <a:rPr lang="en-US"/>
               <a:t>21</a:t>
+            </a:fld>
+            <a:endParaRPr lang="en-US"/>
+          </a:p>
+        </p:txBody>
+      </p:sp>
+    </p:spTree>
+    <p:extLst>
+      <p:ext uri="{BB962C8B-B14F-4D97-AF65-F5344CB8AC3E}">
+        <p14:creationId xmlns:p14="http://schemas.microsoft.com/office/powerpoint/2010/main" val="1024086991"/>
+      </p:ext>
+    </p:extLst>
+  </p:cSld>
+  <p:clrMapOvr>
+    <a:masterClrMapping/>
+  </p:clrMapOvr>
+</p:notes>
+</file>
+
+<file path=ppt/notesSlides/notesSlide22.xml><?xml version="1.0" encoding="utf-8"?>
+<p:notes xmlns:a="http://schemas.openxmlformats.org/drawingml/2006/main" xmlns:r="http://schemas.openxmlformats.org/officeDocument/2006/relationships" xmlns:p="http://schemas.openxmlformats.org/presentationml/2006/main">
+  <p:cSld>
+    <p:spTree>
+      <p:nvGrpSpPr>
+        <p:cNvPr id="1" name=""/>
+        <p:cNvGrpSpPr/>
+        <p:nvPr/>
+      </p:nvGrpSpPr>
+      <p:grpSpPr>
+        <a:xfrm>
+          <a:off x="0" y="0"/>
+          <a:ext cx="0" cy="0"/>
+          <a:chOff x="0" y="0"/>
+          <a:chExt cx="0" cy="0"/>
+        </a:xfrm>
+      </p:grpSpPr>
+      <p:sp>
+        <p:nvSpPr>
+          <p:cNvPr id="2" name="Slide Image Placeholder 1"/>
+          <p:cNvSpPr>
+            <a:spLocks noGrp="1" noRot="1" noChangeAspect="1"/>
+          </p:cNvSpPr>
+          <p:nvPr>
+            <p:ph type="sldImg"/>
+          </p:nvPr>
+        </p:nvSpPr>
+        <p:spPr/>
+      </p:sp>
+      <p:sp>
+        <p:nvSpPr>
+          <p:cNvPr id="3" name="Notes Placeholder 2"/>
+          <p:cNvSpPr>
+            <a:spLocks noGrp="1"/>
+          </p:cNvSpPr>
+          <p:nvPr>
+            <p:ph type="body" idx="1"/>
+          </p:nvPr>
+        </p:nvSpPr>
+        <p:spPr/>
+        <p:txBody>
+          <a:bodyPr/>
+          <a:lstStyle/>
+          <a:p>
+            <a:r>
+              <a:rPr lang="en-US" dirty="0"/>
+              <a:t/>
+            </a:r>
+            <a:endParaRPr lang="en-US" dirty="0"/>
+          </a:p>
+        </p:txBody>
+      </p:sp>
+      <p:sp>
+        <p:nvSpPr>
+          <p:cNvPr id="4" name="Slide Number Placeholder 3"/>
+          <p:cNvSpPr>
+            <a:spLocks noGrp="1"/>
+          </p:cNvSpPr>
+          <p:nvPr>
+            <p:ph type="sldNum" sz="quarter" idx="10"/>
+          </p:nvPr>
+        </p:nvSpPr>
+        <p:spPr/>
+        <p:txBody>
+          <a:bodyPr/>
+          <a:lstStyle/>
+          <a:p>
+            <a:fld id="{F7021451-1387-4CA6-816F-3879F97B5CBC}" type="slidenum">
+              <a:rPr lang="en-US"/>
+              <a:t>22</a:t>
+            </a:fld>
+            <a:endParaRPr lang="en-US"/>
+          </a:p>
+        </p:txBody>
+      </p:sp>
+    </p:spTree>
+    <p:extLst>
+      <p:ext uri="{BB962C8B-B14F-4D97-AF65-F5344CB8AC3E}">
+        <p14:creationId xmlns:p14="http://schemas.microsoft.com/office/powerpoint/2010/main" val="1024086991"/>
+      </p:ext>
+    </p:extLst>
+  </p:cSld>
+  <p:clrMapOvr>
+    <a:masterClrMapping/>
+  </p:clrMapOvr>
+</p:notes>
+</file>
+
+<file path=ppt/notesSlides/notesSlide23.xml><?xml version="1.0" encoding="utf-8"?>
+<p:notes xmlns:a="http://schemas.openxmlformats.org/drawingml/2006/main" xmlns:r="http://schemas.openxmlformats.org/officeDocument/2006/relationships" xmlns:p="http://schemas.openxmlformats.org/presentationml/2006/main">
+  <p:cSld>
+    <p:spTree>
+      <p:nvGrpSpPr>
+        <p:cNvPr id="1" name=""/>
+        <p:cNvGrpSpPr/>
+        <p:nvPr/>
+      </p:nvGrpSpPr>
+      <p:grpSpPr>
+        <a:xfrm>
+          <a:off x="0" y="0"/>
+          <a:ext cx="0" cy="0"/>
+          <a:chOff x="0" y="0"/>
+          <a:chExt cx="0" cy="0"/>
+        </a:xfrm>
+      </p:grpSpPr>
+      <p:sp>
+        <p:nvSpPr>
+          <p:cNvPr id="2" name="Slide Image Placeholder 1"/>
+          <p:cNvSpPr>
+            <a:spLocks noGrp="1" noRot="1" noChangeAspect="1"/>
+          </p:cNvSpPr>
+          <p:nvPr>
+            <p:ph type="sldImg"/>
+          </p:nvPr>
+        </p:nvSpPr>
+        <p:spPr/>
+      </p:sp>
+      <p:sp>
+        <p:nvSpPr>
+          <p:cNvPr id="3" name="Notes Placeholder 2"/>
+          <p:cNvSpPr>
+            <a:spLocks noGrp="1"/>
+          </p:cNvSpPr>
+          <p:nvPr>
+            <p:ph type="body" idx="1"/>
+          </p:nvPr>
+        </p:nvSpPr>
+        <p:spPr/>
+        <p:txBody>
+          <a:bodyPr/>
+          <a:lstStyle/>
+          <a:p>
+            <a:r>
+              <a:rPr lang="en-US" dirty="0"/>
+              <a:t/>
+            </a:r>
+            <a:endParaRPr lang="en-US" dirty="0"/>
+          </a:p>
+        </p:txBody>
+      </p:sp>
+      <p:sp>
+        <p:nvSpPr>
+          <p:cNvPr id="4" name="Slide Number Placeholder 3"/>
+          <p:cNvSpPr>
+            <a:spLocks noGrp="1"/>
+          </p:cNvSpPr>
+          <p:nvPr>
+            <p:ph type="sldNum" sz="quarter" idx="10"/>
+          </p:nvPr>
+        </p:nvSpPr>
+        <p:spPr/>
+        <p:txBody>
+          <a:bodyPr/>
+          <a:lstStyle/>
+          <a:p>
+            <a:fld id="{F7021451-1387-4CA6-816F-3879F97B5CBC}" type="slidenum">
+              <a:rPr lang="en-US"/>
+              <a:t>23</a:t>
+            </a:fld>
+            <a:endParaRPr lang="en-US"/>
+          </a:p>
+        </p:txBody>
+      </p:sp>
+    </p:spTree>
+    <p:extLst>
+      <p:ext uri="{BB962C8B-B14F-4D97-AF65-F5344CB8AC3E}">
+        <p14:creationId xmlns:p14="http://schemas.microsoft.com/office/powerpoint/2010/main" val="1024086991"/>
+      </p:ext>
+    </p:extLst>
+  </p:cSld>
+  <p:clrMapOvr>
+    <a:masterClrMapping/>
+  </p:clrMapOvr>
+</p:notes>
+</file>
+
+<file path=ppt/notesSlides/notesSlide24.xml><?xml version="1.0" encoding="utf-8"?>
+<p:notes xmlns:a="http://schemas.openxmlformats.org/drawingml/2006/main" xmlns:r="http://schemas.openxmlformats.org/officeDocument/2006/relationships" xmlns:p="http://schemas.openxmlformats.org/presentationml/2006/main">
+  <p:cSld>
+    <p:spTree>
+      <p:nvGrpSpPr>
+        <p:cNvPr id="1" name=""/>
+        <p:cNvGrpSpPr/>
+        <p:nvPr/>
+      </p:nvGrpSpPr>
+      <p:grpSpPr>
+        <a:xfrm>
+          <a:off x="0" y="0"/>
+          <a:ext cx="0" cy="0"/>
+          <a:chOff x="0" y="0"/>
+          <a:chExt cx="0" cy="0"/>
+        </a:xfrm>
+      </p:grpSpPr>
+      <p:sp>
+        <p:nvSpPr>
+          <p:cNvPr id="2" name="Slide Image Placeholder 1"/>
+          <p:cNvSpPr>
+            <a:spLocks noGrp="1" noRot="1" noChangeAspect="1"/>
+          </p:cNvSpPr>
+          <p:nvPr>
+            <p:ph type="sldImg"/>
+          </p:nvPr>
+        </p:nvSpPr>
+        <p:spPr/>
+      </p:sp>
+      <p:sp>
+        <p:nvSpPr>
+          <p:cNvPr id="3" name="Notes Placeholder 2"/>
+          <p:cNvSpPr>
+            <a:spLocks noGrp="1"/>
+          </p:cNvSpPr>
+          <p:nvPr>
+            <p:ph type="body" idx="1"/>
+          </p:nvPr>
+        </p:nvSpPr>
+        <p:spPr/>
+        <p:txBody>
+          <a:bodyPr/>
+          <a:lstStyle/>
+          <a:p>
+            <a:r>
+              <a:rPr lang="en-US" dirty="0"/>
+              <a:t/>
+            </a:r>
+            <a:endParaRPr lang="en-US" dirty="0"/>
+          </a:p>
+        </p:txBody>
+      </p:sp>
+      <p:sp>
+        <p:nvSpPr>
+          <p:cNvPr id="4" name="Slide Number Placeholder 3"/>
+          <p:cNvSpPr>
+            <a:spLocks noGrp="1"/>
+          </p:cNvSpPr>
+          <p:nvPr>
+            <p:ph type="sldNum" sz="quarter" idx="10"/>
+          </p:nvPr>
+        </p:nvSpPr>
+        <p:spPr/>
+        <p:txBody>
+          <a:bodyPr/>
+          <a:lstStyle/>
+          <a:p>
+            <a:fld id="{F7021451-1387-4CA6-816F-3879F97B5CBC}" type="slidenum">
+              <a:rPr lang="en-US"/>
+              <a:t>24</a:t>
             </a:fld>
             <a:endParaRPr lang="en-US"/>
           </a:p>
@@ -3650,8 +3924,8 @@
         </p:blipFill>
         <p:spPr>
           <a:xfrm>
-            <a:off x="1348740" y="3473780"/>
-            <a:ext cx="3749040" cy="1373480"/>
+            <a:off x="1348740" y="3488846"/>
+            <a:ext cx="3749040" cy="1343349"/>
           </a:xfrm>
           <a:prstGeom prst="rect">
             <a:avLst/>
@@ -3737,8 +4011,8 @@
         </p:blipFill>
         <p:spPr>
           <a:xfrm>
-            <a:off x="7091172" y="3473780"/>
-            <a:ext cx="3749040" cy="1373480"/>
+            <a:off x="7091172" y="3488846"/>
+            <a:ext cx="3749040" cy="1343349"/>
           </a:xfrm>
           <a:prstGeom prst="rect">
             <a:avLst/>
@@ -4011,8 +4285,8 @@
         </p:blipFill>
         <p:spPr>
           <a:xfrm>
-            <a:off x="1348740" y="3473780"/>
-            <a:ext cx="3749040" cy="1373480"/>
+            <a:off x="1348740" y="3488846"/>
+            <a:ext cx="3749040" cy="1343349"/>
           </a:xfrm>
           <a:prstGeom prst="rect">
             <a:avLst/>
@@ -4098,8 +4372,8 @@
         </p:blipFill>
         <p:spPr>
           <a:xfrm>
-            <a:off x="7091172" y="3473780"/>
-            <a:ext cx="3749040" cy="1373480"/>
+            <a:off x="7091172" y="3488846"/>
+            <a:ext cx="3749040" cy="1343349"/>
           </a:xfrm>
           <a:prstGeom prst="rect">
             <a:avLst/>
@@ -4372,8 +4646,8 @@
         </p:blipFill>
         <p:spPr>
           <a:xfrm>
-            <a:off x="1348740" y="3473780"/>
-            <a:ext cx="3749040" cy="1373480"/>
+            <a:off x="1348740" y="3488846"/>
+            <a:ext cx="3749040" cy="1343349"/>
           </a:xfrm>
           <a:prstGeom prst="rect">
             <a:avLst/>
@@ -4459,8 +4733,8 @@
         </p:blipFill>
         <p:spPr>
           <a:xfrm>
-            <a:off x="7091172" y="3473780"/>
-            <a:ext cx="3749040" cy="1373480"/>
+            <a:off x="7091172" y="3488846"/>
+            <a:ext cx="3749040" cy="1343349"/>
           </a:xfrm>
           <a:prstGeom prst="rect">
             <a:avLst/>
@@ -4733,8 +5007,8 @@
         </p:blipFill>
         <p:spPr>
           <a:xfrm>
-            <a:off x="1348740" y="3473780"/>
-            <a:ext cx="3749040" cy="1373480"/>
+            <a:off x="1348740" y="3488846"/>
+            <a:ext cx="3749040" cy="1343349"/>
           </a:xfrm>
           <a:prstGeom prst="rect">
             <a:avLst/>
@@ -4820,8 +5094,8 @@
         </p:blipFill>
         <p:spPr>
           <a:xfrm>
-            <a:off x="7091172" y="3473780"/>
-            <a:ext cx="3749040" cy="1373480"/>
+            <a:off x="7091172" y="3488846"/>
+            <a:ext cx="3749040" cy="1343349"/>
           </a:xfrm>
           <a:prstGeom prst="rect">
             <a:avLst/>
@@ -5094,8 +5368,8 @@
         </p:blipFill>
         <p:spPr>
           <a:xfrm>
-            <a:off x="1348740" y="3473780"/>
-            <a:ext cx="3749040" cy="1373480"/>
+            <a:off x="1348740" y="3488846"/>
+            <a:ext cx="3749040" cy="1343349"/>
           </a:xfrm>
           <a:prstGeom prst="rect">
             <a:avLst/>
@@ -5181,8 +5455,8 @@
         </p:blipFill>
         <p:spPr>
           <a:xfrm>
-            <a:off x="7091172" y="3473780"/>
-            <a:ext cx="3749040" cy="1373480"/>
+            <a:off x="7091172" y="3488846"/>
+            <a:ext cx="3749040" cy="1343349"/>
           </a:xfrm>
           <a:prstGeom prst="rect">
             <a:avLst/>
@@ -5597,8 +5871,8 @@
         </p:blipFill>
         <p:spPr>
           <a:xfrm>
-            <a:off x="1348740" y="3473780"/>
-            <a:ext cx="3749040" cy="1373480"/>
+            <a:off x="1348740" y="3488846"/>
+            <a:ext cx="3749040" cy="1343349"/>
           </a:xfrm>
           <a:prstGeom prst="rect">
             <a:avLst/>
@@ -5684,8 +5958,8 @@
         </p:blipFill>
         <p:spPr>
           <a:xfrm>
-            <a:off x="7091172" y="3473780"/>
-            <a:ext cx="3749040" cy="1373480"/>
+            <a:off x="7091172" y="3488846"/>
+            <a:ext cx="3749040" cy="1343349"/>
           </a:xfrm>
           <a:prstGeom prst="rect">
             <a:avLst/>
@@ -5958,8 +6232,8 @@
         </p:blipFill>
         <p:spPr>
           <a:xfrm>
-            <a:off x="1348740" y="3473780"/>
-            <a:ext cx="3749040" cy="1373480"/>
+            <a:off x="1348740" y="3488846"/>
+            <a:ext cx="3749040" cy="1343349"/>
           </a:xfrm>
           <a:prstGeom prst="rect">
             <a:avLst/>
@@ -6045,8 +6319,8 @@
         </p:blipFill>
         <p:spPr>
           <a:xfrm>
-            <a:off x="7091172" y="3473780"/>
-            <a:ext cx="3749040" cy="1373480"/>
+            <a:off x="7091172" y="3488846"/>
+            <a:ext cx="3749040" cy="1343349"/>
           </a:xfrm>
           <a:prstGeom prst="rect">
             <a:avLst/>
@@ -6319,8 +6593,8 @@
         </p:blipFill>
         <p:spPr>
           <a:xfrm>
-            <a:off x="1348740" y="3473780"/>
-            <a:ext cx="3749040" cy="1373480"/>
+            <a:off x="1348740" y="3488846"/>
+            <a:ext cx="3749040" cy="1343349"/>
           </a:xfrm>
           <a:prstGeom prst="rect">
             <a:avLst/>
@@ -6406,8 +6680,8 @@
         </p:blipFill>
         <p:spPr>
           <a:xfrm>
-            <a:off x="7091172" y="3473780"/>
-            <a:ext cx="3749040" cy="1373480"/>
+            <a:off x="7091172" y="3488846"/>
+            <a:ext cx="3749040" cy="1343349"/>
           </a:xfrm>
           <a:prstGeom prst="rect">
             <a:avLst/>
@@ -6822,8 +7096,8 @@
         </p:blipFill>
         <p:spPr>
           <a:xfrm>
-            <a:off x="1348740" y="3473780"/>
-            <a:ext cx="3749040" cy="1373480"/>
+            <a:off x="1348740" y="3488846"/>
+            <a:ext cx="3749040" cy="1343349"/>
           </a:xfrm>
           <a:prstGeom prst="rect">
             <a:avLst/>
@@ -6909,8 +7183,8 @@
         </p:blipFill>
         <p:spPr>
           <a:xfrm>
-            <a:off x="7091172" y="3473780"/>
-            <a:ext cx="3749040" cy="1373480"/>
+            <a:off x="7091172" y="3488846"/>
+            <a:ext cx="3749040" cy="1343349"/>
           </a:xfrm>
           <a:prstGeom prst="rect">
             <a:avLst/>
@@ -7183,8 +7457,8 @@
         </p:blipFill>
         <p:spPr>
           <a:xfrm>
-            <a:off x="1348740" y="3473780"/>
-            <a:ext cx="3749040" cy="1373480"/>
+            <a:off x="1348740" y="3488846"/>
+            <a:ext cx="3749040" cy="1343349"/>
           </a:xfrm>
           <a:prstGeom prst="rect">
             <a:avLst/>
@@ -7270,8 +7544,8 @@
         </p:blipFill>
         <p:spPr>
           <a:xfrm>
-            <a:off x="7091172" y="3473780"/>
-            <a:ext cx="3749040" cy="1373480"/>
+            <a:off x="7091172" y="3488846"/>
+            <a:ext cx="3749040" cy="1343349"/>
           </a:xfrm>
           <a:prstGeom prst="rect">
             <a:avLst/>
@@ -7354,6 +7628,1668 @@
             <a:fld id="{F7021451-1387-4CA6-816F-3879F97B5CBC}" type="slidenum">
               <a:rPr b="0" lang="en-US"/>
               <a:t>21</a:t>
+            </a:fld>
+            <a:endParaRPr lang="en-US"/>
+          </a:p>
+        </p:txBody>
+      </p:sp>
+    </p:spTree>
+  </p:cSld>
+  <p:clrMapOvr>
+    <a:masterClrMapping/>
+  </p:clrMapOvr>
+</p:sld>
+</file>
+
+<file path=ppt/slides/slide22.xml><?xml version="1.0" encoding="utf-8"?>
+<p:sld xmlns:a="http://schemas.openxmlformats.org/drawingml/2006/main" xmlns:r="http://schemas.openxmlformats.org/officeDocument/2006/relationships" xmlns:p="http://schemas.openxmlformats.org/presentationml/2006/main">
+  <p:cSld name="Slide 22">
+    <p:spTree>
+      <p:nvGrpSpPr>
+        <p:cNvPr id="1" name=""/>
+        <p:cNvGrpSpPr/>
+        <p:nvPr/>
+      </p:nvGrpSpPr>
+      <p:grpSpPr>
+        <a:xfrm>
+          <a:off x="0" y="0"/>
+          <a:ext cx="0" cy="0"/>
+          <a:chOff x="0" y="0"/>
+          <a:chExt cx="0" cy="0"/>
+        </a:xfrm>
+      </p:grpSpPr>
+      <p:sp>
+        <p:nvSpPr>
+          <p:cNvPr id="2" name="Text 0"/>
+          <p:cNvSpPr/>
+          <p:nvPr>
+            <p:ph idx="100" type="body" hasCustomPrompt="1"/>
+          </p:nvPr>
+        </p:nvSpPr>
+        <p:spPr>
+          <a:xfrm>
+            <a:off x="731520" y="2011680"/>
+            <a:ext cx="5486400" cy="457200"/>
+          </a:xfrm>
+          <a:prstGeom prst="rect">
+            <a:avLst/>
+          </a:prstGeom>
+          <a:noFill/>
+          <a:ln/>
+        </p:spPr>
+        <p:txBody>
+          <a:bodyPr wrap="square" lIns="0" tIns="0" rIns="0" bIns="0" rtlCol="0"/>
+          <a:lstStyle/>
+          <a:p>
+            <a:pPr indent="0" marL="0">
+              <a:buNone/>
+            </a:pPr>
+            <a:r>
+              <a:rPr lang="en-US" sz="1400" spc="400" kern="0" dirty="0">
+                <a:solidFill>
+                  <a:schemeClr val="accent1"/>
+                </a:solidFill>
+              </a:rPr>
+              <a:t>COMÚN A TODAS LAS MARCAS</a:t>
+            </a:r>
+            <a:endParaRPr lang="en-US" sz="1400" dirty="0"/>
+          </a:p>
+        </p:txBody>
+      </p:sp>
+      <p:sp>
+        <p:nvSpPr>
+          <p:cNvPr id="3" name="Text 0"/>
+          <p:cNvSpPr/>
+          <p:nvPr>
+            <p:ph idx="101" type="title" hasCustomPrompt="1"/>
+          </p:nvPr>
+        </p:nvSpPr>
+        <p:spPr>
+          <a:xfrm>
+            <a:off x="731520" y="2560320"/>
+            <a:ext cx="10698480" cy="1280160"/>
+          </a:xfrm>
+          <a:prstGeom prst="rect">
+            <a:avLst/>
+          </a:prstGeom>
+          <a:noFill/>
+          <a:ln/>
+        </p:spPr>
+        <p:txBody>
+          <a:bodyPr wrap="square" lIns="0" tIns="0" rIns="0" bIns="0" rtlCol="0" anchor="t"/>
+          <a:lstStyle/>
+          <a:p>
+            <a:pPr algn="l" indent="0" marL="0">
+              <a:buNone/>
+            </a:pPr>
+            <a:r>
+              <a:rPr lang="en-US" sz="5400" b="1" dirty="0">
+                <a:solidFill>
+                  <a:schemeClr val="bg2"/>
+                </a:solidFill>
+              </a:rPr>
+              <a:t>Sistema de identidad</a:t>
+            </a:r>
+            <a:endParaRPr lang="en-US" sz="5400" dirty="0"/>
+          </a:p>
+        </p:txBody>
+      </p:sp>
+      <p:sp>
+        <p:nvSpPr>
+          <p:cNvPr id="4" name="Text 0"/>
+          <p:cNvSpPr/>
+          <p:nvPr>
+            <p:ph idx="102" type="body" hasCustomPrompt="1"/>
+          </p:nvPr>
+        </p:nvSpPr>
+        <p:spPr>
+          <a:xfrm>
+            <a:off x="731520" y="3931920"/>
+            <a:ext cx="8778240" cy="1645920"/>
+          </a:xfrm>
+          <a:prstGeom prst="rect">
+            <a:avLst/>
+          </a:prstGeom>
+          <a:noFill/>
+          <a:ln/>
+        </p:spPr>
+        <p:txBody>
+          <a:bodyPr wrap="square" lIns="0" tIns="0" rIns="0" bIns="0" rtlCol="0" anchor="t"/>
+          <a:lstStyle/>
+          <a:p>
+            <a:pPr indent="0" marL="0">
+              <a:lnSpc>
+                <a:spcPct val="120000"/>
+              </a:lnSpc>
+              <a:buNone/>
+            </a:pPr>
+            <a:r>
+              <a:rPr lang="en-US" sz="1800" dirty="0">
+                <a:solidFill>
+                  <a:schemeClr val="accent5"/>
+                </a:solidFill>
+              </a:rPr>
+              <a:t>Una paleta nacida del paisaje misionero, una tipografía en dos niveles y reglas pensadas para imprimir a una tinta sobre kraft.</a:t>
+            </a:r>
+            <a:endParaRPr lang="en-US" sz="1800" dirty="0"/>
+          </a:p>
+        </p:txBody>
+      </p:sp>
+    </p:spTree>
+  </p:cSld>
+  <p:clrMapOvr>
+    <a:masterClrMapping/>
+  </p:clrMapOvr>
+</p:sld>
+</file>
+
+<file path=ppt/slides/slide23.xml><?xml version="1.0" encoding="utf-8"?>
+<p:sld xmlns:a="http://schemas.openxmlformats.org/drawingml/2006/main" xmlns:r="http://schemas.openxmlformats.org/officeDocument/2006/relationships" xmlns:p="http://schemas.openxmlformats.org/presentationml/2006/main">
+  <p:cSld name="Slide 23">
+    <p:spTree>
+      <p:nvGrpSpPr>
+        <p:cNvPr id="1" name=""/>
+        <p:cNvGrpSpPr/>
+        <p:nvPr/>
+      </p:nvGrpSpPr>
+      <p:grpSpPr>
+        <a:xfrm>
+          <a:off x="0" y="0"/>
+          <a:ext cx="0" cy="0"/>
+          <a:chOff x="0" y="0"/>
+          <a:chExt cx="0" cy="0"/>
+        </a:xfrm>
+      </p:grpSpPr>
+      <p:sp>
+        <p:nvSpPr>
+          <p:cNvPr id="2" name="Text 0"/>
+          <p:cNvSpPr/>
+          <p:nvPr>
+            <p:ph idx="100" type="title" hasCustomPrompt="1"/>
+          </p:nvPr>
+        </p:nvSpPr>
+        <p:spPr>
+          <a:xfrm>
+            <a:off x="457200" y="365760"/>
+            <a:ext cx="8686800" cy="685800"/>
+          </a:xfrm>
+          <a:prstGeom prst="rect">
+            <a:avLst/>
+          </a:prstGeom>
+          <a:noFill/>
+          <a:ln/>
+        </p:spPr>
+        <p:txBody>
+          <a:bodyPr wrap="square" lIns="0" tIns="0" rIns="0" bIns="0" rtlCol="0" anchor="ctr"/>
+          <a:lstStyle/>
+          <a:p>
+            <a:pPr algn="l" indent="0" marL="0">
+              <a:buNone/>
+            </a:pPr>
+            <a:r>
+              <a:rPr lang="en-US" sz="3000" b="1" dirty="0">
+                <a:solidFill>
+                  <a:schemeClr val="tx1"/>
+                </a:solidFill>
+              </a:rPr>
+              <a:t>Paleta, tipografía y reglas</a:t>
+            </a:r>
+            <a:endParaRPr lang="en-US" sz="3000" dirty="0"/>
+          </a:p>
+        </p:txBody>
+      </p:sp>
+      <p:sp>
+        <p:nvSpPr>
+          <p:cNvPr id="3" name="Text 0"/>
+          <p:cNvSpPr/>
+          <p:nvPr>
+            <p:ph idx="101" type="body" hasCustomPrompt="1"/>
+          </p:nvPr>
+        </p:nvSpPr>
+        <p:spPr>
+          <a:xfrm>
+            <a:off x="457200" y="1005840"/>
+            <a:ext cx="8686800" cy="365760"/>
+          </a:xfrm>
+          <a:prstGeom prst="rect">
+            <a:avLst/>
+          </a:prstGeom>
+          <a:noFill/>
+          <a:ln/>
+        </p:spPr>
+        <p:txBody>
+          <a:bodyPr wrap="square" lIns="0" tIns="0" rIns="0" bIns="0" rtlCol="0" anchor="t"/>
+          <a:lstStyle/>
+          <a:p>
+            <a:pPr indent="0" marL="0">
+              <a:buNone/>
+            </a:pPr>
+            <a:r>
+              <a:rPr lang="en-US" sz="1200" spc="300" kern="0" dirty="0">
+                <a:solidFill>
+                  <a:schemeClr val="accent6"/>
+                </a:solidFill>
+              </a:rPr>
+              <a:t>SISTEMA · COMÚN A TODAS LAS MARCAS FINALISTAS</a:t>
+            </a:r>
+            <a:endParaRPr lang="en-US" sz="1200" dirty="0"/>
+          </a:p>
+        </p:txBody>
+      </p:sp>
+      <p:sp>
+        <p:nvSpPr>
+          <p:cNvPr id="4" name="Color Verde selva"/>
+          <p:cNvSpPr/>
+          <p:nvPr/>
+        </p:nvSpPr>
+        <p:spPr>
+          <a:xfrm>
+            <a:off x="457200" y="1600200"/>
+            <a:ext cx="2103120" cy="2103120"/>
+          </a:xfrm>
+          <a:prstGeom prst="roundRect">
+            <a:avLst>
+              <a:gd name="adj" fmla="val 5217"/>
+            </a:avLst>
+          </a:prstGeom>
+          <a:solidFill>
+            <a:schemeClr val="tx1"/>
+          </a:solidFill>
+          <a:ln w="12700">
+            <a:solidFill>
+              <a:schemeClr val="tx1"/>
+            </a:solidFill>
+            <a:prstDash val="solid"/>
+          </a:ln>
+        </p:spPr>
+      </p:sp>
+      <p:sp>
+        <p:nvSpPr>
+          <p:cNvPr id="5" name="Dato Verde selva"/>
+          <p:cNvSpPr txBox="1"/>
+          <p:nvPr/>
+        </p:nvSpPr>
+        <p:spPr>
+          <a:xfrm>
+            <a:off x="640080" y="2880360"/>
+            <a:ext cx="1783080" cy="685800"/>
+          </a:xfrm>
+          <a:prstGeom prst="rect">
+            <a:avLst/>
+          </a:prstGeom>
+          <a:noFill/>
+          <a:ln/>
+        </p:spPr>
+        <p:txBody>
+          <a:bodyPr wrap="square" lIns="0" tIns="0" rIns="0" bIns="0" rtlCol="0" anchor="b"/>
+          <a:lstStyle/>
+          <a:p>
+            <a:pPr indent="0" marL="0">
+              <a:buNone/>
+            </a:pPr>
+            <a:r>
+              <a:rPr lang="en-US" sz="1600" b="1" dirty="0">
+                <a:solidFill>
+                  <a:schemeClr val="bg2"/>
+                </a:solidFill>
+              </a:rPr>
+              <a:t>Verde selva</a:t>
+            </a:r>
+            <a:endParaRPr lang="en-US" sz="1600" dirty="0"/>
+          </a:p>
+          <a:p>
+            <a:pPr indent="0" marL="0">
+              <a:buNone/>
+            </a:pPr>
+            <a:r>
+              <a:rPr lang="en-US" sz="1200" dirty="0">
+                <a:solidFill>
+                  <a:schemeClr val="bg2"/>
+                </a:solidFill>
+              </a:rPr>
+              <a:t>#1F3A2B · tinta principal</a:t>
+            </a:r>
+            <a:endParaRPr lang="en-US" sz="1600" dirty="0"/>
+          </a:p>
+        </p:txBody>
+      </p:sp>
+      <p:sp>
+        <p:nvSpPr>
+          <p:cNvPr id="6" name="Color Kraft"/>
+          <p:cNvSpPr/>
+          <p:nvPr/>
+        </p:nvSpPr>
+        <p:spPr>
+          <a:xfrm>
+            <a:off x="2743200" y="1600200"/>
+            <a:ext cx="2103120" cy="2103120"/>
+          </a:xfrm>
+          <a:prstGeom prst="roundRect">
+            <a:avLst>
+              <a:gd name="adj" fmla="val 5217"/>
+            </a:avLst>
+          </a:prstGeom>
+          <a:solidFill>
+            <a:schemeClr val="accent1"/>
+          </a:solidFill>
+          <a:ln w="12700">
+            <a:solidFill>
+              <a:schemeClr val="accent1"/>
+            </a:solidFill>
+            <a:prstDash val="solid"/>
+          </a:ln>
+        </p:spPr>
+      </p:sp>
+      <p:sp>
+        <p:nvSpPr>
+          <p:cNvPr id="7" name="Dato Kraft"/>
+          <p:cNvSpPr txBox="1"/>
+          <p:nvPr/>
+        </p:nvSpPr>
+        <p:spPr>
+          <a:xfrm>
+            <a:off x="2926080" y="2880360"/>
+            <a:ext cx="1783080" cy="685800"/>
+          </a:xfrm>
+          <a:prstGeom prst="rect">
+            <a:avLst/>
+          </a:prstGeom>
+          <a:noFill/>
+          <a:ln/>
+        </p:spPr>
+        <p:txBody>
+          <a:bodyPr wrap="square" lIns="0" tIns="0" rIns="0" bIns="0" rtlCol="0" anchor="b"/>
+          <a:lstStyle/>
+          <a:p>
+            <a:pPr indent="0" marL="0">
+              <a:buNone/>
+            </a:pPr>
+            <a:r>
+              <a:rPr lang="en-US" sz="1600" b="1" dirty="0">
+                <a:solidFill>
+                  <a:schemeClr val="tx1"/>
+                </a:solidFill>
+              </a:rPr>
+              <a:t>Kraft</a:t>
+            </a:r>
+            <a:endParaRPr lang="en-US" sz="1600" dirty="0"/>
+          </a:p>
+          <a:p>
+            <a:pPr indent="0" marL="0">
+              <a:buNone/>
+            </a:pPr>
+            <a:r>
+              <a:rPr lang="en-US" sz="1200" dirty="0">
+                <a:solidFill>
+                  <a:schemeClr val="tx1"/>
+                </a:solidFill>
+              </a:rPr>
+              <a:t>#B98A57 · soporte y acento</a:t>
+            </a:r>
+            <a:endParaRPr lang="en-US" sz="1600" dirty="0"/>
+          </a:p>
+        </p:txBody>
+      </p:sp>
+      <p:sp>
+        <p:nvSpPr>
+          <p:cNvPr id="8" name="Color Kraft oscuro"/>
+          <p:cNvSpPr/>
+          <p:nvPr/>
+        </p:nvSpPr>
+        <p:spPr>
+          <a:xfrm>
+            <a:off x="5029200" y="1600200"/>
+            <a:ext cx="2103120" cy="2103120"/>
+          </a:xfrm>
+          <a:prstGeom prst="roundRect">
+            <a:avLst>
+              <a:gd name="adj" fmla="val 5217"/>
+            </a:avLst>
+          </a:prstGeom>
+          <a:solidFill>
+            <a:schemeClr val="accent3"/>
+          </a:solidFill>
+          <a:ln w="12700">
+            <a:solidFill>
+              <a:schemeClr val="accent3"/>
+            </a:solidFill>
+            <a:prstDash val="solid"/>
+          </a:ln>
+        </p:spPr>
+      </p:sp>
+      <p:sp>
+        <p:nvSpPr>
+          <p:cNvPr id="9" name="Dato Kraft oscuro"/>
+          <p:cNvSpPr txBox="1"/>
+          <p:nvPr/>
+        </p:nvSpPr>
+        <p:spPr>
+          <a:xfrm>
+            <a:off x="5212080" y="2880360"/>
+            <a:ext cx="1783080" cy="685800"/>
+          </a:xfrm>
+          <a:prstGeom prst="rect">
+            <a:avLst/>
+          </a:prstGeom>
+          <a:noFill/>
+          <a:ln/>
+        </p:spPr>
+        <p:txBody>
+          <a:bodyPr wrap="square" lIns="0" tIns="0" rIns="0" bIns="0" rtlCol="0" anchor="b"/>
+          <a:lstStyle/>
+          <a:p>
+            <a:pPr indent="0" marL="0">
+              <a:buNone/>
+            </a:pPr>
+            <a:r>
+              <a:rPr lang="en-US" sz="1600" b="1" dirty="0">
+                <a:solidFill>
+                  <a:schemeClr val="bg2"/>
+                </a:solidFill>
+              </a:rPr>
+              <a:t>Kraft oscuro</a:t>
+            </a:r>
+            <a:endParaRPr lang="en-US" sz="1600" dirty="0"/>
+          </a:p>
+          <a:p>
+            <a:pPr indent="0" marL="0">
+              <a:buNone/>
+            </a:pPr>
+            <a:r>
+              <a:rPr lang="en-US" sz="1200" dirty="0">
+                <a:solidFill>
+                  <a:schemeClr val="bg2"/>
+                </a:solidFill>
+              </a:rPr>
+              <a:t>#8E6538</a:t>
+            </a:r>
+            <a:endParaRPr lang="en-US" sz="1600" dirty="0"/>
+          </a:p>
+        </p:txBody>
+      </p:sp>
+      <p:sp>
+        <p:nvSpPr>
+          <p:cNvPr id="10" name="Color Tierra colorada"/>
+          <p:cNvSpPr/>
+          <p:nvPr/>
+        </p:nvSpPr>
+        <p:spPr>
+          <a:xfrm>
+            <a:off x="7315200" y="1600200"/>
+            <a:ext cx="2103120" cy="2103120"/>
+          </a:xfrm>
+          <a:prstGeom prst="roundRect">
+            <a:avLst>
+              <a:gd name="adj" fmla="val 5217"/>
+            </a:avLst>
+          </a:prstGeom>
+          <a:solidFill>
+            <a:schemeClr val="accent2"/>
+          </a:solidFill>
+          <a:ln w="12700">
+            <a:solidFill>
+              <a:schemeClr val="accent2"/>
+            </a:solidFill>
+            <a:prstDash val="solid"/>
+          </a:ln>
+        </p:spPr>
+      </p:sp>
+      <p:sp>
+        <p:nvSpPr>
+          <p:cNvPr id="11" name="Dato Tierra colorada"/>
+          <p:cNvSpPr txBox="1"/>
+          <p:nvPr/>
+        </p:nvSpPr>
+        <p:spPr>
+          <a:xfrm>
+            <a:off x="7498080" y="2880360"/>
+            <a:ext cx="1783080" cy="685800"/>
+          </a:xfrm>
+          <a:prstGeom prst="rect">
+            <a:avLst/>
+          </a:prstGeom>
+          <a:noFill/>
+          <a:ln/>
+        </p:spPr>
+        <p:txBody>
+          <a:bodyPr wrap="square" lIns="0" tIns="0" rIns="0" bIns="0" rtlCol="0" anchor="b"/>
+          <a:lstStyle/>
+          <a:p>
+            <a:pPr indent="0" marL="0">
+              <a:buNone/>
+            </a:pPr>
+            <a:r>
+              <a:rPr lang="en-US" sz="1600" b="1" dirty="0">
+                <a:solidFill>
+                  <a:schemeClr val="bg2"/>
+                </a:solidFill>
+              </a:rPr>
+              <a:t>Tierra colorada</a:t>
+            </a:r>
+            <a:endParaRPr lang="en-US" sz="1600" dirty="0"/>
+          </a:p>
+          <a:p>
+            <a:pPr indent="0" marL="0">
+              <a:buNone/>
+            </a:pPr>
+            <a:r>
+              <a:rPr lang="en-US" sz="1200" dirty="0">
+                <a:solidFill>
+                  <a:schemeClr val="bg2"/>
+                </a:solidFill>
+              </a:rPr>
+              <a:t>#B0452B · acento</a:t>
+            </a:r>
+            <a:endParaRPr lang="en-US" sz="1600" dirty="0"/>
+          </a:p>
+        </p:txBody>
+      </p:sp>
+      <p:sp>
+        <p:nvSpPr>
+          <p:cNvPr id="12" name="Color Papel crudo"/>
+          <p:cNvSpPr/>
+          <p:nvPr/>
+        </p:nvSpPr>
+        <p:spPr>
+          <a:xfrm>
+            <a:off x="9601200" y="1600200"/>
+            <a:ext cx="2103120" cy="2103120"/>
+          </a:xfrm>
+          <a:prstGeom prst="roundRect">
+            <a:avLst>
+              <a:gd name="adj" fmla="val 5217"/>
+            </a:avLst>
+          </a:prstGeom>
+          <a:solidFill>
+            <a:schemeClr val="bg2"/>
+          </a:solidFill>
+          <a:ln w="12700">
+            <a:solidFill>
+              <a:schemeClr val="accent5"/>
+            </a:solidFill>
+            <a:prstDash val="solid"/>
+          </a:ln>
+        </p:spPr>
+      </p:sp>
+      <p:sp>
+        <p:nvSpPr>
+          <p:cNvPr id="13" name="Dato Papel crudo"/>
+          <p:cNvSpPr txBox="1"/>
+          <p:nvPr/>
+        </p:nvSpPr>
+        <p:spPr>
+          <a:xfrm>
+            <a:off x="9784080" y="2880360"/>
+            <a:ext cx="1783080" cy="685800"/>
+          </a:xfrm>
+          <a:prstGeom prst="rect">
+            <a:avLst/>
+          </a:prstGeom>
+          <a:noFill/>
+          <a:ln/>
+        </p:spPr>
+        <p:txBody>
+          <a:bodyPr wrap="square" lIns="0" tIns="0" rIns="0" bIns="0" rtlCol="0" anchor="b"/>
+          <a:lstStyle/>
+          <a:p>
+            <a:pPr indent="0" marL="0">
+              <a:buNone/>
+            </a:pPr>
+            <a:r>
+              <a:rPr lang="en-US" sz="1600" b="1" dirty="0">
+                <a:solidFill>
+                  <a:schemeClr val="tx1"/>
+                </a:solidFill>
+              </a:rPr>
+              <a:t>Papel crudo</a:t>
+            </a:r>
+            <a:endParaRPr lang="en-US" sz="1600" dirty="0"/>
+          </a:p>
+          <a:p>
+            <a:pPr indent="0" marL="0">
+              <a:buNone/>
+            </a:pPr>
+            <a:r>
+              <a:rPr lang="en-US" sz="1200" dirty="0">
+                <a:solidFill>
+                  <a:schemeClr val="tx1"/>
+                </a:solidFill>
+              </a:rPr>
+              <a:t>#F2EADB · fondo</a:t>
+            </a:r>
+            <a:endParaRPr lang="en-US" sz="1600" dirty="0"/>
+          </a:p>
+        </p:txBody>
+      </p:sp>
+      <p:sp>
+        <p:nvSpPr>
+          <p:cNvPr id="14" name="Tipografía"/>
+          <p:cNvSpPr/>
+          <p:nvPr/>
+        </p:nvSpPr>
+        <p:spPr>
+          <a:xfrm>
+            <a:off x="457200" y="3931920"/>
+            <a:ext cx="6400800" cy="2240280"/>
+          </a:xfrm>
+          <a:prstGeom prst="roundRect">
+            <a:avLst>
+              <a:gd name="adj" fmla="val 4898"/>
+            </a:avLst>
+          </a:prstGeom>
+          <a:solidFill>
+            <a:schemeClr val="bg1"/>
+          </a:solidFill>
+          <a:ln w="12700">
+            <a:solidFill>
+              <a:schemeClr val="bg1"/>
+            </a:solidFill>
+            <a:prstDash val="solid"/>
+          </a:ln>
+        </p:spPr>
+      </p:sp>
+      <p:sp>
+        <p:nvSpPr>
+          <p:cNvPr id="15" name="Muestra tipográfica"/>
+          <p:cNvSpPr txBox="1"/>
+          <p:nvPr/>
+        </p:nvSpPr>
+        <p:spPr>
+          <a:xfrm>
+            <a:off x="777240" y="4069080"/>
+            <a:ext cx="5852160" cy="1965960"/>
+          </a:xfrm>
+          <a:prstGeom prst="rect">
+            <a:avLst/>
+          </a:prstGeom>
+          <a:noFill/>
+          <a:ln/>
+        </p:spPr>
+        <p:txBody>
+          <a:bodyPr wrap="square" lIns="0" tIns="0" rIns="0" bIns="0" rtlCol="0" anchor="ctr"/>
+          <a:lstStyle/>
+          <a:p>
+            <a:pPr indent="0" marL="0">
+              <a:buNone/>
+            </a:pPr>
+            <a:r>
+              <a:rPr lang="en-US" sz="1600" spc="1000" kern="0" dirty="0">
+                <a:solidFill>
+                  <a:schemeClr val="tx1"/>
+                </a:solidFill>
+              </a:rPr>
+              <a:t>PAPEL</a:t>
+            </a:r>
+            <a:endParaRPr lang="en-US" sz="1600" dirty="0"/>
+          </a:p>
+          <a:p>
+            <a:pPr indent="0" marL="0">
+              <a:buNone/>
+            </a:pPr>
+            <a:r>
+              <a:rPr lang="en-US" sz="6600" b="1" spc="-200" kern="0" dirty="0">
+                <a:solidFill>
+                  <a:schemeClr val="tx1"/>
+                </a:solidFill>
+              </a:rPr>
+              <a:t>misionero</a:t>
+            </a:r>
+            <a:endParaRPr lang="en-US" sz="1600" dirty="0"/>
+          </a:p>
+          <a:p>
+            <a:pPr indent="0" marL="0">
+              <a:buNone/>
+            </a:pPr>
+            <a:r>
+              <a:rPr lang="en-US" sz="1200" dirty="0">
+                <a:solidFill>
+                  <a:schemeClr val="accent6"/>
+                </a:solidFill>
+              </a:rPr>
+              <a:t>Helvetica Regular espaciada + Helvetica Bold apretada. Dos niveles: el origen manda.</a:t>
+            </a:r>
+            <a:endParaRPr lang="en-US" sz="1600" dirty="0"/>
+          </a:p>
+        </p:txBody>
+      </p:sp>
+      <p:sp>
+        <p:nvSpPr>
+          <p:cNvPr id="16" name="Reglas"/>
+          <p:cNvSpPr/>
+          <p:nvPr/>
+        </p:nvSpPr>
+        <p:spPr>
+          <a:xfrm>
+            <a:off x="7040880" y="3931920"/>
+            <a:ext cx="4690872" cy="2240280"/>
+          </a:xfrm>
+          <a:prstGeom prst="roundRect">
+            <a:avLst>
+              <a:gd name="adj" fmla="val 4898"/>
+            </a:avLst>
+          </a:prstGeom>
+          <a:solidFill>
+            <a:schemeClr val="bg1"/>
+          </a:solidFill>
+          <a:ln w="12700">
+            <a:solidFill>
+              <a:schemeClr val="bg1"/>
+            </a:solidFill>
+            <a:prstDash val="solid"/>
+          </a:ln>
+        </p:spPr>
+      </p:sp>
+      <p:sp>
+        <p:nvSpPr>
+          <p:cNvPr id="17" name="Lista de reglas"/>
+          <p:cNvSpPr txBox="1"/>
+          <p:nvPr/>
+        </p:nvSpPr>
+        <p:spPr>
+          <a:xfrm>
+            <a:off x="7315200" y="4114800"/>
+            <a:ext cx="4206240" cy="1920240"/>
+          </a:xfrm>
+          <a:prstGeom prst="rect">
+            <a:avLst/>
+          </a:prstGeom>
+          <a:noFill/>
+          <a:ln/>
+        </p:spPr>
+        <p:txBody>
+          <a:bodyPr wrap="square" lIns="0" tIns="0" rIns="0" bIns="0" rtlCol="0" anchor="t"/>
+          <a:lstStyle/>
+          <a:p>
+            <a:pPr indent="0" marL="0">
+              <a:spcAft>
+                <a:spcPts val="400"/>
+              </a:spcAft>
+              <a:buNone/>
+            </a:pPr>
+            <a:r>
+              <a:rPr lang="en-US" sz="1600" b="1" dirty="0">
+                <a:solidFill>
+                  <a:schemeClr val="tx1"/>
+                </a:solidFill>
+              </a:rPr>
+              <a:t>Reglas</a:t>
+            </a:r>
+            <a:endParaRPr lang="en-US" sz="1600" dirty="0"/>
+          </a:p>
+          <a:p>
+            <a:pPr marL="342900" indent="-342900">
+              <a:spcAft>
+                <a:spcPts val="400"/>
+              </a:spcAft>
+              <a:buSzPct val="100000"/>
+              <a:buChar char="•"/>
+            </a:pPr>
+            <a:r>
+              <a:rPr lang="en-US" sz="1400" dirty="0">
+                <a:solidFill>
+                  <a:schemeClr val="tx1"/>
+                </a:solidFill>
+              </a:rPr>
+              <a:t>Una sola tinta: verde selva, o kraft y crudo en negativo.</a:t>
+            </a:r>
+            <a:endParaRPr lang="en-US" sz="1600" dirty="0"/>
+          </a:p>
+          <a:p>
+            <a:pPr marL="342900" indent="-342900">
+              <a:spcAft>
+                <a:spcPts val="400"/>
+              </a:spcAft>
+              <a:buSzPct val="100000"/>
+              <a:buChar char="•"/>
+            </a:pPr>
+            <a:r>
+              <a:rPr lang="en-US" sz="1400" dirty="0">
+                <a:solidFill>
+                  <a:schemeClr val="tx1"/>
+                </a:solidFill>
+              </a:rPr>
+              <a:t>Calado mínimo de 5 unidades para flexografía.</a:t>
+            </a:r>
+            <a:endParaRPr lang="en-US" sz="1600" dirty="0"/>
+          </a:p>
+          <a:p>
+            <a:pPr marL="342900" indent="-342900">
+              <a:spcAft>
+                <a:spcPts val="400"/>
+              </a:spcAft>
+              <a:buSzPct val="100000"/>
+              <a:buChar char="•"/>
+            </a:pPr>
+            <a:r>
+              <a:rPr lang="en-US" sz="1400" dirty="0">
+                <a:solidFill>
+                  <a:schemeClr val="tx1"/>
+                </a:solidFill>
+              </a:rPr>
+              <a:t>Isotipo a 1,3 veces la altura del bloque de texto.</a:t>
+            </a:r>
+            <a:endParaRPr lang="en-US" sz="1600" dirty="0"/>
+          </a:p>
+          <a:p>
+            <a:pPr marL="342900" indent="-342900">
+              <a:spcAft>
+                <a:spcPts val="400"/>
+              </a:spcAft>
+              <a:buSzPct val="100000"/>
+              <a:buChar char="•"/>
+            </a:pPr>
+            <a:r>
+              <a:rPr lang="en-US" sz="1400" dirty="0">
+                <a:solidFill>
+                  <a:schemeClr val="tx1"/>
+                </a:solidFill>
+              </a:rPr>
+              <a:t>Margen de respeto: la altura de «PAPEL» alrededor.</a:t>
+            </a:r>
+            <a:endParaRPr lang="en-US" sz="1600" dirty="0"/>
+          </a:p>
+          <a:p>
+            <a:pPr marL="342900" indent="-342900">
+              <a:spcAft>
+                <a:spcPts val="400"/>
+              </a:spcAft>
+              <a:buSzPct val="100000"/>
+              <a:buChar char="•"/>
+            </a:pPr>
+            <a:r>
+              <a:rPr lang="en-US" sz="1400" dirty="0">
+                <a:solidFill>
+                  <a:schemeClr val="tx1"/>
+                </a:solidFill>
+              </a:rPr>
+              <a:t>Tamaño mínimo del isotipo: 16 px / 6 mm.</a:t>
+            </a:r>
+            <a:endParaRPr lang="en-US" sz="1600" dirty="0"/>
+          </a:p>
+        </p:txBody>
+      </p:sp>
+      <p:sp>
+        <p:nvSpPr>
+          <p:cNvPr id="18" name="Text 0"/>
+          <p:cNvSpPr/>
+          <p:nvPr>
+            <p:ph idx="102" type="body" hasCustomPrompt="1"/>
+          </p:nvPr>
+        </p:nvSpPr>
+        <p:spPr>
+          <a:xfrm>
+            <a:off x="457200" y="1417320"/>
+            <a:ext cx="11247120" cy="777240"/>
+          </a:xfrm>
+          <a:prstGeom prst="rect">
+            <a:avLst/>
+          </a:prstGeom>
+          <a:noFill/>
+          <a:ln/>
+        </p:spPr>
+        <p:txBody>
+          <a:bodyPr wrap="square" lIns="0" tIns="0" rIns="0" bIns="0" rtlCol="0" anchor="t"/>
+          <a:lstStyle/>
+          <a:p>
+            <a:pPr indent="0" marL="0">
+              <a:lnSpc>
+                <a:spcPct val="115000"/>
+              </a:lnSpc>
+              <a:buNone/>
+            </a:pPr>
+            <a:endParaRPr lang="en-US" sz="1500" dirty="0"/>
+          </a:p>
+        </p:txBody>
+      </p:sp>
+      <p:sp>
+        <p:nvSpPr>
+          <p:cNvPr id="25" name="Slide Number Placeholder 0"/>
+          <p:cNvSpPr>
+            <a:spLocks noGrp="1"/>
+          </p:cNvSpPr>
+          <p:nvPr>
+            <p:ph type="sldNum" sz="quarter" idx="4294967295"/>
+          </p:nvPr>
+        </p:nvSpPr>
+        <p:spPr>
+          <a:xfrm>
+            <a:off x="11247120" y="6400800"/>
+            <a:ext cx="502920" cy="274320"/>
+          </a:xfrm>
+          <a:prstGeom prst="rect">
+            <a:avLst/>
+          </a:prstGeom>
+          <a:extLst>
+            <a:ext uri="{C572A759-6A51-4108-AA02-DFA0A04FC94B}">
+              <ma14:wrappingTextBoxFlag xmlns:ma14="http://schemas.microsoft.com/office/mac/drawingml/2011/main" val="0"/>
+            </a:ext>
+          </a:extLst>
+        </p:spPr>
+        <p:txBody>
+          <a:bodyPr/>
+          <a:lstStyle>
+            <a:lvl1pPr>
+              <a:defRPr sz="1000">
+                <a:solidFill>
+                  <a:schemeClr val="accent6"/>
+                </a:solidFill>
+              </a:defRPr>
+            </a:lvl1pPr>
+          </a:lstStyle>
+          <a:p>
+            <a:pPr algn="r"/>
+            <a:fld id="{F7021451-1387-4CA6-816F-3879F97B5CBC}" type="slidenum">
+              <a:rPr b="0" lang="en-US"/>
+              <a:t>23</a:t>
+            </a:fld>
+            <a:endParaRPr lang="en-US"/>
+          </a:p>
+        </p:txBody>
+      </p:sp>
+    </p:spTree>
+  </p:cSld>
+  <p:clrMapOvr>
+    <a:masterClrMapping/>
+  </p:clrMapOvr>
+</p:sld>
+</file>
+
+<file path=ppt/slides/slide24.xml><?xml version="1.0" encoding="utf-8"?>
+<p:sld xmlns:a="http://schemas.openxmlformats.org/drawingml/2006/main" xmlns:r="http://schemas.openxmlformats.org/officeDocument/2006/relationships" xmlns:p="http://schemas.openxmlformats.org/presentationml/2006/main">
+  <p:cSld name="Slide 24">
+    <p:spTree>
+      <p:nvGrpSpPr>
+        <p:cNvPr id="1" name=""/>
+        <p:cNvGrpSpPr/>
+        <p:nvPr/>
+      </p:nvGrpSpPr>
+      <p:grpSpPr>
+        <a:xfrm>
+          <a:off x="0" y="0"/>
+          <a:ext cx="0" cy="0"/>
+          <a:chOff x="0" y="0"/>
+          <a:chExt cx="0" cy="0"/>
+        </a:xfrm>
+      </p:grpSpPr>
+      <p:sp>
+        <p:nvSpPr>
+          <p:cNvPr id="2" name="Text 0"/>
+          <p:cNvSpPr/>
+          <p:nvPr>
+            <p:ph idx="100" type="title" hasCustomPrompt="1"/>
+          </p:nvPr>
+        </p:nvSpPr>
+        <p:spPr>
+          <a:xfrm>
+            <a:off x="457200" y="365760"/>
+            <a:ext cx="8686800" cy="685800"/>
+          </a:xfrm>
+          <a:prstGeom prst="rect">
+            <a:avLst/>
+          </a:prstGeom>
+          <a:noFill/>
+          <a:ln/>
+        </p:spPr>
+        <p:txBody>
+          <a:bodyPr wrap="square" lIns="0" tIns="0" rIns="0" bIns="0" rtlCol="0" anchor="ctr"/>
+          <a:lstStyle/>
+          <a:p>
+            <a:pPr algn="l" indent="0" marL="0">
+              <a:buNone/>
+            </a:pPr>
+            <a:r>
+              <a:rPr lang="en-US" sz="3000" b="1" dirty="0">
+                <a:solidFill>
+                  <a:schemeClr val="tx1"/>
+                </a:solidFill>
+              </a:rPr>
+              <a:t>Pruebas de color</a:t>
+            </a:r>
+            <a:endParaRPr lang="en-US" sz="3000" dirty="0"/>
+          </a:p>
+        </p:txBody>
+      </p:sp>
+      <p:sp>
+        <p:nvSpPr>
+          <p:cNvPr id="3" name="Text 0"/>
+          <p:cNvSpPr/>
+          <p:nvPr>
+            <p:ph idx="101" type="body" hasCustomPrompt="1"/>
+          </p:nvPr>
+        </p:nvSpPr>
+        <p:spPr>
+          <a:xfrm>
+            <a:off x="457200" y="1005840"/>
+            <a:ext cx="8686800" cy="365760"/>
+          </a:xfrm>
+          <a:prstGeom prst="rect">
+            <a:avLst/>
+          </a:prstGeom>
+          <a:noFill/>
+          <a:ln/>
+        </p:spPr>
+        <p:txBody>
+          <a:bodyPr wrap="square" lIns="0" tIns="0" rIns="0" bIns="0" rtlCol="0" anchor="t"/>
+          <a:lstStyle/>
+          <a:p>
+            <a:pPr indent="0" marL="0">
+              <a:buNone/>
+            </a:pPr>
+            <a:r>
+              <a:rPr lang="en-US" sz="1200" spc="300" kern="0" dirty="0">
+                <a:solidFill>
+                  <a:schemeClr val="accent6"/>
+                </a:solidFill>
+              </a:rPr>
+              <a:t>SISTEMA · ARAUCARIA DE RAMAS (A2)</a:t>
+            </a:r>
+            <a:endParaRPr lang="en-US" sz="1200" dirty="0"/>
+          </a:p>
+        </p:txBody>
+      </p:sp>
+      <p:sp>
+        <p:nvSpPr>
+          <p:cNvPr id="4" name="Text 0"/>
+          <p:cNvSpPr/>
+          <p:nvPr>
+            <p:ph idx="102" type="body" hasCustomPrompt="1"/>
+          </p:nvPr>
+        </p:nvSpPr>
+        <p:spPr>
+          <a:xfrm>
+            <a:off x="457200" y="1417320"/>
+            <a:ext cx="11247120" cy="777240"/>
+          </a:xfrm>
+          <a:prstGeom prst="rect">
+            <a:avLst/>
+          </a:prstGeom>
+          <a:noFill/>
+          <a:ln/>
+        </p:spPr>
+        <p:txBody>
+          <a:bodyPr wrap="square" lIns="0" tIns="0" rIns="0" bIns="0" rtlCol="0" anchor="t"/>
+          <a:lstStyle/>
+          <a:p>
+            <a:pPr indent="0" marL="0">
+              <a:lnSpc>
+                <a:spcPct val="115000"/>
+              </a:lnSpc>
+              <a:buNone/>
+            </a:pPr>
+            <a:r>
+              <a:rPr lang="en-US" sz="1500" dirty="0">
+                <a:solidFill>
+                  <a:schemeClr val="tx1"/>
+                </a:solidFill>
+              </a:rPr>
+              <a:t>La misma marca en las combinaciones de la paleta: todas funcionan a una o dos tintas y conservan el contraste.</a:t>
+            </a:r>
+            <a:endParaRPr lang="en-US" sz="1500" dirty="0"/>
+          </a:p>
+        </p:txBody>
+      </p:sp>
+      <p:sp>
+        <p:nvSpPr>
+          <p:cNvPr id="5" name="Prueba Verde selva · kraft y crudo"/>
+          <p:cNvSpPr/>
+          <p:nvPr/>
+        </p:nvSpPr>
+        <p:spPr>
+          <a:xfrm>
+            <a:off x="457200" y="2103120"/>
+            <a:ext cx="3611880" cy="1920240"/>
+          </a:xfrm>
+          <a:prstGeom prst="roundRect">
+            <a:avLst>
+              <a:gd name="adj" fmla="val 5714"/>
+            </a:avLst>
+          </a:prstGeom>
+          <a:solidFill>
+            <a:schemeClr val="tx1"/>
+          </a:solidFill>
+          <a:ln w="12700">
+            <a:solidFill>
+              <a:schemeClr val="tx1"/>
+            </a:solidFill>
+            <a:prstDash val="solid"/>
+          </a:ln>
+        </p:spPr>
+      </p:sp>
+      <p:pic>
+        <p:nvPicPr>
+          <p:cNvPr id="6" name="Logo Verde selva · kraft y crudo" descr="Araucaria de ramas · Verde selva · kraft y crudo">    </p:cNvPr>
+          <p:cNvPicPr>
+            <a:picLocks noChangeAspect="1"/>
+          </p:cNvPicPr>
+          <p:nvPr/>
+        </p:nvPicPr>
+        <p:blipFill>
+          <a:blip r:embed="rId1"/>
+          <a:stretch>
+            <a:fillRect/>
+          </a:stretch>
+        </p:blipFill>
+        <p:spPr>
+          <a:xfrm>
+            <a:off x="937260" y="2478425"/>
+            <a:ext cx="2651760" cy="950174"/>
+          </a:xfrm>
+          <a:prstGeom prst="rect">
+            <a:avLst/>
+          </a:prstGeom>
+        </p:spPr>
+      </p:pic>
+      <p:sp>
+        <p:nvSpPr>
+          <p:cNvPr id="7" name="Rótulo"/>
+          <p:cNvSpPr txBox="1"/>
+          <p:nvPr/>
+        </p:nvSpPr>
+        <p:spPr>
+          <a:xfrm>
+            <a:off x="640080" y="3675888"/>
+            <a:ext cx="3291840" cy="228600"/>
+          </a:xfrm>
+          <a:prstGeom prst="rect">
+            <a:avLst/>
+          </a:prstGeom>
+          <a:noFill/>
+          <a:ln/>
+        </p:spPr>
+        <p:txBody>
+          <a:bodyPr wrap="square" lIns="0" tIns="0" rIns="0" bIns="0" rtlCol="0" anchor="ctr"/>
+          <a:lstStyle/>
+          <a:p>
+            <a:pPr indent="0" marL="0">
+              <a:buNone/>
+            </a:pPr>
+            <a:r>
+              <a:rPr lang="en-US" sz="1000" spc="200" kern="0" dirty="0">
+                <a:solidFill>
+                  <a:schemeClr val="accent5"/>
+                </a:solidFill>
+              </a:rPr>
+              <a:t>VERDE SELVA · KRAFT Y CRUDO</a:t>
+            </a:r>
+            <a:endParaRPr lang="en-US" sz="1000" dirty="0"/>
+          </a:p>
+        </p:txBody>
+      </p:sp>
+      <p:sp>
+        <p:nvSpPr>
+          <p:cNvPr id="8" name="Prueba Kraft · verde selva"/>
+          <p:cNvSpPr/>
+          <p:nvPr/>
+        </p:nvSpPr>
+        <p:spPr>
+          <a:xfrm>
+            <a:off x="4251960" y="2103120"/>
+            <a:ext cx="3611880" cy="1920240"/>
+          </a:xfrm>
+          <a:prstGeom prst="roundRect">
+            <a:avLst>
+              <a:gd name="adj" fmla="val 5714"/>
+            </a:avLst>
+          </a:prstGeom>
+          <a:solidFill>
+            <a:schemeClr val="accent1"/>
+          </a:solidFill>
+          <a:ln w="12700">
+            <a:solidFill>
+              <a:schemeClr val="accent1"/>
+            </a:solidFill>
+            <a:prstDash val="solid"/>
+          </a:ln>
+        </p:spPr>
+      </p:sp>
+      <p:pic>
+        <p:nvPicPr>
+          <p:cNvPr id="9" name="Logo Kraft · verde selva" descr="Araucaria de ramas · Kraft · verde selva">    </p:cNvPr>
+          <p:cNvPicPr>
+            <a:picLocks noChangeAspect="1"/>
+          </p:cNvPicPr>
+          <p:nvPr/>
+        </p:nvPicPr>
+        <p:blipFill>
+          <a:blip r:embed="rId2"/>
+          <a:stretch>
+            <a:fillRect/>
+          </a:stretch>
+        </p:blipFill>
+        <p:spPr>
+          <a:xfrm>
+            <a:off x="4732020" y="2478425"/>
+            <a:ext cx="2651760" cy="950174"/>
+          </a:xfrm>
+          <a:prstGeom prst="rect">
+            <a:avLst/>
+          </a:prstGeom>
+        </p:spPr>
+      </p:pic>
+      <p:sp>
+        <p:nvSpPr>
+          <p:cNvPr id="10" name="Rótulo"/>
+          <p:cNvSpPr txBox="1"/>
+          <p:nvPr/>
+        </p:nvSpPr>
+        <p:spPr>
+          <a:xfrm>
+            <a:off x="4434840" y="3675888"/>
+            <a:ext cx="3291840" cy="228600"/>
+          </a:xfrm>
+          <a:prstGeom prst="rect">
+            <a:avLst/>
+          </a:prstGeom>
+          <a:noFill/>
+          <a:ln/>
+        </p:spPr>
+        <p:txBody>
+          <a:bodyPr wrap="square" lIns="0" tIns="0" rIns="0" bIns="0" rtlCol="0" anchor="ctr"/>
+          <a:lstStyle/>
+          <a:p>
+            <a:pPr indent="0" marL="0">
+              <a:buNone/>
+            </a:pPr>
+            <a:r>
+              <a:rPr lang="en-US" sz="1000" spc="200" kern="0" dirty="0">
+                <a:solidFill>
+                  <a:schemeClr val="tx2"/>
+                </a:solidFill>
+              </a:rPr>
+              <a:t>KRAFT · VERDE SELVA</a:t>
+            </a:r>
+            <a:endParaRPr lang="en-US" sz="1000" dirty="0"/>
+          </a:p>
+        </p:txBody>
+      </p:sp>
+      <p:sp>
+        <p:nvSpPr>
+          <p:cNvPr id="11" name="Prueba Papel crudo · verde selva"/>
+          <p:cNvSpPr/>
+          <p:nvPr/>
+        </p:nvSpPr>
+        <p:spPr>
+          <a:xfrm>
+            <a:off x="8046720" y="2103120"/>
+            <a:ext cx="3611880" cy="1920240"/>
+          </a:xfrm>
+          <a:prstGeom prst="roundRect">
+            <a:avLst>
+              <a:gd name="adj" fmla="val 5714"/>
+            </a:avLst>
+          </a:prstGeom>
+          <a:solidFill>
+            <a:schemeClr val="bg2"/>
+          </a:solidFill>
+          <a:ln w="12700">
+            <a:solidFill>
+              <a:schemeClr val="accent5"/>
+            </a:solidFill>
+            <a:prstDash val="solid"/>
+          </a:ln>
+        </p:spPr>
+      </p:sp>
+      <p:pic>
+        <p:nvPicPr>
+          <p:cNvPr id="12" name="Logo Papel crudo · verde selva" descr="Araucaria de ramas · Papel crudo · verde selva">    </p:cNvPr>
+          <p:cNvPicPr>
+            <a:picLocks noChangeAspect="1"/>
+          </p:cNvPicPr>
+          <p:nvPr/>
+        </p:nvPicPr>
+        <p:blipFill>
+          <a:blip r:embed="rId3"/>
+          <a:stretch>
+            <a:fillRect/>
+          </a:stretch>
+        </p:blipFill>
+        <p:spPr>
+          <a:xfrm>
+            <a:off x="8526780" y="2478425"/>
+            <a:ext cx="2651760" cy="950174"/>
+          </a:xfrm>
+          <a:prstGeom prst="rect">
+            <a:avLst/>
+          </a:prstGeom>
+        </p:spPr>
+      </p:pic>
+      <p:sp>
+        <p:nvSpPr>
+          <p:cNvPr id="13" name="Rótulo"/>
+          <p:cNvSpPr txBox="1"/>
+          <p:nvPr/>
+        </p:nvSpPr>
+        <p:spPr>
+          <a:xfrm>
+            <a:off x="8229600" y="3675888"/>
+            <a:ext cx="3291840" cy="228600"/>
+          </a:xfrm>
+          <a:prstGeom prst="rect">
+            <a:avLst/>
+          </a:prstGeom>
+          <a:noFill/>
+          <a:ln/>
+        </p:spPr>
+        <p:txBody>
+          <a:bodyPr wrap="square" lIns="0" tIns="0" rIns="0" bIns="0" rtlCol="0" anchor="ctr"/>
+          <a:lstStyle/>
+          <a:p>
+            <a:pPr indent="0" marL="0">
+              <a:buNone/>
+            </a:pPr>
+            <a:r>
+              <a:rPr lang="en-US" sz="1000" spc="200" kern="0" dirty="0">
+                <a:solidFill>
+                  <a:schemeClr val="accent6"/>
+                </a:solidFill>
+              </a:rPr>
+              <a:t>PAPEL CRUDO · VERDE SELVA</a:t>
+            </a:r>
+            <a:endParaRPr lang="en-US" sz="1000" dirty="0"/>
+          </a:p>
+        </p:txBody>
+      </p:sp>
+      <p:sp>
+        <p:nvSpPr>
+          <p:cNvPr id="14" name="Prueba Tierra colorada · crudo"/>
+          <p:cNvSpPr/>
+          <p:nvPr/>
+        </p:nvSpPr>
+        <p:spPr>
+          <a:xfrm>
+            <a:off x="457200" y="4206240"/>
+            <a:ext cx="3611880" cy="1920240"/>
+          </a:xfrm>
+          <a:prstGeom prst="roundRect">
+            <a:avLst>
+              <a:gd name="adj" fmla="val 5714"/>
+            </a:avLst>
+          </a:prstGeom>
+          <a:solidFill>
+            <a:schemeClr val="accent2"/>
+          </a:solidFill>
+          <a:ln w="12700">
+            <a:solidFill>
+              <a:schemeClr val="accent2"/>
+            </a:solidFill>
+            <a:prstDash val="solid"/>
+          </a:ln>
+        </p:spPr>
+      </p:sp>
+      <p:pic>
+        <p:nvPicPr>
+          <p:cNvPr id="15" name="Logo Tierra colorada · crudo" descr="Araucaria de ramas · Tierra colorada · crudo">    </p:cNvPr>
+          <p:cNvPicPr>
+            <a:picLocks noChangeAspect="1"/>
+          </p:cNvPicPr>
+          <p:nvPr/>
+        </p:nvPicPr>
+        <p:blipFill>
+          <a:blip r:embed="rId4"/>
+          <a:stretch>
+            <a:fillRect/>
+          </a:stretch>
+        </p:blipFill>
+        <p:spPr>
+          <a:xfrm>
+            <a:off x="937260" y="4581545"/>
+            <a:ext cx="2651760" cy="950174"/>
+          </a:xfrm>
+          <a:prstGeom prst="rect">
+            <a:avLst/>
+          </a:prstGeom>
+        </p:spPr>
+      </p:pic>
+      <p:sp>
+        <p:nvSpPr>
+          <p:cNvPr id="16" name="Rótulo"/>
+          <p:cNvSpPr txBox="1"/>
+          <p:nvPr/>
+        </p:nvSpPr>
+        <p:spPr>
+          <a:xfrm>
+            <a:off x="640080" y="5779008"/>
+            <a:ext cx="3291840" cy="228600"/>
+          </a:xfrm>
+          <a:prstGeom prst="rect">
+            <a:avLst/>
+          </a:prstGeom>
+          <a:noFill/>
+          <a:ln/>
+        </p:spPr>
+        <p:txBody>
+          <a:bodyPr wrap="square" lIns="0" tIns="0" rIns="0" bIns="0" rtlCol="0" anchor="ctr"/>
+          <a:lstStyle/>
+          <a:p>
+            <a:pPr indent="0" marL="0">
+              <a:buNone/>
+            </a:pPr>
+            <a:r>
+              <a:rPr lang="en-US" sz="1000" spc="200" kern="0" dirty="0">
+                <a:solidFill>
+                  <a:schemeClr val="bg2"/>
+                </a:solidFill>
+              </a:rPr>
+              <a:t>TIERRA COLORADA · CRUDO</a:t>
+            </a:r>
+            <a:endParaRPr lang="en-US" sz="1000" dirty="0"/>
+          </a:p>
+        </p:txBody>
+      </p:sp>
+      <p:sp>
+        <p:nvSpPr>
+          <p:cNvPr id="17" name="Prueba Kraft oscuro · crudo"/>
+          <p:cNvSpPr/>
+          <p:nvPr/>
+        </p:nvSpPr>
+        <p:spPr>
+          <a:xfrm>
+            <a:off x="4251960" y="4206240"/>
+            <a:ext cx="3611880" cy="1920240"/>
+          </a:xfrm>
+          <a:prstGeom prst="roundRect">
+            <a:avLst>
+              <a:gd name="adj" fmla="val 5714"/>
+            </a:avLst>
+          </a:prstGeom>
+          <a:solidFill>
+            <a:schemeClr val="accent3"/>
+          </a:solidFill>
+          <a:ln w="12700">
+            <a:solidFill>
+              <a:schemeClr val="accent3"/>
+            </a:solidFill>
+            <a:prstDash val="solid"/>
+          </a:ln>
+        </p:spPr>
+      </p:sp>
+      <p:pic>
+        <p:nvPicPr>
+          <p:cNvPr id="18" name="Logo Kraft oscuro · crudo" descr="Araucaria de ramas · Kraft oscuro · crudo">    </p:cNvPr>
+          <p:cNvPicPr>
+            <a:picLocks noChangeAspect="1"/>
+          </p:cNvPicPr>
+          <p:nvPr/>
+        </p:nvPicPr>
+        <p:blipFill>
+          <a:blip r:embed="rId5"/>
+          <a:stretch>
+            <a:fillRect/>
+          </a:stretch>
+        </p:blipFill>
+        <p:spPr>
+          <a:xfrm>
+            <a:off x="4732020" y="4581545"/>
+            <a:ext cx="2651760" cy="950174"/>
+          </a:xfrm>
+          <a:prstGeom prst="rect">
+            <a:avLst/>
+          </a:prstGeom>
+        </p:spPr>
+      </p:pic>
+      <p:sp>
+        <p:nvSpPr>
+          <p:cNvPr id="19" name="Rótulo"/>
+          <p:cNvSpPr txBox="1"/>
+          <p:nvPr/>
+        </p:nvSpPr>
+        <p:spPr>
+          <a:xfrm>
+            <a:off x="4434840" y="5779008"/>
+            <a:ext cx="3291840" cy="228600"/>
+          </a:xfrm>
+          <a:prstGeom prst="rect">
+            <a:avLst/>
+          </a:prstGeom>
+          <a:noFill/>
+          <a:ln/>
+        </p:spPr>
+        <p:txBody>
+          <a:bodyPr wrap="square" lIns="0" tIns="0" rIns="0" bIns="0" rtlCol="0" anchor="ctr"/>
+          <a:lstStyle/>
+          <a:p>
+            <a:pPr indent="0" marL="0">
+              <a:buNone/>
+            </a:pPr>
+            <a:r>
+              <a:rPr lang="en-US" sz="1000" spc="200" kern="0" dirty="0">
+                <a:solidFill>
+                  <a:schemeClr val="bg2"/>
+                </a:solidFill>
+              </a:rPr>
+              <a:t>KRAFT OSCURO · CRUDO</a:t>
+            </a:r>
+            <a:endParaRPr lang="en-US" sz="1000" dirty="0"/>
+          </a:p>
+        </p:txBody>
+      </p:sp>
+      <p:sp>
+        <p:nvSpPr>
+          <p:cNvPr id="20" name="Prueba Papel crudo · tierra y verde"/>
+          <p:cNvSpPr/>
+          <p:nvPr/>
+        </p:nvSpPr>
+        <p:spPr>
+          <a:xfrm>
+            <a:off x="8046720" y="4206240"/>
+            <a:ext cx="3611880" cy="1920240"/>
+          </a:xfrm>
+          <a:prstGeom prst="roundRect">
+            <a:avLst>
+              <a:gd name="adj" fmla="val 5714"/>
+            </a:avLst>
+          </a:prstGeom>
+          <a:solidFill>
+            <a:schemeClr val="bg2"/>
+          </a:solidFill>
+          <a:ln w="12700">
+            <a:solidFill>
+              <a:schemeClr val="accent5"/>
+            </a:solidFill>
+            <a:prstDash val="solid"/>
+          </a:ln>
+        </p:spPr>
+      </p:sp>
+      <p:pic>
+        <p:nvPicPr>
+          <p:cNvPr id="21" name="Logo Papel crudo · tierra y verde" descr="Araucaria de ramas · Papel crudo · tierra y verde">    </p:cNvPr>
+          <p:cNvPicPr>
+            <a:picLocks noChangeAspect="1"/>
+          </p:cNvPicPr>
+          <p:nvPr/>
+        </p:nvPicPr>
+        <p:blipFill>
+          <a:blip r:embed="rId6"/>
+          <a:stretch>
+            <a:fillRect/>
+          </a:stretch>
+        </p:blipFill>
+        <p:spPr>
+          <a:xfrm>
+            <a:off x="8526780" y="4581545"/>
+            <a:ext cx="2651760" cy="950174"/>
+          </a:xfrm>
+          <a:prstGeom prst="rect">
+            <a:avLst/>
+          </a:prstGeom>
+        </p:spPr>
+      </p:pic>
+      <p:sp>
+        <p:nvSpPr>
+          <p:cNvPr id="22" name="Rótulo"/>
+          <p:cNvSpPr txBox="1"/>
+          <p:nvPr/>
+        </p:nvSpPr>
+        <p:spPr>
+          <a:xfrm>
+            <a:off x="8229600" y="5779008"/>
+            <a:ext cx="3291840" cy="228600"/>
+          </a:xfrm>
+          <a:prstGeom prst="rect">
+            <a:avLst/>
+          </a:prstGeom>
+          <a:noFill/>
+          <a:ln/>
+        </p:spPr>
+        <p:txBody>
+          <a:bodyPr wrap="square" lIns="0" tIns="0" rIns="0" bIns="0" rtlCol="0" anchor="ctr"/>
+          <a:lstStyle/>
+          <a:p>
+            <a:pPr indent="0" marL="0">
+              <a:buNone/>
+            </a:pPr>
+            <a:r>
+              <a:rPr lang="en-US" sz="1000" spc="200" kern="0" dirty="0">
+                <a:solidFill>
+                  <a:schemeClr val="accent6"/>
+                </a:solidFill>
+              </a:rPr>
+              <a:t>PAPEL CRUDO · TIERRA Y VERDE</a:t>
+            </a:r>
+            <a:endParaRPr lang="en-US" sz="1000" dirty="0"/>
+          </a:p>
+        </p:txBody>
+      </p:sp>
+      <p:sp>
+        <p:nvSpPr>
+          <p:cNvPr id="25" name="Slide Number Placeholder 0"/>
+          <p:cNvSpPr>
+            <a:spLocks noGrp="1"/>
+          </p:cNvSpPr>
+          <p:nvPr>
+            <p:ph type="sldNum" sz="quarter" idx="4294967295"/>
+          </p:nvPr>
+        </p:nvSpPr>
+        <p:spPr>
+          <a:xfrm>
+            <a:off x="11247120" y="6400800"/>
+            <a:ext cx="502920" cy="274320"/>
+          </a:xfrm>
+          <a:prstGeom prst="rect">
+            <a:avLst/>
+          </a:prstGeom>
+          <a:extLst>
+            <a:ext uri="{C572A759-6A51-4108-AA02-DFA0A04FC94B}">
+              <ma14:wrappingTextBoxFlag xmlns:ma14="http://schemas.microsoft.com/office/mac/drawingml/2011/main" val="0"/>
+            </a:ext>
+          </a:extLst>
+        </p:spPr>
+        <p:txBody>
+          <a:bodyPr/>
+          <a:lstStyle>
+            <a:lvl1pPr>
+              <a:defRPr sz="1000">
+                <a:solidFill>
+                  <a:schemeClr val="accent6"/>
+                </a:solidFill>
+              </a:defRPr>
+            </a:lvl1pPr>
+          </a:lstStyle>
+          <a:p>
+            <a:pPr algn="r"/>
+            <a:fld id="{F7021451-1387-4CA6-816F-3879F97B5CBC}" type="slidenum">
+              <a:rPr b="0" lang="en-US"/>
+              <a:t>24</a:t>
             </a:fld>
             <a:endParaRPr lang="en-US"/>
           </a:p>
@@ -9465,8 +11401,8 @@
         </p:blipFill>
         <p:spPr>
           <a:xfrm>
-            <a:off x="1348740" y="3473780"/>
-            <a:ext cx="3749040" cy="1373480"/>
+            <a:off x="1348740" y="3488846"/>
+            <a:ext cx="3749040" cy="1343349"/>
           </a:xfrm>
           <a:prstGeom prst="rect">
             <a:avLst/>
@@ -9552,8 +11488,8 @@
         </p:blipFill>
         <p:spPr>
           <a:xfrm>
-            <a:off x="7091172" y="3473780"/>
-            <a:ext cx="3749040" cy="1373480"/>
+            <a:off x="7091172" y="3488846"/>
+            <a:ext cx="3749040" cy="1343349"/>
           </a:xfrm>
           <a:prstGeom prst="rect">
             <a:avLst/>
@@ -9826,8 +11762,8 @@
         </p:blipFill>
         <p:spPr>
           <a:xfrm>
-            <a:off x="1348740" y="3473780"/>
-            <a:ext cx="3749040" cy="1373480"/>
+            <a:off x="1348740" y="3488846"/>
+            <a:ext cx="3749040" cy="1343349"/>
           </a:xfrm>
           <a:prstGeom prst="rect">
             <a:avLst/>
@@ -9913,8 +11849,8 @@
         </p:blipFill>
         <p:spPr>
           <a:xfrm>
-            <a:off x="7091172" y="3473780"/>
-            <a:ext cx="3749040" cy="1373480"/>
+            <a:off x="7091172" y="3488846"/>
+            <a:ext cx="3749040" cy="1343349"/>
           </a:xfrm>
           <a:prstGeom prst="rect">
             <a:avLst/>
@@ -10187,8 +12123,8 @@
         </p:blipFill>
         <p:spPr>
           <a:xfrm>
-            <a:off x="1348740" y="3473780"/>
-            <a:ext cx="3749040" cy="1373480"/>
+            <a:off x="1348740" y="3488846"/>
+            <a:ext cx="3749040" cy="1343349"/>
           </a:xfrm>
           <a:prstGeom prst="rect">
             <a:avLst/>
@@ -10274,8 +12210,8 @@
         </p:blipFill>
         <p:spPr>
           <a:xfrm>
-            <a:off x="7091172" y="3473780"/>
-            <a:ext cx="3749040" cy="1373480"/>
+            <a:off x="7091172" y="3488846"/>
+            <a:ext cx="3749040" cy="1343349"/>
           </a:xfrm>
           <a:prstGeom prst="rect">
             <a:avLst/>
@@ -10548,8 +12484,8 @@
         </p:blipFill>
         <p:spPr>
           <a:xfrm>
-            <a:off x="1348740" y="3473780"/>
-            <a:ext cx="3749040" cy="1373480"/>
+            <a:off x="1348740" y="3488846"/>
+            <a:ext cx="3749040" cy="1343349"/>
           </a:xfrm>
           <a:prstGeom prst="rect">
             <a:avLst/>
@@ -10635,8 +12571,8 @@
         </p:blipFill>
         <p:spPr>
           <a:xfrm>
-            <a:off x="7091172" y="3473780"/>
-            <a:ext cx="3749040" cy="1373480"/>
+            <a:off x="7091172" y="3488846"/>
+            <a:ext cx="3749040" cy="1343349"/>
           </a:xfrm>
           <a:prstGeom prst="rect">
             <a:avLst/>
